--- a/output/wordlabs-inspire-3day.pptx
+++ b/output/wordlabs-inspire-3day.pptx
@@ -4240,7 +4240,7 @@
                 <a:ea typeface="Calibri" pitchFamily="34" charset="-122"/>
                 <a:cs typeface="Calibri" pitchFamily="34" charset="-120"/>
               </a:rPr>
-              <a:t>"to breathe life or ideas"</a:t>
+              <a:t>"breathe life or feeling into"</a:t>
             </a:r>
             <a:endParaRPr lang="en-US" sz="2200" dirty="0"/>
           </a:p>
@@ -5288,7 +5288,7 @@
                 <a:ea typeface="Calibri" pitchFamily="34" charset="-122"/>
                 <a:cs typeface="Calibri" pitchFamily="34" charset="-120"/>
               </a:rPr>
-              <a:t>Word Labs  •  wordlabs.app  •  Root: 'inspire' = to breathe life or ideas</a:t>
+              <a:t>Word Labs  •  wordlabs.app  •  Root: 'inspire' = breathe life or feeling into</a:t>
             </a:r>
             <a:endParaRPr lang="en-US" sz="800" dirty="0"/>
           </a:p>
@@ -5928,7 +5928,7 @@
                 <a:ea typeface="Calibri" pitchFamily="34" charset="-122"/>
                 <a:cs typeface="Calibri" pitchFamily="34" charset="-120"/>
               </a:rPr>
-              <a:t>Word Labs  •  wordlabs.app  •  Root: 'inspire' = to breathe life or ideas</a:t>
+              <a:t>Word Labs  •  wordlabs.app  •  Root: 'inspire' = breathe life or feeling into</a:t>
             </a:r>
             <a:endParaRPr lang="en-US" sz="800" dirty="0"/>
           </a:p>
@@ -6040,7 +6040,7 @@
                 <a:ea typeface="Calibri" pitchFamily="34" charset="-122"/>
                 <a:cs typeface="Calibri" pitchFamily="34" charset="-120"/>
               </a:rPr>
-              <a:t>The </a:t>
+              <a:t>The coach's </a:t>
             </a:r>
             <a:pPr algn="l" indent="0" marL="0">
               <a:buNone/>
@@ -6071,7 +6071,7 @@
                 <a:ea typeface="Calibri" pitchFamily="34" charset="-122"/>
                 <a:cs typeface="Calibri" pitchFamily="34" charset="-120"/>
               </a:rPr>
-              <a:t> mural in the school hall was painted by an artist who wanted to be an </a:t>
+              <a:t> words left every player feeling </a:t>
             </a:r>
             <a:pPr algn="l" indent="0" marL="0">
               <a:buNone/>
@@ -6088,7 +6088,7 @@
                 <a:ea typeface="Calibri" pitchFamily="34" charset="-122"/>
                 <a:cs typeface="Calibri" pitchFamily="34" charset="-120"/>
               </a:rPr>
-              <a:t>inspiration</a:t>
+              <a:t>inspired</a:t>
             </a:r>
             <a:pPr algn="l" indent="0" marL="0">
               <a:buNone/>
@@ -6102,7 +6102,7 @@
                 <a:ea typeface="Calibri" pitchFamily="34" charset="-122"/>
                 <a:cs typeface="Calibri" pitchFamily="34" charset="-120"/>
               </a:rPr>
-              <a:t> to young students.</a:t>
+              <a:t> before the big match.</a:t>
             </a:r>
             <a:endParaRPr lang="en-US" sz="1800" dirty="0"/>
           </a:p>
@@ -6385,7 +6385,7 @@
                 <a:ea typeface="Trebuchet MS" pitchFamily="34" charset="-122"/>
                 <a:cs typeface="Trebuchet MS" pitchFamily="34" charset="-120"/>
               </a:rPr>
-              <a:t>inspiration</a:t>
+              <a:t>inspired</a:t>
             </a:r>
             <a:endParaRPr lang="en-US" sz="1400" dirty="0"/>
           </a:p>
@@ -6716,7 +6716,7 @@
                 <a:ea typeface="Calibri" pitchFamily="34" charset="-122"/>
                 <a:cs typeface="Calibri" pitchFamily="34" charset="-120"/>
               </a:rPr>
-              <a:t>Word Labs  •  wordlabs.app  •  Root: 'inspire' = to breathe life or ideas</a:t>
+              <a:t>Word Labs  •  wordlabs.app  •  Root: 'inspire' = breathe life or feeling into</a:t>
             </a:r>
             <a:endParaRPr lang="en-US" sz="800" dirty="0"/>
           </a:p>
@@ -7543,7 +7543,7 @@
                 <a:ea typeface="Calibri" pitchFamily="34" charset="-122"/>
                 <a:cs typeface="Calibri" pitchFamily="34" charset="-120"/>
               </a:rPr>
-              <a:t>Word Labs  •  wordlabs.app  •  Root: 'inspire' = to breathe life or ideas</a:t>
+              <a:t>Word Labs  •  wordlabs.app  •  Root: 'inspire' = breathe life or feeling into</a:t>
             </a:r>
             <a:endParaRPr lang="en-US" sz="800" dirty="0"/>
           </a:p>
@@ -7860,7 +7860,7 @@
                 <a:ea typeface="Calibri" pitchFamily="34" charset="-122"/>
                 <a:cs typeface="Calibri" pitchFamily="34" charset="-120"/>
               </a:rPr>
-              <a:t>to breathe life or ideas into</a:t>
+              <a:t>breathe life or feeling into</a:t>
             </a:r>
             <a:endParaRPr lang="en-US" sz="850" dirty="0"/>
           </a:p>
@@ -7899,7 +7899,7 @@
                 <a:ea typeface="Calibri" pitchFamily="34" charset="-122"/>
                 <a:cs typeface="Calibri" pitchFamily="34" charset="-120"/>
               </a:rPr>
-              <a:t>'e' dropped before vowel suffix</a:t>
+              <a:t>base drops 'e' before vowel suffix</a:t>
             </a:r>
             <a:endParaRPr lang="en-US" sz="700" dirty="0"/>
           </a:p>
@@ -8011,7 +8011,7 @@
                 <a:ea typeface="Calibri" pitchFamily="34" charset="-122"/>
                 <a:cs typeface="Calibri" pitchFamily="34" charset="-120"/>
               </a:rPr>
-              <a:t>ongoing action or describing word</a:t>
+              <a:t>happening right now / doing</a:t>
             </a:r>
             <a:endParaRPr lang="en-US" sz="850" dirty="0"/>
           </a:p>
@@ -8567,7 +8567,7 @@
                 <a:ea typeface="Calibri" pitchFamily="34" charset="-122"/>
                 <a:cs typeface="Calibri" pitchFamily="34" charset="-120"/>
               </a:rPr>
-              <a:t>Word Labs  •  wordlabs.app  •  Root: 'inspire' = to breathe life or ideas</a:t>
+              <a:t>Word Labs  •  wordlabs.app  •  Root: 'inspire' = breathe life or feeling into</a:t>
             </a:r>
             <a:endParaRPr lang="en-US" sz="800" dirty="0"/>
           </a:p>
@@ -8884,7 +8884,7 @@
                 <a:ea typeface="Calibri" pitchFamily="34" charset="-122"/>
                 <a:cs typeface="Calibri" pitchFamily="34" charset="-120"/>
               </a:rPr>
-              <a:t>to breathe life or ideas into</a:t>
+              <a:t>breathe life or feeling into</a:t>
             </a:r>
             <a:endParaRPr lang="en-US" sz="850" dirty="0"/>
           </a:p>
@@ -8923,7 +8923,7 @@
                 <a:ea typeface="Calibri" pitchFamily="34" charset="-122"/>
                 <a:cs typeface="Calibri" pitchFamily="34" charset="-120"/>
               </a:rPr>
-              <a:t>'e' dropped before vowel suffix</a:t>
+              <a:t>base drops 'e' before vowel suffix</a:t>
             </a:r>
             <a:endParaRPr lang="en-US" sz="700" dirty="0"/>
           </a:p>
@@ -9035,7 +9035,7 @@
                 <a:ea typeface="Calibri" pitchFamily="34" charset="-122"/>
                 <a:cs typeface="Calibri" pitchFamily="34" charset="-120"/>
               </a:rPr>
-              <a:t>ongoing action or describing word</a:t>
+              <a:t>happening right now / doing</a:t>
             </a:r>
             <a:endParaRPr lang="en-US" sz="850" dirty="0"/>
           </a:p>
@@ -9828,7 +9828,7 @@
                 <a:ea typeface="Calibri" pitchFamily="34" charset="-122"/>
                 <a:cs typeface="Calibri" pitchFamily="34" charset="-120"/>
               </a:rPr>
-              <a:t>Word Labs  •  wordlabs.app  •  Root: 'inspire' = to breathe life or ideas</a:t>
+              <a:t>Word Labs  •  wordlabs.app  •  Root: 'inspire' = breathe life or feeling into</a:t>
             </a:r>
             <a:endParaRPr lang="en-US" sz="800" dirty="0"/>
           </a:p>
@@ -10145,7 +10145,7 @@
                 <a:ea typeface="Calibri" pitchFamily="34" charset="-122"/>
                 <a:cs typeface="Calibri" pitchFamily="34" charset="-120"/>
               </a:rPr>
-              <a:t>to breathe life or ideas into</a:t>
+              <a:t>breathe life or feeling into</a:t>
             </a:r>
             <a:endParaRPr lang="en-US" sz="850" dirty="0"/>
           </a:p>
@@ -10184,7 +10184,7 @@
                 <a:ea typeface="Calibri" pitchFamily="34" charset="-122"/>
                 <a:cs typeface="Calibri" pitchFamily="34" charset="-120"/>
               </a:rPr>
-              <a:t>'e' dropped before vowel suffix</a:t>
+              <a:t>base drops 'e' before vowel suffix</a:t>
             </a:r>
             <a:endParaRPr lang="en-US" sz="700" dirty="0"/>
           </a:p>
@@ -10296,7 +10296,7 @@
                 <a:ea typeface="Calibri" pitchFamily="34" charset="-122"/>
                 <a:cs typeface="Calibri" pitchFamily="34" charset="-120"/>
               </a:rPr>
-              <a:t>ongoing action or describing word</a:t>
+              <a:t>happening right now / doing</a:t>
             </a:r>
             <a:endParaRPr lang="en-US" sz="850" dirty="0"/>
           </a:p>
@@ -11380,7 +11380,7 @@
                 <a:ea typeface="Calibri" pitchFamily="34" charset="-122"/>
                 <a:cs typeface="Calibri" pitchFamily="34" charset="-120"/>
               </a:rPr>
-              <a:t>Word Labs  •  wordlabs.app  •  Root: 'inspire' = to breathe life or ideas</a:t>
+              <a:t>Word Labs  •  wordlabs.app  •  Root: 'inspire' = breathe life or feeling into</a:t>
             </a:r>
             <a:endParaRPr lang="en-US" sz="800" dirty="0"/>
           </a:p>
@@ -11519,7 +11519,7 @@
                 <a:ea typeface="Trebuchet MS" pitchFamily="34" charset="-122"/>
                 <a:cs typeface="Trebuchet MS" pitchFamily="34" charset="-120"/>
               </a:rPr>
-              <a:t>inspiration</a:t>
+              <a:t>inspired</a:t>
             </a:r>
             <a:endParaRPr lang="en-US" sz="2800" dirty="0"/>
           </a:p>
@@ -12207,7 +12207,7 @@
                 <a:ea typeface="Calibri" pitchFamily="34" charset="-122"/>
                 <a:cs typeface="Calibri" pitchFamily="34" charset="-120"/>
               </a:rPr>
-              <a:t>Word Labs  •  wordlabs.app  •  Root: 'inspire' = to breathe life or ideas</a:t>
+              <a:t>Word Labs  •  wordlabs.app  •  Root: 'inspire' = breathe life or feeling into</a:t>
             </a:r>
             <a:endParaRPr lang="en-US" sz="800" dirty="0"/>
           </a:p>
@@ -12346,7 +12346,7 @@
                 <a:ea typeface="Trebuchet MS" pitchFamily="34" charset="-122"/>
                 <a:cs typeface="Trebuchet MS" pitchFamily="34" charset="-120"/>
               </a:rPr>
-              <a:t>inspiration</a:t>
+              <a:t>inspired</a:t>
             </a:r>
             <a:endParaRPr lang="en-US" sz="2800" dirty="0"/>
           </a:p>
@@ -12524,7 +12524,7 @@
                 <a:ea typeface="Calibri" pitchFamily="34" charset="-122"/>
                 <a:cs typeface="Calibri" pitchFamily="34" charset="-120"/>
               </a:rPr>
-              <a:t>to breathe life or ideas into</a:t>
+              <a:t>breathe life or feeling into</a:t>
             </a:r>
             <a:endParaRPr lang="en-US" sz="850" dirty="0"/>
           </a:p>
@@ -12563,7 +12563,7 @@
                 <a:ea typeface="Calibri" pitchFamily="34" charset="-122"/>
                 <a:cs typeface="Calibri" pitchFamily="34" charset="-120"/>
               </a:rPr>
-              <a:t>'e' dropped before vowel suffix</a:t>
+              <a:t>base drops 'e' before vowel suffix</a:t>
             </a:r>
             <a:endParaRPr lang="en-US" sz="700" dirty="0"/>
           </a:p>
@@ -12636,7 +12636,7 @@
                 <a:ea typeface="Trebuchet MS" pitchFamily="34" charset="-122"/>
                 <a:cs typeface="Trebuchet MS" pitchFamily="34" charset="-120"/>
               </a:rPr>
-              <a:t>ation</a:t>
+              <a:t>ed</a:t>
             </a:r>
             <a:endParaRPr lang="en-US" sz="1300" dirty="0"/>
           </a:p>
@@ -12675,7 +12675,7 @@
                 <a:ea typeface="Calibri" pitchFamily="34" charset="-122"/>
                 <a:cs typeface="Calibri" pitchFamily="34" charset="-120"/>
               </a:rPr>
-              <a:t>the state or result of an action</a:t>
+              <a:t>in the past / having been done</a:t>
             </a:r>
             <a:endParaRPr lang="en-US" sz="850" dirty="0"/>
           </a:p>
@@ -13231,7 +13231,7 @@
                 <a:ea typeface="Calibri" pitchFamily="34" charset="-122"/>
                 <a:cs typeface="Calibri" pitchFamily="34" charset="-120"/>
               </a:rPr>
-              <a:t>Word Labs  •  wordlabs.app  •  Root: 'inspire' = to breathe life or ideas</a:t>
+              <a:t>Word Labs  •  wordlabs.app  •  Root: 'inspire' = breathe life or feeling into</a:t>
             </a:r>
             <a:endParaRPr lang="en-US" sz="800" dirty="0"/>
           </a:p>
@@ -13370,7 +13370,7 @@
                 <a:ea typeface="Trebuchet MS" pitchFamily="34" charset="-122"/>
                 <a:cs typeface="Trebuchet MS" pitchFamily="34" charset="-120"/>
               </a:rPr>
-              <a:t>inspiration</a:t>
+              <a:t>inspired</a:t>
             </a:r>
             <a:endParaRPr lang="en-US" sz="2800" dirty="0"/>
           </a:p>
@@ -13548,7 +13548,7 @@
                 <a:ea typeface="Calibri" pitchFamily="34" charset="-122"/>
                 <a:cs typeface="Calibri" pitchFamily="34" charset="-120"/>
               </a:rPr>
-              <a:t>to breathe life or ideas into</a:t>
+              <a:t>breathe life or feeling into</a:t>
             </a:r>
             <a:endParaRPr lang="en-US" sz="850" dirty="0"/>
           </a:p>
@@ -13587,7 +13587,7 @@
                 <a:ea typeface="Calibri" pitchFamily="34" charset="-122"/>
                 <a:cs typeface="Calibri" pitchFamily="34" charset="-120"/>
               </a:rPr>
-              <a:t>'e' dropped before vowel suffix</a:t>
+              <a:t>base drops 'e' before vowel suffix</a:t>
             </a:r>
             <a:endParaRPr lang="en-US" sz="700" dirty="0"/>
           </a:p>
@@ -13660,7 +13660,7 @@
                 <a:ea typeface="Trebuchet MS" pitchFamily="34" charset="-122"/>
                 <a:cs typeface="Trebuchet MS" pitchFamily="34" charset="-120"/>
               </a:rPr>
-              <a:t>ation</a:t>
+              <a:t>ed</a:t>
             </a:r>
             <a:endParaRPr lang="en-US" sz="1300" dirty="0"/>
           </a:p>
@@ -13699,7 +13699,7 @@
                 <a:ea typeface="Calibri" pitchFamily="34" charset="-122"/>
                 <a:cs typeface="Calibri" pitchFamily="34" charset="-120"/>
               </a:rPr>
-              <a:t>the state or result of an action</a:t>
+              <a:t>in the past / having been done</a:t>
             </a:r>
             <a:endParaRPr lang="en-US" sz="850" dirty="0"/>
           </a:p>
@@ -13806,8 +13806,8 @@
         </p:nvSpPr>
         <p:spPr>
           <a:xfrm>
-            <a:off x="1975104" y="3364992"/>
-            <a:ext cx="1554480" cy="475488"/>
+            <a:off x="2999232" y="3364992"/>
+            <a:ext cx="1645920" cy="475488"/>
           </a:xfrm>
           <a:prstGeom prst="rect">
             <a:avLst>
@@ -13833,8 +13833,8 @@
         </p:nvSpPr>
         <p:spPr>
           <a:xfrm>
-            <a:off x="1975104" y="3364992"/>
-            <a:ext cx="1554480" cy="475488"/>
+            <a:off x="2999232" y="3364992"/>
+            <a:ext cx="1645920" cy="475488"/>
           </a:xfrm>
           <a:prstGeom prst="rect">
             <a:avLst/>
@@ -13872,8 +13872,8 @@
         </p:nvSpPr>
         <p:spPr>
           <a:xfrm>
-            <a:off x="3529584" y="3364992"/>
-            <a:ext cx="73152" cy="475488"/>
+            <a:off x="4645152" y="3364992"/>
+            <a:ext cx="1097280" cy="475488"/>
           </a:xfrm>
           <a:prstGeom prst="rect">
             <a:avLst/>
@@ -13911,8 +13911,8 @@
         </p:nvSpPr>
         <p:spPr>
           <a:xfrm>
-            <a:off x="3602736" y="3364992"/>
-            <a:ext cx="1554480" cy="475488"/>
+            <a:off x="5742432" y="3364992"/>
+            <a:ext cx="1645920" cy="475488"/>
           </a:xfrm>
           <a:prstGeom prst="rect">
             <a:avLst>
@@ -13938,8 +13938,8 @@
         </p:nvSpPr>
         <p:spPr>
           <a:xfrm>
-            <a:off x="3602736" y="3364992"/>
-            <a:ext cx="1554480" cy="475488"/>
+            <a:off x="5742432" y="3364992"/>
+            <a:ext cx="1645920" cy="475488"/>
           </a:xfrm>
           <a:prstGeom prst="rect">
             <a:avLst/>
@@ -13963,7 +13963,7 @@
                 <a:ea typeface="Trebuchet MS" pitchFamily="34" charset="-122"/>
                 <a:cs typeface="Trebuchet MS" pitchFamily="34" charset="-120"/>
               </a:rPr>
-              <a:t>spi</a:t>
+              <a:t>spired</a:t>
             </a:r>
             <a:endParaRPr lang="en-US" sz="1400" dirty="0"/>
           </a:p>
@@ -13971,224 +13971,80 @@
       </p:sp>
       <p:sp>
         <p:nvSpPr>
-          <p:cNvPr id="31" name="Text 29"/>
-          <p:cNvSpPr/>
-          <p:nvPr/>
-        </p:nvSpPr>
-        <p:spPr>
-          <a:xfrm>
-            <a:off x="5157216" y="3364992"/>
-            <a:ext cx="73152" cy="475488"/>
-          </a:xfrm>
-          <a:prstGeom prst="rect">
-            <a:avLst/>
-          </a:prstGeom>
-          <a:noFill/>
-          <a:ln/>
-        </p:spPr>
-        <p:txBody>
-          <a:bodyPr wrap="square" lIns="0" tIns="0" rIns="0" bIns="0" rtlCol="0" anchor="ctr"/>
-          <a:lstStyle/>
-          <a:p>
-            <a:pPr algn="ctr" indent="0" marL="0">
-              <a:buNone/>
-            </a:pPr>
-            <a:r>
-              <a:rPr lang="en-US" sz="1600" b="1" dirty="0">
-                <a:solidFill>
-                  <a:srgbClr val="0D9488"/>
+          <p:cNvPr id="31" name="Shape 29"/>
+          <p:cNvSpPr/>
+          <p:nvPr/>
+        </p:nvSpPr>
+        <p:spPr>
+          <a:xfrm>
+            <a:off x="365760" y="4096512"/>
+            <a:ext cx="1371600" cy="804672"/>
+          </a:xfrm>
+          <a:prstGeom prst="rect">
+            <a:avLst>
+              <a:gd name="adj" fmla="val 6818"/>
+            </a:avLst>
+          </a:prstGeom>
+          <a:solidFill>
+            <a:srgbClr val="E2E8F0"/>
+          </a:solidFill>
+          <a:ln w="12700">
+            <a:solidFill>
+              <a:srgbClr val="E2E8F0"/>
+            </a:solidFill>
+            <a:prstDash val="solid"/>
+          </a:ln>
+        </p:spPr>
+      </p:sp>
+      <p:sp>
+        <p:nvSpPr>
+          <p:cNvPr id="32" name="Text 30"/>
+          <p:cNvSpPr/>
+          <p:nvPr/>
+        </p:nvSpPr>
+        <p:spPr>
+          <a:xfrm>
+            <a:off x="365760" y="4096512"/>
+            <a:ext cx="1371600" cy="804672"/>
+          </a:xfrm>
+          <a:prstGeom prst="rect">
+            <a:avLst/>
+          </a:prstGeom>
+          <a:noFill/>
+          <a:ln/>
+        </p:spPr>
+        <p:txBody>
+          <a:bodyPr wrap="square" lIns="0" tIns="0" rIns="0" bIns="0" rtlCol="0" anchor="ctr"/>
+          <a:lstStyle/>
+          <a:p>
+            <a:pPr algn="ctr" indent="0" marL="0">
+              <a:buNone/>
+            </a:pPr>
+            <a:r>
+              <a:rPr lang="en-US" sz="1100" b="1" dirty="0">
+                <a:solidFill>
+                  <a:srgbClr val="475569"/>
                 </a:solidFill>
                 <a:latin typeface="Trebuchet MS" pitchFamily="34" charset="0"/>
                 <a:ea typeface="Trebuchet MS" pitchFamily="34" charset="-122"/>
                 <a:cs typeface="Trebuchet MS" pitchFamily="34" charset="-120"/>
               </a:rPr>
-              <a:t>·</a:t>
-            </a:r>
-            <a:endParaRPr lang="en-US" sz="1600" dirty="0"/>
-          </a:p>
-        </p:txBody>
-      </p:sp>
-      <p:sp>
-        <p:nvSpPr>
-          <p:cNvPr id="32" name="Shape 30"/>
-          <p:cNvSpPr/>
-          <p:nvPr/>
-        </p:nvSpPr>
-        <p:spPr>
-          <a:xfrm>
-            <a:off x="5230368" y="3364992"/>
-            <a:ext cx="1554480" cy="475488"/>
-          </a:xfrm>
-          <a:prstGeom prst="rect">
-            <a:avLst>
-              <a:gd name="adj" fmla="val 9615"/>
-            </a:avLst>
-          </a:prstGeom>
-          <a:solidFill>
-            <a:srgbClr val="FFFFFF"/>
-          </a:solidFill>
-          <a:ln w="12700">
-            <a:solidFill>
-              <a:srgbClr val="0D9488"/>
-            </a:solidFill>
-            <a:prstDash val="solid"/>
-          </a:ln>
-        </p:spPr>
-      </p:sp>
-      <p:sp>
-        <p:nvSpPr>
-          <p:cNvPr id="33" name="Text 31"/>
-          <p:cNvSpPr/>
-          <p:nvPr/>
-        </p:nvSpPr>
-        <p:spPr>
-          <a:xfrm>
-            <a:off x="5230368" y="3364992"/>
-            <a:ext cx="1554480" cy="475488"/>
-          </a:xfrm>
-          <a:prstGeom prst="rect">
-            <a:avLst/>
-          </a:prstGeom>
-          <a:noFill/>
-          <a:ln/>
-        </p:spPr>
-        <p:txBody>
-          <a:bodyPr wrap="square" lIns="0" tIns="0" rIns="0" bIns="0" rtlCol="0" anchor="ctr"/>
-          <a:lstStyle/>
-          <a:p>
-            <a:pPr algn="ctr" indent="0" marL="0">
-              <a:buNone/>
-            </a:pPr>
-            <a:r>
-              <a:rPr lang="en-US" sz="1400" b="1" dirty="0">
-                <a:solidFill>
-                  <a:srgbClr val="0D9488"/>
-                </a:solidFill>
-                <a:latin typeface="Trebuchet MS" pitchFamily="34" charset="0"/>
-                <a:ea typeface="Trebuchet MS" pitchFamily="34" charset="-122"/>
-                <a:cs typeface="Trebuchet MS" pitchFamily="34" charset="-120"/>
-              </a:rPr>
-              <a:t>ra</a:t>
-            </a:r>
-            <a:endParaRPr lang="en-US" sz="1400" dirty="0"/>
-          </a:p>
-        </p:txBody>
-      </p:sp>
-      <p:sp>
-        <p:nvSpPr>
-          <p:cNvPr id="34" name="Text 32"/>
-          <p:cNvSpPr/>
-          <p:nvPr/>
-        </p:nvSpPr>
-        <p:spPr>
-          <a:xfrm>
-            <a:off x="6784848" y="3364992"/>
-            <a:ext cx="73152" cy="475488"/>
-          </a:xfrm>
-          <a:prstGeom prst="rect">
-            <a:avLst/>
-          </a:prstGeom>
-          <a:noFill/>
-          <a:ln/>
-        </p:spPr>
-        <p:txBody>
-          <a:bodyPr wrap="square" lIns="0" tIns="0" rIns="0" bIns="0" rtlCol="0" anchor="ctr"/>
-          <a:lstStyle/>
-          <a:p>
-            <a:pPr algn="ctr" indent="0" marL="0">
-              <a:buNone/>
-            </a:pPr>
-            <a:r>
-              <a:rPr lang="en-US" sz="1600" b="1" dirty="0">
-                <a:solidFill>
-                  <a:srgbClr val="0D9488"/>
-                </a:solidFill>
-                <a:latin typeface="Trebuchet MS" pitchFamily="34" charset="0"/>
-                <a:ea typeface="Trebuchet MS" pitchFamily="34" charset="-122"/>
-                <a:cs typeface="Trebuchet MS" pitchFamily="34" charset="-120"/>
-              </a:rPr>
-              <a:t>·</a:t>
-            </a:r>
-            <a:endParaRPr lang="en-US" sz="1600" dirty="0"/>
-          </a:p>
-        </p:txBody>
-      </p:sp>
-      <p:sp>
-        <p:nvSpPr>
-          <p:cNvPr id="35" name="Shape 33"/>
-          <p:cNvSpPr/>
-          <p:nvPr/>
-        </p:nvSpPr>
-        <p:spPr>
-          <a:xfrm>
-            <a:off x="6858000" y="3364992"/>
-            <a:ext cx="1554480" cy="475488"/>
-          </a:xfrm>
-          <a:prstGeom prst="rect">
-            <a:avLst>
-              <a:gd name="adj" fmla="val 9615"/>
-            </a:avLst>
-          </a:prstGeom>
-          <a:solidFill>
-            <a:srgbClr val="FFFFFF"/>
-          </a:solidFill>
-          <a:ln w="12700">
-            <a:solidFill>
-              <a:srgbClr val="0D9488"/>
-            </a:solidFill>
-            <a:prstDash val="solid"/>
-          </a:ln>
-        </p:spPr>
-      </p:sp>
-      <p:sp>
-        <p:nvSpPr>
-          <p:cNvPr id="36" name="Text 34"/>
-          <p:cNvSpPr/>
-          <p:nvPr/>
-        </p:nvSpPr>
-        <p:spPr>
-          <a:xfrm>
-            <a:off x="6858000" y="3364992"/>
-            <a:ext cx="1554480" cy="475488"/>
-          </a:xfrm>
-          <a:prstGeom prst="rect">
-            <a:avLst/>
-          </a:prstGeom>
-          <a:noFill/>
-          <a:ln/>
-        </p:spPr>
-        <p:txBody>
-          <a:bodyPr wrap="square" lIns="0" tIns="0" rIns="0" bIns="0" rtlCol="0" anchor="ctr"/>
-          <a:lstStyle/>
-          <a:p>
-            <a:pPr algn="ctr" indent="0" marL="0">
-              <a:buNone/>
-            </a:pPr>
-            <a:r>
-              <a:rPr lang="en-US" sz="1400" b="1" dirty="0">
-                <a:solidFill>
-                  <a:srgbClr val="0D9488"/>
-                </a:solidFill>
-                <a:latin typeface="Trebuchet MS" pitchFamily="34" charset="0"/>
-                <a:ea typeface="Trebuchet MS" pitchFamily="34" charset="-122"/>
-                <a:cs typeface="Trebuchet MS" pitchFamily="34" charset="-120"/>
-              </a:rPr>
-              <a:t>tion</a:t>
-            </a:r>
-            <a:endParaRPr lang="en-US" sz="1400" dirty="0"/>
-          </a:p>
-        </p:txBody>
-      </p:sp>
-      <p:sp>
-        <p:nvSpPr>
-          <p:cNvPr id="37" name="Shape 35"/>
-          <p:cNvSpPr/>
-          <p:nvPr/>
-        </p:nvSpPr>
-        <p:spPr>
-          <a:xfrm>
-            <a:off x="365760" y="4096512"/>
-            <a:ext cx="1371600" cy="804672"/>
+              <a:t>Phonemes</a:t>
+            </a:r>
+            <a:endParaRPr lang="en-US" sz="1100" dirty="0"/>
+          </a:p>
+        </p:txBody>
+      </p:sp>
+      <p:sp>
+        <p:nvSpPr>
+          <p:cNvPr id="33" name="Shape 31"/>
+          <p:cNvSpPr/>
+          <p:nvPr/>
+        </p:nvSpPr>
+        <p:spPr>
+          <a:xfrm>
+            <a:off x="1874520" y="4096512"/>
+            <a:ext cx="6903720" cy="804672"/>
           </a:xfrm>
           <a:prstGeom prst="rect">
             <a:avLst>
@@ -14196,85 +14052,19 @@
             </a:avLst>
           </a:prstGeom>
           <a:solidFill>
-            <a:srgbClr val="E2E8F0"/>
+            <a:srgbClr val="F8FAFC"/>
           </a:solidFill>
           <a:ln w="12700">
             <a:solidFill>
               <a:srgbClr val="E2E8F0"/>
             </a:solidFill>
-            <a:prstDash val="solid"/>
-          </a:ln>
-        </p:spPr>
-      </p:sp>
-      <p:sp>
-        <p:nvSpPr>
-          <p:cNvPr id="38" name="Text 36"/>
-          <p:cNvSpPr/>
-          <p:nvPr/>
-        </p:nvSpPr>
-        <p:spPr>
-          <a:xfrm>
-            <a:off x="365760" y="4096512"/>
-            <a:ext cx="1371600" cy="804672"/>
-          </a:xfrm>
-          <a:prstGeom prst="rect">
-            <a:avLst/>
-          </a:prstGeom>
-          <a:noFill/>
-          <a:ln/>
-        </p:spPr>
-        <p:txBody>
-          <a:bodyPr wrap="square" lIns="0" tIns="0" rIns="0" bIns="0" rtlCol="0" anchor="ctr"/>
-          <a:lstStyle/>
-          <a:p>
-            <a:pPr algn="ctr" indent="0" marL="0">
-              <a:buNone/>
-            </a:pPr>
-            <a:r>
-              <a:rPr lang="en-US" sz="1100" b="1" dirty="0">
-                <a:solidFill>
-                  <a:srgbClr val="475569"/>
-                </a:solidFill>
-                <a:latin typeface="Trebuchet MS" pitchFamily="34" charset="0"/>
-                <a:ea typeface="Trebuchet MS" pitchFamily="34" charset="-122"/>
-                <a:cs typeface="Trebuchet MS" pitchFamily="34" charset="-120"/>
-              </a:rPr>
-              <a:t>Phonemes</a:t>
-            </a:r>
-            <a:endParaRPr lang="en-US" sz="1100" dirty="0"/>
-          </a:p>
-        </p:txBody>
-      </p:sp>
-      <p:sp>
-        <p:nvSpPr>
-          <p:cNvPr id="39" name="Shape 37"/>
-          <p:cNvSpPr/>
-          <p:nvPr/>
-        </p:nvSpPr>
-        <p:spPr>
-          <a:xfrm>
-            <a:off x="1874520" y="4096512"/>
-            <a:ext cx="6903720" cy="804672"/>
-          </a:xfrm>
-          <a:prstGeom prst="rect">
-            <a:avLst>
-              <a:gd name="adj" fmla="val 6818"/>
-            </a:avLst>
-          </a:prstGeom>
-          <a:solidFill>
-            <a:srgbClr val="F8FAFC"/>
-          </a:solidFill>
-          <a:ln w="12700">
-            <a:solidFill>
-              <a:srgbClr val="E2E8F0"/>
-            </a:solidFill>
             <a:prstDash val="dash"/>
           </a:ln>
         </p:spPr>
       </p:sp>
       <p:sp>
         <p:nvSpPr>
-          <p:cNvPr id="40" name="Text 38"/>
+          <p:cNvPr id="34" name="Text 32"/>
           <p:cNvSpPr/>
           <p:nvPr/>
         </p:nvSpPr>
@@ -14506,7 +14296,7 @@
                 <a:ea typeface="Calibri" pitchFamily="34" charset="-122"/>
                 <a:cs typeface="Calibri" pitchFamily="34" charset="-120"/>
               </a:rPr>
-              <a:t>Root 'inspire' — to breathe life or ideas</a:t>
+              <a:t>Root 'inspire' — breathe life or feeling into</a:t>
             </a:r>
             <a:endParaRPr lang="en-US" sz="1600" dirty="0"/>
           </a:p>
@@ -14862,7 +14652,7 @@
                 <a:ea typeface="Calibri" pitchFamily="34" charset="-122"/>
                 <a:cs typeface="Calibri" pitchFamily="34" charset="-120"/>
               </a:rPr>
-              <a:t>Word Labs  •  wordlabs.app  •  Root: 'inspire' = to breathe life or ideas</a:t>
+              <a:t>Word Labs  •  wordlabs.app  •  Root: 'inspire' = breathe life or feeling into</a:t>
             </a:r>
             <a:endParaRPr lang="en-US" sz="800" dirty="0"/>
           </a:p>
@@ -15001,7 +14791,7 @@
                 <a:ea typeface="Trebuchet MS" pitchFamily="34" charset="-122"/>
                 <a:cs typeface="Trebuchet MS" pitchFamily="34" charset="-120"/>
               </a:rPr>
-              <a:t>inspiration</a:t>
+              <a:t>inspired</a:t>
             </a:r>
             <a:endParaRPr lang="en-US" sz="2800" dirty="0"/>
           </a:p>
@@ -15179,7 +14969,7 @@
                 <a:ea typeface="Calibri" pitchFamily="34" charset="-122"/>
                 <a:cs typeface="Calibri" pitchFamily="34" charset="-120"/>
               </a:rPr>
-              <a:t>to breathe life or ideas into</a:t>
+              <a:t>breathe life or feeling into</a:t>
             </a:r>
             <a:endParaRPr lang="en-US" sz="850" dirty="0"/>
           </a:p>
@@ -15218,7 +15008,7 @@
                 <a:ea typeface="Calibri" pitchFamily="34" charset="-122"/>
                 <a:cs typeface="Calibri" pitchFamily="34" charset="-120"/>
               </a:rPr>
-              <a:t>'e' dropped before vowel suffix</a:t>
+              <a:t>base drops 'e' before vowel suffix</a:t>
             </a:r>
             <a:endParaRPr lang="en-US" sz="700" dirty="0"/>
           </a:p>
@@ -15291,7 +15081,7 @@
                 <a:ea typeface="Trebuchet MS" pitchFamily="34" charset="-122"/>
                 <a:cs typeface="Trebuchet MS" pitchFamily="34" charset="-120"/>
               </a:rPr>
-              <a:t>ation</a:t>
+              <a:t>ed</a:t>
             </a:r>
             <a:endParaRPr lang="en-US" sz="1300" dirty="0"/>
           </a:p>
@@ -15330,7 +15120,7 @@
                 <a:ea typeface="Calibri" pitchFamily="34" charset="-122"/>
                 <a:cs typeface="Calibri" pitchFamily="34" charset="-120"/>
               </a:rPr>
-              <a:t>the state or result of an action</a:t>
+              <a:t>in the past / having been done</a:t>
             </a:r>
             <a:endParaRPr lang="en-US" sz="850" dirty="0"/>
           </a:p>
@@ -15437,8 +15227,8 @@
         </p:nvSpPr>
         <p:spPr>
           <a:xfrm>
-            <a:off x="1975104" y="3364992"/>
-            <a:ext cx="1554480" cy="475488"/>
+            <a:off x="2999232" y="3364992"/>
+            <a:ext cx="1645920" cy="475488"/>
           </a:xfrm>
           <a:prstGeom prst="rect">
             <a:avLst>
@@ -15464,8 +15254,8 @@
         </p:nvSpPr>
         <p:spPr>
           <a:xfrm>
-            <a:off x="1975104" y="3364992"/>
-            <a:ext cx="1554480" cy="475488"/>
+            <a:off x="2999232" y="3364992"/>
+            <a:ext cx="1645920" cy="475488"/>
           </a:xfrm>
           <a:prstGeom prst="rect">
             <a:avLst/>
@@ -15503,8 +15293,8 @@
         </p:nvSpPr>
         <p:spPr>
           <a:xfrm>
-            <a:off x="3529584" y="3364992"/>
-            <a:ext cx="73152" cy="475488"/>
+            <a:off x="4645152" y="3364992"/>
+            <a:ext cx="1097280" cy="475488"/>
           </a:xfrm>
           <a:prstGeom prst="rect">
             <a:avLst/>
@@ -15542,8 +15332,8 @@
         </p:nvSpPr>
         <p:spPr>
           <a:xfrm>
-            <a:off x="3602736" y="3364992"/>
-            <a:ext cx="1554480" cy="475488"/>
+            <a:off x="5742432" y="3364992"/>
+            <a:ext cx="1645920" cy="475488"/>
           </a:xfrm>
           <a:prstGeom prst="rect">
             <a:avLst>
@@ -15569,8 +15359,8 @@
         </p:nvSpPr>
         <p:spPr>
           <a:xfrm>
-            <a:off x="3602736" y="3364992"/>
-            <a:ext cx="1554480" cy="475488"/>
+            <a:off x="5742432" y="3364992"/>
+            <a:ext cx="1645920" cy="475488"/>
           </a:xfrm>
           <a:prstGeom prst="rect">
             <a:avLst/>
@@ -15594,7 +15384,7 @@
                 <a:ea typeface="Trebuchet MS" pitchFamily="34" charset="-122"/>
                 <a:cs typeface="Trebuchet MS" pitchFamily="34" charset="-120"/>
               </a:rPr>
-              <a:t>spi</a:t>
+              <a:t>spired</a:t>
             </a:r>
             <a:endParaRPr lang="en-US" sz="1400" dirty="0"/>
           </a:p>
@@ -15602,162 +15392,243 @@
       </p:sp>
       <p:sp>
         <p:nvSpPr>
-          <p:cNvPr id="31" name="Text 29"/>
-          <p:cNvSpPr/>
-          <p:nvPr/>
-        </p:nvSpPr>
-        <p:spPr>
-          <a:xfrm>
-            <a:off x="5157216" y="3364992"/>
-            <a:ext cx="73152" cy="475488"/>
-          </a:xfrm>
-          <a:prstGeom prst="rect">
-            <a:avLst/>
-          </a:prstGeom>
-          <a:noFill/>
-          <a:ln/>
-        </p:spPr>
-        <p:txBody>
-          <a:bodyPr wrap="square" lIns="0" tIns="0" rIns="0" bIns="0" rtlCol="0" anchor="ctr"/>
-          <a:lstStyle/>
-          <a:p>
-            <a:pPr algn="ctr" indent="0" marL="0">
-              <a:buNone/>
-            </a:pPr>
-            <a:r>
-              <a:rPr lang="en-US" sz="1600" b="1" dirty="0">
-                <a:solidFill>
-                  <a:srgbClr val="0D9488"/>
+          <p:cNvPr id="31" name="Shape 29"/>
+          <p:cNvSpPr/>
+          <p:nvPr/>
+        </p:nvSpPr>
+        <p:spPr>
+          <a:xfrm>
+            <a:off x="365760" y="4096512"/>
+            <a:ext cx="1371600" cy="804672"/>
+          </a:xfrm>
+          <a:prstGeom prst="rect">
+            <a:avLst>
+              <a:gd name="adj" fmla="val 6818"/>
+            </a:avLst>
+          </a:prstGeom>
+          <a:solidFill>
+            <a:srgbClr val="E2E8F0"/>
+          </a:solidFill>
+          <a:ln w="12700">
+            <a:solidFill>
+              <a:srgbClr val="E2E8F0"/>
+            </a:solidFill>
+            <a:prstDash val="solid"/>
+          </a:ln>
+        </p:spPr>
+      </p:sp>
+      <p:sp>
+        <p:nvSpPr>
+          <p:cNvPr id="32" name="Text 30"/>
+          <p:cNvSpPr/>
+          <p:nvPr/>
+        </p:nvSpPr>
+        <p:spPr>
+          <a:xfrm>
+            <a:off x="365760" y="4096512"/>
+            <a:ext cx="1371600" cy="804672"/>
+          </a:xfrm>
+          <a:prstGeom prst="rect">
+            <a:avLst/>
+          </a:prstGeom>
+          <a:noFill/>
+          <a:ln/>
+        </p:spPr>
+        <p:txBody>
+          <a:bodyPr wrap="square" lIns="0" tIns="0" rIns="0" bIns="0" rtlCol="0" anchor="ctr"/>
+          <a:lstStyle/>
+          <a:p>
+            <a:pPr algn="ctr" indent="0" marL="0">
+              <a:buNone/>
+            </a:pPr>
+            <a:r>
+              <a:rPr lang="en-US" sz="1100" b="1" dirty="0">
+                <a:solidFill>
+                  <a:srgbClr val="475569"/>
                 </a:solidFill>
                 <a:latin typeface="Trebuchet MS" pitchFamily="34" charset="0"/>
                 <a:ea typeface="Trebuchet MS" pitchFamily="34" charset="-122"/>
                 <a:cs typeface="Trebuchet MS" pitchFamily="34" charset="-120"/>
               </a:rPr>
-              <a:t>·</a:t>
-            </a:r>
-            <a:endParaRPr lang="en-US" sz="1600" dirty="0"/>
-          </a:p>
-        </p:txBody>
-      </p:sp>
-      <p:sp>
-        <p:nvSpPr>
-          <p:cNvPr id="32" name="Shape 30"/>
-          <p:cNvSpPr/>
-          <p:nvPr/>
-        </p:nvSpPr>
-        <p:spPr>
-          <a:xfrm>
-            <a:off x="5230368" y="3364992"/>
-            <a:ext cx="1554480" cy="475488"/>
+              <a:t>Phonemes</a:t>
+            </a:r>
+            <a:endParaRPr lang="en-US" sz="1100" dirty="0"/>
+          </a:p>
+        </p:txBody>
+      </p:sp>
+      <p:sp>
+        <p:nvSpPr>
+          <p:cNvPr id="33" name="Shape 31"/>
+          <p:cNvSpPr/>
+          <p:nvPr/>
+        </p:nvSpPr>
+        <p:spPr>
+          <a:xfrm>
+            <a:off x="1874520" y="4096512"/>
+            <a:ext cx="6903720" cy="658368"/>
           </a:xfrm>
           <a:prstGeom prst="rect">
             <a:avLst>
-              <a:gd name="adj" fmla="val 9615"/>
+              <a:gd name="adj" fmla="val 8333"/>
             </a:avLst>
           </a:prstGeom>
           <a:solidFill>
+            <a:srgbClr val="FCE7F3"/>
+          </a:solidFill>
+          <a:ln w="12700">
+            <a:solidFill>
+              <a:srgbClr val="DB2777"/>
+            </a:solidFill>
+            <a:prstDash val="solid"/>
+          </a:ln>
+        </p:spPr>
+      </p:sp>
+      <p:sp>
+        <p:nvSpPr>
+          <p:cNvPr id="34" name="Shape 32"/>
+          <p:cNvSpPr/>
+          <p:nvPr/>
+        </p:nvSpPr>
+        <p:spPr>
+          <a:xfrm>
+            <a:off x="2427732" y="4169664"/>
+            <a:ext cx="685800" cy="475488"/>
+          </a:xfrm>
+          <a:prstGeom prst="rect">
+            <a:avLst>
+              <a:gd name="adj" fmla="val 7692"/>
+            </a:avLst>
+          </a:prstGeom>
+          <a:solidFill>
             <a:srgbClr val="FFFFFF"/>
           </a:solidFill>
           <a:ln w="12700">
             <a:solidFill>
-              <a:srgbClr val="0D9488"/>
-            </a:solidFill>
-            <a:prstDash val="solid"/>
-          </a:ln>
-        </p:spPr>
-      </p:sp>
-      <p:sp>
-        <p:nvSpPr>
-          <p:cNvPr id="33" name="Text 31"/>
-          <p:cNvSpPr/>
-          <p:nvPr/>
-        </p:nvSpPr>
-        <p:spPr>
-          <a:xfrm>
-            <a:off x="5230368" y="3364992"/>
-            <a:ext cx="1554480" cy="475488"/>
-          </a:xfrm>
-          <a:prstGeom prst="rect">
-            <a:avLst/>
-          </a:prstGeom>
-          <a:noFill/>
-          <a:ln/>
-        </p:spPr>
-        <p:txBody>
-          <a:bodyPr wrap="square" lIns="0" tIns="0" rIns="0" bIns="0" rtlCol="0" anchor="ctr"/>
-          <a:lstStyle/>
-          <a:p>
-            <a:pPr algn="ctr" indent="0" marL="0">
-              <a:buNone/>
-            </a:pPr>
-            <a:r>
-              <a:rPr lang="en-US" sz="1400" b="1" dirty="0">
-                <a:solidFill>
-                  <a:srgbClr val="0D9488"/>
+              <a:srgbClr val="DB2777"/>
+            </a:solidFill>
+            <a:prstDash val="solid"/>
+          </a:ln>
+        </p:spPr>
+      </p:sp>
+      <p:sp>
+        <p:nvSpPr>
+          <p:cNvPr id="35" name="Text 33"/>
+          <p:cNvSpPr/>
+          <p:nvPr/>
+        </p:nvSpPr>
+        <p:spPr>
+          <a:xfrm>
+            <a:off x="2427732" y="4169664"/>
+            <a:ext cx="685800" cy="475488"/>
+          </a:xfrm>
+          <a:prstGeom prst="rect">
+            <a:avLst/>
+          </a:prstGeom>
+          <a:noFill/>
+          <a:ln/>
+        </p:spPr>
+        <p:txBody>
+          <a:bodyPr wrap="square" lIns="0" tIns="0" rIns="0" bIns="0" rtlCol="0" anchor="ctr"/>
+          <a:lstStyle/>
+          <a:p>
+            <a:pPr algn="ctr" indent="0" marL="0">
+              <a:buNone/>
+            </a:pPr>
+            <a:r>
+              <a:rPr lang="en-US" sz="900" b="1" dirty="0">
+                <a:solidFill>
+                  <a:srgbClr val="9D174D"/>
                 </a:solidFill>
                 <a:latin typeface="Trebuchet MS" pitchFamily="34" charset="0"/>
                 <a:ea typeface="Trebuchet MS" pitchFamily="34" charset="-122"/>
                 <a:cs typeface="Trebuchet MS" pitchFamily="34" charset="-120"/>
               </a:rPr>
-              <a:t>ra</a:t>
-            </a:r>
-            <a:endParaRPr lang="en-US" sz="1400" dirty="0"/>
-          </a:p>
-        </p:txBody>
-      </p:sp>
-      <p:sp>
-        <p:nvSpPr>
-          <p:cNvPr id="34" name="Text 32"/>
-          <p:cNvSpPr/>
-          <p:nvPr/>
-        </p:nvSpPr>
-        <p:spPr>
-          <a:xfrm>
-            <a:off x="6784848" y="3364992"/>
-            <a:ext cx="73152" cy="475488"/>
-          </a:xfrm>
-          <a:prstGeom prst="rect">
-            <a:avLst/>
-          </a:prstGeom>
-          <a:noFill/>
-          <a:ln/>
-        </p:spPr>
-        <p:txBody>
-          <a:bodyPr wrap="square" lIns="0" tIns="0" rIns="0" bIns="0" rtlCol="0" anchor="ctr"/>
-          <a:lstStyle/>
-          <a:p>
-            <a:pPr algn="ctr" indent="0" marL="0">
-              <a:buNone/>
-            </a:pPr>
-            <a:r>
-              <a:rPr lang="en-US" sz="1600" b="1" dirty="0">
-                <a:solidFill>
-                  <a:srgbClr val="0D9488"/>
+              <a:t>i</a:t>
+            </a:r>
+            <a:endParaRPr lang="en-US" sz="900" dirty="0"/>
+          </a:p>
+        </p:txBody>
+      </p:sp>
+      <p:sp>
+        <p:nvSpPr>
+          <p:cNvPr id="36" name="Shape 34"/>
+          <p:cNvSpPr/>
+          <p:nvPr/>
+        </p:nvSpPr>
+        <p:spPr>
+          <a:xfrm>
+            <a:off x="3639312" y="4169664"/>
+            <a:ext cx="685800" cy="475488"/>
+          </a:xfrm>
+          <a:prstGeom prst="rect">
+            <a:avLst>
+              <a:gd name="adj" fmla="val 7692"/>
+            </a:avLst>
+          </a:prstGeom>
+          <a:solidFill>
+            <a:srgbClr val="FFFFFF"/>
+          </a:solidFill>
+          <a:ln w="12700">
+            <a:solidFill>
+              <a:srgbClr val="DB2777"/>
+            </a:solidFill>
+            <a:prstDash val="solid"/>
+          </a:ln>
+        </p:spPr>
+      </p:sp>
+      <p:sp>
+        <p:nvSpPr>
+          <p:cNvPr id="37" name="Text 35"/>
+          <p:cNvSpPr/>
+          <p:nvPr/>
+        </p:nvSpPr>
+        <p:spPr>
+          <a:xfrm>
+            <a:off x="3639312" y="4169664"/>
+            <a:ext cx="685800" cy="475488"/>
+          </a:xfrm>
+          <a:prstGeom prst="rect">
+            <a:avLst/>
+          </a:prstGeom>
+          <a:noFill/>
+          <a:ln/>
+        </p:spPr>
+        <p:txBody>
+          <a:bodyPr wrap="square" lIns="0" tIns="0" rIns="0" bIns="0" rtlCol="0" anchor="ctr"/>
+          <a:lstStyle/>
+          <a:p>
+            <a:pPr algn="ctr" indent="0" marL="0">
+              <a:buNone/>
+            </a:pPr>
+            <a:r>
+              <a:rPr lang="en-US" sz="900" b="1" dirty="0">
+                <a:solidFill>
+                  <a:srgbClr val="9D174D"/>
                 </a:solidFill>
                 <a:latin typeface="Trebuchet MS" pitchFamily="34" charset="0"/>
                 <a:ea typeface="Trebuchet MS" pitchFamily="34" charset="-122"/>
                 <a:cs typeface="Trebuchet MS" pitchFamily="34" charset="-120"/>
               </a:rPr>
-              <a:t>·</a:t>
-            </a:r>
-            <a:endParaRPr lang="en-US" sz="1600" dirty="0"/>
-          </a:p>
-        </p:txBody>
-      </p:sp>
-      <p:sp>
-        <p:nvSpPr>
-          <p:cNvPr id="35" name="Shape 33"/>
-          <p:cNvSpPr/>
-          <p:nvPr/>
-        </p:nvSpPr>
-        <p:spPr>
-          <a:xfrm>
-            <a:off x="6858000" y="3364992"/>
-            <a:ext cx="1554480" cy="475488"/>
+              <a:t>n</a:t>
+            </a:r>
+            <a:endParaRPr lang="en-US" sz="900" dirty="0"/>
+          </a:p>
+        </p:txBody>
+      </p:sp>
+      <p:sp>
+        <p:nvSpPr>
+          <p:cNvPr id="38" name="Shape 36"/>
+          <p:cNvSpPr/>
+          <p:nvPr/>
+        </p:nvSpPr>
+        <p:spPr>
+          <a:xfrm>
+            <a:off x="4850892" y="4169664"/>
+            <a:ext cx="685800" cy="475488"/>
           </a:xfrm>
           <a:prstGeom prst="rect">
             <a:avLst>
-              <a:gd name="adj" fmla="val 9615"/>
+              <a:gd name="adj" fmla="val 7692"/>
             </a:avLst>
           </a:prstGeom>
           <a:solidFill>
@@ -15765,135 +15636,135 @@
           </a:solidFill>
           <a:ln w="12700">
             <a:solidFill>
-              <a:srgbClr val="0D9488"/>
-            </a:solidFill>
-            <a:prstDash val="solid"/>
-          </a:ln>
-        </p:spPr>
-      </p:sp>
-      <p:sp>
-        <p:nvSpPr>
-          <p:cNvPr id="36" name="Text 34"/>
-          <p:cNvSpPr/>
-          <p:nvPr/>
-        </p:nvSpPr>
-        <p:spPr>
-          <a:xfrm>
-            <a:off x="6858000" y="3364992"/>
-            <a:ext cx="1554480" cy="475488"/>
-          </a:xfrm>
-          <a:prstGeom prst="rect">
-            <a:avLst/>
-          </a:prstGeom>
-          <a:noFill/>
-          <a:ln/>
-        </p:spPr>
-        <p:txBody>
-          <a:bodyPr wrap="square" lIns="0" tIns="0" rIns="0" bIns="0" rtlCol="0" anchor="ctr"/>
-          <a:lstStyle/>
-          <a:p>
-            <a:pPr algn="ctr" indent="0" marL="0">
-              <a:buNone/>
-            </a:pPr>
-            <a:r>
-              <a:rPr lang="en-US" sz="1400" b="1" dirty="0">
-                <a:solidFill>
-                  <a:srgbClr val="0D9488"/>
+              <a:srgbClr val="DB2777"/>
+            </a:solidFill>
+            <a:prstDash val="solid"/>
+          </a:ln>
+        </p:spPr>
+      </p:sp>
+      <p:sp>
+        <p:nvSpPr>
+          <p:cNvPr id="39" name="Text 37"/>
+          <p:cNvSpPr/>
+          <p:nvPr/>
+        </p:nvSpPr>
+        <p:spPr>
+          <a:xfrm>
+            <a:off x="4850892" y="4169664"/>
+            <a:ext cx="685800" cy="475488"/>
+          </a:xfrm>
+          <a:prstGeom prst="rect">
+            <a:avLst/>
+          </a:prstGeom>
+          <a:noFill/>
+          <a:ln/>
+        </p:spPr>
+        <p:txBody>
+          <a:bodyPr wrap="square" lIns="0" tIns="0" rIns="0" bIns="0" rtlCol="0" anchor="ctr"/>
+          <a:lstStyle/>
+          <a:p>
+            <a:pPr algn="ctr" indent="0" marL="0">
+              <a:buNone/>
+            </a:pPr>
+            <a:r>
+              <a:rPr lang="en-US" sz="900" b="1" dirty="0">
+                <a:solidFill>
+                  <a:srgbClr val="9D174D"/>
                 </a:solidFill>
                 <a:latin typeface="Trebuchet MS" pitchFamily="34" charset="0"/>
                 <a:ea typeface="Trebuchet MS" pitchFamily="34" charset="-122"/>
                 <a:cs typeface="Trebuchet MS" pitchFamily="34" charset="-120"/>
               </a:rPr>
-              <a:t>tion</a:t>
-            </a:r>
-            <a:endParaRPr lang="en-US" sz="1400" dirty="0"/>
-          </a:p>
-        </p:txBody>
-      </p:sp>
-      <p:sp>
-        <p:nvSpPr>
-          <p:cNvPr id="37" name="Shape 35"/>
-          <p:cNvSpPr/>
-          <p:nvPr/>
-        </p:nvSpPr>
-        <p:spPr>
-          <a:xfrm>
-            <a:off x="365760" y="4096512"/>
-            <a:ext cx="1371600" cy="804672"/>
+              <a:t>sp</a:t>
+            </a:r>
+            <a:endParaRPr lang="en-US" sz="900" dirty="0"/>
+          </a:p>
+        </p:txBody>
+      </p:sp>
+      <p:sp>
+        <p:nvSpPr>
+          <p:cNvPr id="40" name="Shape 38"/>
+          <p:cNvSpPr/>
+          <p:nvPr/>
+        </p:nvSpPr>
+        <p:spPr>
+          <a:xfrm>
+            <a:off x="6062472" y="4169664"/>
+            <a:ext cx="685800" cy="475488"/>
           </a:xfrm>
           <a:prstGeom prst="rect">
             <a:avLst>
-              <a:gd name="adj" fmla="val 6818"/>
+              <a:gd name="adj" fmla="val 7692"/>
             </a:avLst>
           </a:prstGeom>
           <a:solidFill>
-            <a:srgbClr val="E2E8F0"/>
-          </a:solidFill>
-          <a:ln w="12700">
-            <a:solidFill>
-              <a:srgbClr val="E2E8F0"/>
-            </a:solidFill>
-            <a:prstDash val="solid"/>
-          </a:ln>
-        </p:spPr>
-      </p:sp>
-      <p:sp>
-        <p:nvSpPr>
-          <p:cNvPr id="38" name="Text 36"/>
-          <p:cNvSpPr/>
-          <p:nvPr/>
-        </p:nvSpPr>
-        <p:spPr>
-          <a:xfrm>
-            <a:off x="365760" y="4096512"/>
-            <a:ext cx="1371600" cy="804672"/>
-          </a:xfrm>
-          <a:prstGeom prst="rect">
-            <a:avLst/>
-          </a:prstGeom>
-          <a:noFill/>
-          <a:ln/>
-        </p:spPr>
-        <p:txBody>
-          <a:bodyPr wrap="square" lIns="0" tIns="0" rIns="0" bIns="0" rtlCol="0" anchor="ctr"/>
-          <a:lstStyle/>
-          <a:p>
-            <a:pPr algn="ctr" indent="0" marL="0">
-              <a:buNone/>
-            </a:pPr>
-            <a:r>
-              <a:rPr lang="en-US" sz="1100" b="1" dirty="0">
-                <a:solidFill>
-                  <a:srgbClr val="475569"/>
+            <a:srgbClr val="FFFFFF"/>
+          </a:solidFill>
+          <a:ln w="12700">
+            <a:solidFill>
+              <a:srgbClr val="DB2777"/>
+            </a:solidFill>
+            <a:prstDash val="solid"/>
+          </a:ln>
+        </p:spPr>
+      </p:sp>
+      <p:sp>
+        <p:nvSpPr>
+          <p:cNvPr id="41" name="Text 39"/>
+          <p:cNvSpPr/>
+          <p:nvPr/>
+        </p:nvSpPr>
+        <p:spPr>
+          <a:xfrm>
+            <a:off x="6062472" y="4169664"/>
+            <a:ext cx="685800" cy="475488"/>
+          </a:xfrm>
+          <a:prstGeom prst="rect">
+            <a:avLst/>
+          </a:prstGeom>
+          <a:noFill/>
+          <a:ln/>
+        </p:spPr>
+        <p:txBody>
+          <a:bodyPr wrap="square" lIns="0" tIns="0" rIns="0" bIns="0" rtlCol="0" anchor="ctr"/>
+          <a:lstStyle/>
+          <a:p>
+            <a:pPr algn="ctr" indent="0" marL="0">
+              <a:buNone/>
+            </a:pPr>
+            <a:r>
+              <a:rPr lang="en-US" sz="900" b="1" dirty="0">
+                <a:solidFill>
+                  <a:srgbClr val="9D174D"/>
                 </a:solidFill>
                 <a:latin typeface="Trebuchet MS" pitchFamily="34" charset="0"/>
                 <a:ea typeface="Trebuchet MS" pitchFamily="34" charset="-122"/>
                 <a:cs typeface="Trebuchet MS" pitchFamily="34" charset="-120"/>
               </a:rPr>
-              <a:t>Phonemes</a:t>
-            </a:r>
-            <a:endParaRPr lang="en-US" sz="1100" dirty="0"/>
-          </a:p>
-        </p:txBody>
-      </p:sp>
-      <p:sp>
-        <p:nvSpPr>
-          <p:cNvPr id="39" name="Shape 37"/>
-          <p:cNvSpPr/>
-          <p:nvPr/>
-        </p:nvSpPr>
-        <p:spPr>
-          <a:xfrm>
-            <a:off x="1874520" y="4096512"/>
-            <a:ext cx="6903720" cy="804672"/>
+              <a:t>ir</a:t>
+            </a:r>
+            <a:endParaRPr lang="en-US" sz="900" dirty="0"/>
+          </a:p>
+        </p:txBody>
+      </p:sp>
+      <p:sp>
+        <p:nvSpPr>
+          <p:cNvPr id="42" name="Shape 40"/>
+          <p:cNvSpPr/>
+          <p:nvPr/>
+        </p:nvSpPr>
+        <p:spPr>
+          <a:xfrm>
+            <a:off x="7274052" y="4169664"/>
+            <a:ext cx="685800" cy="475488"/>
           </a:xfrm>
           <a:prstGeom prst="rect">
             <a:avLst>
-              <a:gd name="adj" fmla="val 6818"/>
+              <a:gd name="adj" fmla="val 7692"/>
             </a:avLst>
           </a:prstGeom>
           <a:solidFill>
-            <a:srgbClr val="FCE7F3"/>
+            <a:srgbClr val="FFFFFF"/>
           </a:solidFill>
           <a:ln w="12700">
             <a:solidFill>
@@ -15905,41 +15776,14 @@
       </p:sp>
       <p:sp>
         <p:nvSpPr>
-          <p:cNvPr id="40" name="Shape 38"/>
-          <p:cNvSpPr/>
-          <p:nvPr/>
-        </p:nvSpPr>
-        <p:spPr>
-          <a:xfrm>
-            <a:off x="1951330" y="4169664"/>
-            <a:ext cx="676656" cy="384048"/>
-          </a:xfrm>
-          <a:prstGeom prst="rect">
-            <a:avLst>
-              <a:gd name="adj" fmla="val 9524"/>
-            </a:avLst>
-          </a:prstGeom>
-          <a:solidFill>
-            <a:srgbClr val="FFFFFF"/>
-          </a:solidFill>
-          <a:ln w="12700">
-            <a:solidFill>
-              <a:srgbClr val="DB2777"/>
-            </a:solidFill>
-            <a:prstDash val="solid"/>
-          </a:ln>
-        </p:spPr>
-      </p:sp>
-      <p:sp>
-        <p:nvSpPr>
-          <p:cNvPr id="41" name="Text 39"/>
-          <p:cNvSpPr/>
-          <p:nvPr/>
-        </p:nvSpPr>
-        <p:spPr>
-          <a:xfrm>
-            <a:off x="1951330" y="4169664"/>
-            <a:ext cx="676656" cy="384048"/>
+          <p:cNvPr id="43" name="Text 41"/>
+          <p:cNvSpPr/>
+          <p:nvPr/>
+        </p:nvSpPr>
+        <p:spPr>
+          <a:xfrm>
+            <a:off x="7274052" y="4169664"/>
+            <a:ext cx="685800" cy="475488"/>
           </a:xfrm>
           <a:prstGeom prst="rect">
             <a:avLst/>
@@ -15963,574 +15807,7 @@
                 <a:ea typeface="Trebuchet MS" pitchFamily="34" charset="-122"/>
                 <a:cs typeface="Trebuchet MS" pitchFamily="34" charset="-120"/>
               </a:rPr>
-              <a:t>i</a:t>
-            </a:r>
-            <a:endParaRPr lang="en-US" sz="900" dirty="0"/>
-          </a:p>
-        </p:txBody>
-      </p:sp>
-      <p:sp>
-        <p:nvSpPr>
-          <p:cNvPr id="42" name="Shape 40"/>
-          <p:cNvSpPr/>
-          <p:nvPr/>
-        </p:nvSpPr>
-        <p:spPr>
-          <a:xfrm>
-            <a:off x="2677363" y="4169664"/>
-            <a:ext cx="676656" cy="384048"/>
-          </a:xfrm>
-          <a:prstGeom prst="rect">
-            <a:avLst>
-              <a:gd name="adj" fmla="val 9524"/>
-            </a:avLst>
-          </a:prstGeom>
-          <a:solidFill>
-            <a:srgbClr val="FFFFFF"/>
-          </a:solidFill>
-          <a:ln w="12700">
-            <a:solidFill>
-              <a:srgbClr val="DB2777"/>
-            </a:solidFill>
-            <a:prstDash val="solid"/>
-          </a:ln>
-        </p:spPr>
-      </p:sp>
-      <p:sp>
-        <p:nvSpPr>
-          <p:cNvPr id="43" name="Text 41"/>
-          <p:cNvSpPr/>
-          <p:nvPr/>
-        </p:nvSpPr>
-        <p:spPr>
-          <a:xfrm>
-            <a:off x="2677363" y="4169664"/>
-            <a:ext cx="676656" cy="384048"/>
-          </a:xfrm>
-          <a:prstGeom prst="rect">
-            <a:avLst/>
-          </a:prstGeom>
-          <a:noFill/>
-          <a:ln/>
-        </p:spPr>
-        <p:txBody>
-          <a:bodyPr wrap="square" lIns="0" tIns="0" rIns="0" bIns="0" rtlCol="0" anchor="ctr"/>
-          <a:lstStyle/>
-          <a:p>
-            <a:pPr algn="ctr" indent="0" marL="0">
-              <a:buNone/>
-            </a:pPr>
-            <a:r>
-              <a:rPr lang="en-US" sz="900" b="1" dirty="0">
-                <a:solidFill>
-                  <a:srgbClr val="9D174D"/>
-                </a:solidFill>
-                <a:latin typeface="Trebuchet MS" pitchFamily="34" charset="0"/>
-                <a:ea typeface="Trebuchet MS" pitchFamily="34" charset="-122"/>
-                <a:cs typeface="Trebuchet MS" pitchFamily="34" charset="-120"/>
-              </a:rPr>
-              <a:t>n</a:t>
-            </a:r>
-            <a:endParaRPr lang="en-US" sz="900" dirty="0"/>
-          </a:p>
-        </p:txBody>
-      </p:sp>
-      <p:sp>
-        <p:nvSpPr>
-          <p:cNvPr id="44" name="Shape 42"/>
-          <p:cNvSpPr/>
-          <p:nvPr/>
-        </p:nvSpPr>
-        <p:spPr>
-          <a:xfrm>
-            <a:off x="3403397" y="4169664"/>
-            <a:ext cx="676656" cy="384048"/>
-          </a:xfrm>
-          <a:prstGeom prst="rect">
-            <a:avLst>
-              <a:gd name="adj" fmla="val 9524"/>
-            </a:avLst>
-          </a:prstGeom>
-          <a:solidFill>
-            <a:srgbClr val="FFFFFF"/>
-          </a:solidFill>
-          <a:ln w="12700">
-            <a:solidFill>
-              <a:srgbClr val="DB2777"/>
-            </a:solidFill>
-            <a:prstDash val="solid"/>
-          </a:ln>
-        </p:spPr>
-      </p:sp>
-      <p:sp>
-        <p:nvSpPr>
-          <p:cNvPr id="45" name="Text 43"/>
-          <p:cNvSpPr/>
-          <p:nvPr/>
-        </p:nvSpPr>
-        <p:spPr>
-          <a:xfrm>
-            <a:off x="3403397" y="4169664"/>
-            <a:ext cx="676656" cy="384048"/>
-          </a:xfrm>
-          <a:prstGeom prst="rect">
-            <a:avLst/>
-          </a:prstGeom>
-          <a:noFill/>
-          <a:ln/>
-        </p:spPr>
-        <p:txBody>
-          <a:bodyPr wrap="square" lIns="0" tIns="0" rIns="0" bIns="0" rtlCol="0" anchor="ctr"/>
-          <a:lstStyle/>
-          <a:p>
-            <a:pPr algn="ctr" indent="0" marL="0">
-              <a:buNone/>
-            </a:pPr>
-            <a:r>
-              <a:rPr lang="en-US" sz="900" b="1" dirty="0">
-                <a:solidFill>
-                  <a:srgbClr val="9D174D"/>
-                </a:solidFill>
-                <a:latin typeface="Trebuchet MS" pitchFamily="34" charset="0"/>
-                <a:ea typeface="Trebuchet MS" pitchFamily="34" charset="-122"/>
-                <a:cs typeface="Trebuchet MS" pitchFamily="34" charset="-120"/>
-              </a:rPr>
-              <a:t>sp</a:t>
-            </a:r>
-            <a:endParaRPr lang="en-US" sz="900" dirty="0"/>
-          </a:p>
-        </p:txBody>
-      </p:sp>
-      <p:sp>
-        <p:nvSpPr>
-          <p:cNvPr id="46" name="Shape 44"/>
-          <p:cNvSpPr/>
-          <p:nvPr/>
-        </p:nvSpPr>
-        <p:spPr>
-          <a:xfrm>
-            <a:off x="4129430" y="4169664"/>
-            <a:ext cx="676656" cy="384048"/>
-          </a:xfrm>
-          <a:prstGeom prst="rect">
-            <a:avLst>
-              <a:gd name="adj" fmla="val 9524"/>
-            </a:avLst>
-          </a:prstGeom>
-          <a:solidFill>
-            <a:srgbClr val="FFFFFF"/>
-          </a:solidFill>
-          <a:ln w="12700">
-            <a:solidFill>
-              <a:srgbClr val="DB2777"/>
-            </a:solidFill>
-            <a:prstDash val="solid"/>
-          </a:ln>
-        </p:spPr>
-      </p:sp>
-      <p:sp>
-        <p:nvSpPr>
-          <p:cNvPr id="47" name="Text 45"/>
-          <p:cNvSpPr/>
-          <p:nvPr/>
-        </p:nvSpPr>
-        <p:spPr>
-          <a:xfrm>
-            <a:off x="4129430" y="4169664"/>
-            <a:ext cx="676656" cy="384048"/>
-          </a:xfrm>
-          <a:prstGeom prst="rect">
-            <a:avLst/>
-          </a:prstGeom>
-          <a:noFill/>
-          <a:ln/>
-        </p:spPr>
-        <p:txBody>
-          <a:bodyPr wrap="square" lIns="0" tIns="0" rIns="0" bIns="0" rtlCol="0" anchor="ctr"/>
-          <a:lstStyle/>
-          <a:p>
-            <a:pPr algn="ctr" indent="0" marL="0">
-              <a:buNone/>
-            </a:pPr>
-            <a:r>
-              <a:rPr lang="en-US" sz="900" b="1" dirty="0">
-                <a:solidFill>
-                  <a:srgbClr val="9D174D"/>
-                </a:solidFill>
-                <a:latin typeface="Trebuchet MS" pitchFamily="34" charset="0"/>
-                <a:ea typeface="Trebuchet MS" pitchFamily="34" charset="-122"/>
-                <a:cs typeface="Trebuchet MS" pitchFamily="34" charset="-120"/>
-              </a:rPr>
-              <a:t>i</a:t>
-            </a:r>
-            <a:endParaRPr lang="en-US" sz="900" dirty="0"/>
-          </a:p>
-        </p:txBody>
-      </p:sp>
-      <p:sp>
-        <p:nvSpPr>
-          <p:cNvPr id="48" name="Shape 46"/>
-          <p:cNvSpPr/>
-          <p:nvPr/>
-        </p:nvSpPr>
-        <p:spPr>
-          <a:xfrm>
-            <a:off x="4855464" y="4169664"/>
-            <a:ext cx="676656" cy="384048"/>
-          </a:xfrm>
-          <a:prstGeom prst="rect">
-            <a:avLst>
-              <a:gd name="adj" fmla="val 9524"/>
-            </a:avLst>
-          </a:prstGeom>
-          <a:solidFill>
-            <a:srgbClr val="FFFFFF"/>
-          </a:solidFill>
-          <a:ln w="12700">
-            <a:solidFill>
-              <a:srgbClr val="DB2777"/>
-            </a:solidFill>
-            <a:prstDash val="solid"/>
-          </a:ln>
-        </p:spPr>
-      </p:sp>
-      <p:sp>
-        <p:nvSpPr>
-          <p:cNvPr id="49" name="Text 47"/>
-          <p:cNvSpPr/>
-          <p:nvPr/>
-        </p:nvSpPr>
-        <p:spPr>
-          <a:xfrm>
-            <a:off x="4855464" y="4169664"/>
-            <a:ext cx="676656" cy="384048"/>
-          </a:xfrm>
-          <a:prstGeom prst="rect">
-            <a:avLst/>
-          </a:prstGeom>
-          <a:noFill/>
-          <a:ln/>
-        </p:spPr>
-        <p:txBody>
-          <a:bodyPr wrap="square" lIns="0" tIns="0" rIns="0" bIns="0" rtlCol="0" anchor="ctr"/>
-          <a:lstStyle/>
-          <a:p>
-            <a:pPr algn="ctr" indent="0" marL="0">
-              <a:buNone/>
-            </a:pPr>
-            <a:r>
-              <a:rPr lang="en-US" sz="900" b="1" dirty="0">
-                <a:solidFill>
-                  <a:srgbClr val="9D174D"/>
-                </a:solidFill>
-                <a:latin typeface="Trebuchet MS" pitchFamily="34" charset="0"/>
-                <a:ea typeface="Trebuchet MS" pitchFamily="34" charset="-122"/>
-                <a:cs typeface="Trebuchet MS" pitchFamily="34" charset="-120"/>
-              </a:rPr>
-              <a:t>r</a:t>
-            </a:r>
-            <a:endParaRPr lang="en-US" sz="900" dirty="0"/>
-          </a:p>
-        </p:txBody>
-      </p:sp>
-      <p:sp>
-        <p:nvSpPr>
-          <p:cNvPr id="50" name="Shape 48"/>
-          <p:cNvSpPr/>
-          <p:nvPr/>
-        </p:nvSpPr>
-        <p:spPr>
-          <a:xfrm>
-            <a:off x="5581498" y="4169664"/>
-            <a:ext cx="676656" cy="384048"/>
-          </a:xfrm>
-          <a:prstGeom prst="rect">
-            <a:avLst>
-              <a:gd name="adj" fmla="val 9524"/>
-            </a:avLst>
-          </a:prstGeom>
-          <a:solidFill>
-            <a:srgbClr val="FFFFFF"/>
-          </a:solidFill>
-          <a:ln w="12700">
-            <a:solidFill>
-              <a:srgbClr val="DB2777"/>
-            </a:solidFill>
-            <a:prstDash val="solid"/>
-          </a:ln>
-        </p:spPr>
-      </p:sp>
-      <p:sp>
-        <p:nvSpPr>
-          <p:cNvPr id="51" name="Text 49"/>
-          <p:cNvSpPr/>
-          <p:nvPr/>
-        </p:nvSpPr>
-        <p:spPr>
-          <a:xfrm>
-            <a:off x="5581498" y="4169664"/>
-            <a:ext cx="676656" cy="384048"/>
-          </a:xfrm>
-          <a:prstGeom prst="rect">
-            <a:avLst/>
-          </a:prstGeom>
-          <a:noFill/>
-          <a:ln/>
-        </p:spPr>
-        <p:txBody>
-          <a:bodyPr wrap="square" lIns="0" tIns="0" rIns="0" bIns="0" rtlCol="0" anchor="ctr"/>
-          <a:lstStyle/>
-          <a:p>
-            <a:pPr algn="ctr" indent="0" marL="0">
-              <a:buNone/>
-            </a:pPr>
-            <a:r>
-              <a:rPr lang="en-US" sz="900" b="1" dirty="0">
-                <a:solidFill>
-                  <a:srgbClr val="9D174D"/>
-                </a:solidFill>
-                <a:latin typeface="Trebuchet MS" pitchFamily="34" charset="0"/>
-                <a:ea typeface="Trebuchet MS" pitchFamily="34" charset="-122"/>
-                <a:cs typeface="Trebuchet MS" pitchFamily="34" charset="-120"/>
-              </a:rPr>
-              <a:t>a</a:t>
-            </a:r>
-            <a:endParaRPr lang="en-US" sz="900" dirty="0"/>
-          </a:p>
-        </p:txBody>
-      </p:sp>
-      <p:sp>
-        <p:nvSpPr>
-          <p:cNvPr id="52" name="Shape 50"/>
-          <p:cNvSpPr/>
-          <p:nvPr/>
-        </p:nvSpPr>
-        <p:spPr>
-          <a:xfrm>
-            <a:off x="6307531" y="4169664"/>
-            <a:ext cx="676656" cy="384048"/>
-          </a:xfrm>
-          <a:prstGeom prst="rect">
-            <a:avLst>
-              <a:gd name="adj" fmla="val 9524"/>
-            </a:avLst>
-          </a:prstGeom>
-          <a:solidFill>
-            <a:srgbClr val="FFFFFF"/>
-          </a:solidFill>
-          <a:ln w="12700">
-            <a:solidFill>
-              <a:srgbClr val="DB2777"/>
-            </a:solidFill>
-            <a:prstDash val="solid"/>
-          </a:ln>
-        </p:spPr>
-      </p:sp>
-      <p:sp>
-        <p:nvSpPr>
-          <p:cNvPr id="53" name="Text 51"/>
-          <p:cNvSpPr/>
-          <p:nvPr/>
-        </p:nvSpPr>
-        <p:spPr>
-          <a:xfrm>
-            <a:off x="6307531" y="4169664"/>
-            <a:ext cx="676656" cy="384048"/>
-          </a:xfrm>
-          <a:prstGeom prst="rect">
-            <a:avLst/>
-          </a:prstGeom>
-          <a:noFill/>
-          <a:ln/>
-        </p:spPr>
-        <p:txBody>
-          <a:bodyPr wrap="square" lIns="0" tIns="0" rIns="0" bIns="0" rtlCol="0" anchor="ctr"/>
-          <a:lstStyle/>
-          <a:p>
-            <a:pPr algn="ctr" indent="0" marL="0">
-              <a:buNone/>
-            </a:pPr>
-            <a:r>
-              <a:rPr lang="en-US" sz="900" b="1" dirty="0">
-                <a:solidFill>
-                  <a:srgbClr val="9D174D"/>
-                </a:solidFill>
-                <a:latin typeface="Trebuchet MS" pitchFamily="34" charset="0"/>
-                <a:ea typeface="Trebuchet MS" pitchFamily="34" charset="-122"/>
-                <a:cs typeface="Trebuchet MS" pitchFamily="34" charset="-120"/>
-              </a:rPr>
-              <a:t>t</a:t>
-            </a:r>
-            <a:endParaRPr lang="en-US" sz="900" dirty="0"/>
-          </a:p>
-        </p:txBody>
-      </p:sp>
-      <p:sp>
-        <p:nvSpPr>
-          <p:cNvPr id="54" name="Text 52"/>
-          <p:cNvSpPr/>
-          <p:nvPr/>
-        </p:nvSpPr>
-        <p:spPr>
-          <a:xfrm>
-            <a:off x="6307531" y="4572000"/>
-            <a:ext cx="676656" cy="219456"/>
-          </a:xfrm>
-          <a:prstGeom prst="rect">
-            <a:avLst/>
-          </a:prstGeom>
-          <a:noFill/>
-          <a:ln/>
-        </p:spPr>
-        <p:txBody>
-          <a:bodyPr wrap="square" lIns="0" tIns="0" rIns="0" bIns="0" rtlCol="0" anchor="t"/>
-          <a:lstStyle/>
-          <a:p>
-            <a:pPr algn="ctr" indent="0" marL="0">
-              <a:buNone/>
-            </a:pPr>
-            <a:r>
-              <a:rPr lang="en-US" sz="750" i="1" dirty="0">
-                <a:solidFill>
-                  <a:srgbClr val="94A3B8"/>
-                </a:solidFill>
-                <a:latin typeface="Calibri" pitchFamily="34" charset="0"/>
-                <a:ea typeface="Calibri" pitchFamily="34" charset="-122"/>
-                <a:cs typeface="Calibri" pitchFamily="34" charset="-120"/>
-              </a:rPr>
-              <a:t>/sh/</a:t>
-            </a:r>
-            <a:endParaRPr lang="en-US" sz="750" dirty="0"/>
-          </a:p>
-        </p:txBody>
-      </p:sp>
-      <p:sp>
-        <p:nvSpPr>
-          <p:cNvPr id="55" name="Shape 53"/>
-          <p:cNvSpPr/>
-          <p:nvPr/>
-        </p:nvSpPr>
-        <p:spPr>
-          <a:xfrm>
-            <a:off x="7033565" y="4169664"/>
-            <a:ext cx="676656" cy="384048"/>
-          </a:xfrm>
-          <a:prstGeom prst="rect">
-            <a:avLst>
-              <a:gd name="adj" fmla="val 9524"/>
-            </a:avLst>
-          </a:prstGeom>
-          <a:solidFill>
-            <a:srgbClr val="FFFFFF"/>
-          </a:solidFill>
-          <a:ln w="12700">
-            <a:solidFill>
-              <a:srgbClr val="DB2777"/>
-            </a:solidFill>
-            <a:prstDash val="solid"/>
-          </a:ln>
-        </p:spPr>
-      </p:sp>
-      <p:sp>
-        <p:nvSpPr>
-          <p:cNvPr id="56" name="Text 54"/>
-          <p:cNvSpPr/>
-          <p:nvPr/>
-        </p:nvSpPr>
-        <p:spPr>
-          <a:xfrm>
-            <a:off x="7033565" y="4169664"/>
-            <a:ext cx="676656" cy="384048"/>
-          </a:xfrm>
-          <a:prstGeom prst="rect">
-            <a:avLst/>
-          </a:prstGeom>
-          <a:noFill/>
-          <a:ln/>
-        </p:spPr>
-        <p:txBody>
-          <a:bodyPr wrap="square" lIns="0" tIns="0" rIns="0" bIns="0" rtlCol="0" anchor="ctr"/>
-          <a:lstStyle/>
-          <a:p>
-            <a:pPr algn="ctr" indent="0" marL="0">
-              <a:buNone/>
-            </a:pPr>
-            <a:r>
-              <a:rPr lang="en-US" sz="900" b="1" dirty="0">
-                <a:solidFill>
-                  <a:srgbClr val="9D174D"/>
-                </a:solidFill>
-                <a:latin typeface="Trebuchet MS" pitchFamily="34" charset="0"/>
-                <a:ea typeface="Trebuchet MS" pitchFamily="34" charset="-122"/>
-                <a:cs typeface="Trebuchet MS" pitchFamily="34" charset="-120"/>
-              </a:rPr>
-              <a:t>io</a:t>
-            </a:r>
-            <a:endParaRPr lang="en-US" sz="900" dirty="0"/>
-          </a:p>
-        </p:txBody>
-      </p:sp>
-      <p:sp>
-        <p:nvSpPr>
-          <p:cNvPr id="57" name="Shape 55"/>
-          <p:cNvSpPr/>
-          <p:nvPr/>
-        </p:nvSpPr>
-        <p:spPr>
-          <a:xfrm>
-            <a:off x="7759598" y="4169664"/>
-            <a:ext cx="676656" cy="384048"/>
-          </a:xfrm>
-          <a:prstGeom prst="rect">
-            <a:avLst>
-              <a:gd name="adj" fmla="val 9524"/>
-            </a:avLst>
-          </a:prstGeom>
-          <a:solidFill>
-            <a:srgbClr val="FFFFFF"/>
-          </a:solidFill>
-          <a:ln w="12700">
-            <a:solidFill>
-              <a:srgbClr val="DB2777"/>
-            </a:solidFill>
-            <a:prstDash val="solid"/>
-          </a:ln>
-        </p:spPr>
-      </p:sp>
-      <p:sp>
-        <p:nvSpPr>
-          <p:cNvPr id="58" name="Text 56"/>
-          <p:cNvSpPr/>
-          <p:nvPr/>
-        </p:nvSpPr>
-        <p:spPr>
-          <a:xfrm>
-            <a:off x="7759598" y="4169664"/>
-            <a:ext cx="676656" cy="384048"/>
-          </a:xfrm>
-          <a:prstGeom prst="rect">
-            <a:avLst/>
-          </a:prstGeom>
-          <a:noFill/>
-          <a:ln/>
-        </p:spPr>
-        <p:txBody>
-          <a:bodyPr wrap="square" lIns="0" tIns="0" rIns="0" bIns="0" rtlCol="0" anchor="ctr"/>
-          <a:lstStyle/>
-          <a:p>
-            <a:pPr algn="ctr" indent="0" marL="0">
-              <a:buNone/>
-            </a:pPr>
-            <a:r>
-              <a:rPr lang="en-US" sz="900" b="1" dirty="0">
-                <a:solidFill>
-                  <a:srgbClr val="9D174D"/>
-                </a:solidFill>
-                <a:latin typeface="Trebuchet MS" pitchFamily="34" charset="0"/>
-                <a:ea typeface="Trebuchet MS" pitchFamily="34" charset="-122"/>
-                <a:cs typeface="Trebuchet MS" pitchFamily="34" charset="-120"/>
-              </a:rPr>
-              <a:t>n</a:t>
+              <a:t>ed</a:t>
             </a:r>
             <a:endParaRPr lang="en-US" sz="900" dirty="0"/>
           </a:p>
@@ -17104,7 +16381,7 @@
                 <a:ea typeface="Calibri" pitchFamily="34" charset="-122"/>
                 <a:cs typeface="Calibri" pitchFamily="34" charset="-120"/>
               </a:rPr>
-              <a:t>Word Labs  •  wordlabs.app  •  Root: 'inspire' = to breathe life or ideas</a:t>
+              <a:t>Word Labs  •  wordlabs.app  •  Root: 'inspire' = breathe life or feeling into</a:t>
             </a:r>
             <a:endParaRPr lang="en-US" sz="800" dirty="0"/>
           </a:p>
@@ -17438,7 +16715,7 @@
                 <a:ea typeface="Trebuchet MS" pitchFamily="34" charset="-122"/>
                 <a:cs typeface="Trebuchet MS" pitchFamily="34" charset="-120"/>
               </a:rPr>
-              <a:t>2</a:t>
+              <a:t>1</a:t>
             </a:r>
             <a:pPr algn="ctr" indent="0" marL="0">
               <a:buNone/>
@@ -17452,7 +16729,7 @@
                 <a:ea typeface="Trebuchet MS" pitchFamily="34" charset="-122"/>
                 <a:cs typeface="Trebuchet MS" pitchFamily="34" charset="-120"/>
               </a:rPr>
-              <a:t>  punctuation marks</a:t>
+              <a:t>  punctuation mark</a:t>
             </a:r>
             <a:endParaRPr lang="en-US" sz="2800" dirty="0"/>
           </a:p>
@@ -17744,7 +17021,7 @@
                 <a:ea typeface="Calibri" pitchFamily="34" charset="-122"/>
                 <a:cs typeface="Calibri" pitchFamily="34" charset="-120"/>
               </a:rPr>
-              <a:t>Word Labs  •  wordlabs.app  •  Root: 'inspire' = to breathe life or ideas</a:t>
+              <a:t>Word Labs  •  wordlabs.app  •  Root: 'inspire' = breathe life or feeling into</a:t>
             </a:r>
             <a:endParaRPr lang="en-US" sz="800" dirty="0"/>
           </a:p>
@@ -17856,7 +17133,7 @@
                 <a:ea typeface="Calibri" pitchFamily="34" charset="-122"/>
                 <a:cs typeface="Calibri" pitchFamily="34" charset="-120"/>
               </a:rPr>
-              <a:t>The </a:t>
+              <a:t>Her </a:t>
             </a:r>
             <a:pPr algn="l" indent="0" marL="0">
               <a:buNone/>
@@ -17887,7 +17164,7 @@
                 <a:ea typeface="Calibri" pitchFamily="34" charset="-122"/>
                 <a:cs typeface="Calibri" pitchFamily="34" charset="-120"/>
               </a:rPr>
-              <a:t> teacher </a:t>
+              <a:t> speech gave the audience great </a:t>
             </a:r>
             <a:pPr algn="l" indent="0" marL="0">
               <a:buNone/>
@@ -17904,7 +17181,7 @@
                 <a:ea typeface="Calibri" pitchFamily="34" charset="-122"/>
                 <a:cs typeface="Calibri" pitchFamily="34" charset="-120"/>
               </a:rPr>
-              <a:t>reinspired</a:t>
+              <a:t>inspiration</a:t>
             </a:r>
             <a:pPr algn="l" indent="0" marL="0">
               <a:buNone/>
@@ -17918,7 +17195,7 @@
                 <a:ea typeface="Calibri" pitchFamily="34" charset="-122"/>
                 <a:cs typeface="Calibri" pitchFamily="34" charset="-120"/>
               </a:rPr>
-              <a:t> her students after the holidays, and her </a:t>
+              <a:t>, and everyone felt </a:t>
             </a:r>
             <a:pPr algn="l" indent="0" marL="0">
               <a:buNone/>
@@ -17935,7 +17212,7 @@
                 <a:ea typeface="Calibri" pitchFamily="34" charset="-122"/>
                 <a:cs typeface="Calibri" pitchFamily="34" charset="-120"/>
               </a:rPr>
-              <a:t>inspired</a:t>
+              <a:t>reinspired</a:t>
             </a:r>
             <a:pPr algn="l" indent="0" marL="0">
               <a:buNone/>
@@ -17949,7 +17226,7 @@
                 <a:ea typeface="Calibri" pitchFamily="34" charset="-122"/>
                 <a:cs typeface="Calibri" pitchFamily="34" charset="-120"/>
               </a:rPr>
-              <a:t> class produced their best work ever!</a:t>
+              <a:t> to help the community.</a:t>
             </a:r>
             <a:endParaRPr lang="en-US" sz="1800" dirty="0"/>
           </a:p>
@@ -18232,7 +17509,7 @@
                 <a:ea typeface="Trebuchet MS" pitchFamily="34" charset="-122"/>
                 <a:cs typeface="Trebuchet MS" pitchFamily="34" charset="-120"/>
               </a:rPr>
-              <a:t>reinspired</a:t>
+              <a:t>inspiration</a:t>
             </a:r>
             <a:endParaRPr lang="en-US" sz="1400" dirty="0"/>
           </a:p>
@@ -18360,7 +17637,7 @@
                 <a:ea typeface="Trebuchet MS" pitchFamily="34" charset="-122"/>
                 <a:cs typeface="Trebuchet MS" pitchFamily="34" charset="-120"/>
               </a:rPr>
-              <a:t>inspired</a:t>
+              <a:t>reinspired</a:t>
             </a:r>
             <a:endParaRPr lang="en-US" sz="1400" dirty="0"/>
           </a:p>
@@ -18691,7 +17968,7 @@
                 <a:ea typeface="Calibri" pitchFamily="34" charset="-122"/>
                 <a:cs typeface="Calibri" pitchFamily="34" charset="-120"/>
               </a:rPr>
-              <a:t>Word Labs  •  wordlabs.app  •  Root: 'inspire' = to breathe life or ideas</a:t>
+              <a:t>Word Labs  •  wordlabs.app  •  Root: 'inspire' = breathe life or feeling into</a:t>
             </a:r>
             <a:endParaRPr lang="en-US" sz="800" dirty="0"/>
           </a:p>
@@ -19518,7 +18795,7 @@
                 <a:ea typeface="Calibri" pitchFamily="34" charset="-122"/>
                 <a:cs typeface="Calibri" pitchFamily="34" charset="-120"/>
               </a:rPr>
-              <a:t>Word Labs  •  wordlabs.app  •  Root: 'inspire' = to breathe life or ideas</a:t>
+              <a:t>Word Labs  •  wordlabs.app  •  Root: 'inspire' = breathe life or feeling into</a:t>
             </a:r>
             <a:endParaRPr lang="en-US" sz="800" dirty="0"/>
           </a:p>
@@ -19835,7 +19112,7 @@
                 <a:ea typeface="Calibri" pitchFamily="34" charset="-122"/>
                 <a:cs typeface="Calibri" pitchFamily="34" charset="-120"/>
               </a:rPr>
-              <a:t>to breathe life or ideas into</a:t>
+              <a:t>breathe life or feeling into</a:t>
             </a:r>
             <a:endParaRPr lang="en-US" sz="850" dirty="0"/>
           </a:p>
@@ -19874,7 +19151,7 @@
                 <a:ea typeface="Calibri" pitchFamily="34" charset="-122"/>
                 <a:cs typeface="Calibri" pitchFamily="34" charset="-120"/>
               </a:rPr>
-              <a:t>'e' dropped before vowel suffix</a:t>
+              <a:t>base drops 'e' before vowel suffix</a:t>
             </a:r>
             <a:endParaRPr lang="en-US" sz="700" dirty="0"/>
           </a:p>
@@ -19986,7 +19263,7 @@
                 <a:ea typeface="Calibri" pitchFamily="34" charset="-122"/>
                 <a:cs typeface="Calibri" pitchFamily="34" charset="-120"/>
               </a:rPr>
-              <a:t>the state or result of an action</a:t>
+              <a:t>the act or result of</a:t>
             </a:r>
             <a:endParaRPr lang="en-US" sz="850" dirty="0"/>
           </a:p>
@@ -20098,7 +19375,7 @@
                 <a:ea typeface="Calibri" pitchFamily="34" charset="-122"/>
                 <a:cs typeface="Calibri" pitchFamily="34" charset="-120"/>
               </a:rPr>
-              <a:t>relating to; describing word</a:t>
+              <a:t>relating to / having the quality of</a:t>
             </a:r>
             <a:endParaRPr lang="en-US" sz="850" dirty="0"/>
           </a:p>
@@ -20654,7 +19931,7 @@
                 <a:ea typeface="Calibri" pitchFamily="34" charset="-122"/>
                 <a:cs typeface="Calibri" pitchFamily="34" charset="-120"/>
               </a:rPr>
-              <a:t>Word Labs  •  wordlabs.app  •  Root: 'inspire' = to breathe life or ideas</a:t>
+              <a:t>Word Labs  •  wordlabs.app  •  Root: 'inspire' = breathe life or feeling into</a:t>
             </a:r>
             <a:endParaRPr lang="en-US" sz="800" dirty="0"/>
           </a:p>
@@ -20971,7 +20248,7 @@
                 <a:ea typeface="Calibri" pitchFamily="34" charset="-122"/>
                 <a:cs typeface="Calibri" pitchFamily="34" charset="-120"/>
               </a:rPr>
-              <a:t>to breathe life or ideas into</a:t>
+              <a:t>breathe life or feeling into</a:t>
             </a:r>
             <a:endParaRPr lang="en-US" sz="850" dirty="0"/>
           </a:p>
@@ -21010,7 +20287,7 @@
                 <a:ea typeface="Calibri" pitchFamily="34" charset="-122"/>
                 <a:cs typeface="Calibri" pitchFamily="34" charset="-120"/>
               </a:rPr>
-              <a:t>'e' dropped before vowel suffix</a:t>
+              <a:t>base drops 'e' before vowel suffix</a:t>
             </a:r>
             <a:endParaRPr lang="en-US" sz="700" dirty="0"/>
           </a:p>
@@ -21122,7 +20399,7 @@
                 <a:ea typeface="Calibri" pitchFamily="34" charset="-122"/>
                 <a:cs typeface="Calibri" pitchFamily="34" charset="-120"/>
               </a:rPr>
-              <a:t>the state or result of an action</a:t>
+              <a:t>the act or result of</a:t>
             </a:r>
             <a:endParaRPr lang="en-US" sz="850" dirty="0"/>
           </a:p>
@@ -21234,7 +20511,7 @@
                 <a:ea typeface="Calibri" pitchFamily="34" charset="-122"/>
                 <a:cs typeface="Calibri" pitchFamily="34" charset="-120"/>
               </a:rPr>
-              <a:t>relating to; describing word</a:t>
+              <a:t>relating to / having the quality of</a:t>
             </a:r>
             <a:endParaRPr lang="en-US" sz="850" dirty="0"/>
           </a:p>
@@ -21498,7 +20775,7 @@
                 <a:ea typeface="Trebuchet MS" pitchFamily="34" charset="-122"/>
                 <a:cs typeface="Trebuchet MS" pitchFamily="34" charset="-120"/>
               </a:rPr>
-              <a:t>spi</a:t>
+              <a:t>spir</a:t>
             </a:r>
             <a:endParaRPr lang="en-US" sz="1400" dirty="0"/>
           </a:p>
@@ -21603,7 +20880,7 @@
                 <a:ea typeface="Trebuchet MS" pitchFamily="34" charset="-122"/>
                 <a:cs typeface="Trebuchet MS" pitchFamily="34" charset="-120"/>
               </a:rPr>
-              <a:t>ra</a:t>
+              <a:t>a</a:t>
             </a:r>
             <a:endParaRPr lang="en-US" sz="1400" dirty="0"/>
           </a:p>
@@ -22237,7 +21514,7 @@
                 <a:ea typeface="Calibri" pitchFamily="34" charset="-122"/>
                 <a:cs typeface="Calibri" pitchFamily="34" charset="-120"/>
               </a:rPr>
-              <a:t>Word Labs  •  wordlabs.app  •  Root: 'inspire' = to breathe life or ideas</a:t>
+              <a:t>Word Labs  •  wordlabs.app  •  Root: 'inspire' = breathe life or feeling into</a:t>
             </a:r>
             <a:endParaRPr lang="en-US" sz="800" dirty="0"/>
           </a:p>
@@ -22554,7 +21831,7 @@
                 <a:ea typeface="Calibri" pitchFamily="34" charset="-122"/>
                 <a:cs typeface="Calibri" pitchFamily="34" charset="-120"/>
               </a:rPr>
-              <a:t>to breathe life or ideas into</a:t>
+              <a:t>breathe life or feeling into</a:t>
             </a:r>
             <a:endParaRPr lang="en-US" sz="850" dirty="0"/>
           </a:p>
@@ -22593,7 +21870,7 @@
                 <a:ea typeface="Calibri" pitchFamily="34" charset="-122"/>
                 <a:cs typeface="Calibri" pitchFamily="34" charset="-120"/>
               </a:rPr>
-              <a:t>'e' dropped before vowel suffix</a:t>
+              <a:t>base drops 'e' before vowel suffix</a:t>
             </a:r>
             <a:endParaRPr lang="en-US" sz="700" dirty="0"/>
           </a:p>
@@ -22705,7 +21982,7 @@
                 <a:ea typeface="Calibri" pitchFamily="34" charset="-122"/>
                 <a:cs typeface="Calibri" pitchFamily="34" charset="-120"/>
               </a:rPr>
-              <a:t>the state or result of an action</a:t>
+              <a:t>the act or result of</a:t>
             </a:r>
             <a:endParaRPr lang="en-US" sz="850" dirty="0"/>
           </a:p>
@@ -22817,7 +22094,7 @@
                 <a:ea typeface="Calibri" pitchFamily="34" charset="-122"/>
                 <a:cs typeface="Calibri" pitchFamily="34" charset="-120"/>
               </a:rPr>
-              <a:t>relating to; describing word</a:t>
+              <a:t>relating to / having the quality of</a:t>
             </a:r>
             <a:endParaRPr lang="en-US" sz="850" dirty="0"/>
           </a:p>
@@ -23081,7 +22358,7 @@
                 <a:ea typeface="Trebuchet MS" pitchFamily="34" charset="-122"/>
                 <a:cs typeface="Trebuchet MS" pitchFamily="34" charset="-120"/>
               </a:rPr>
-              <a:t>spi</a:t>
+              <a:t>spir</a:t>
             </a:r>
             <a:endParaRPr lang="en-US" sz="1400" dirty="0"/>
           </a:p>
@@ -23186,7 +22463,7 @@
                 <a:ea typeface="Trebuchet MS" pitchFamily="34" charset="-122"/>
                 <a:cs typeface="Trebuchet MS" pitchFamily="34" charset="-120"/>
               </a:rPr>
-              <a:t>ra</a:t>
+              <a:t>a</a:t>
             </a:r>
             <a:endParaRPr lang="en-US" sz="1400" dirty="0"/>
           </a:p>
@@ -23503,8 +22780,8 @@
         </p:nvSpPr>
         <p:spPr>
           <a:xfrm>
-            <a:off x="1952244" y="4169664"/>
-            <a:ext cx="543652" cy="384048"/>
+            <a:off x="1951828" y="4169664"/>
+            <a:ext cx="603504" cy="384048"/>
           </a:xfrm>
           <a:prstGeom prst="rect">
             <a:avLst>
@@ -23530,8 +22807,8 @@
         </p:nvSpPr>
         <p:spPr>
           <a:xfrm>
-            <a:off x="1952244" y="4169664"/>
-            <a:ext cx="543652" cy="384048"/>
+            <a:off x="1951828" y="4169664"/>
+            <a:ext cx="603504" cy="384048"/>
           </a:xfrm>
           <a:prstGeom prst="rect">
             <a:avLst/>
@@ -23569,8 +22846,8 @@
         </p:nvSpPr>
         <p:spPr>
           <a:xfrm>
-            <a:off x="2546188" y="4169664"/>
-            <a:ext cx="543652" cy="384048"/>
+            <a:off x="2605209" y="4169664"/>
+            <a:ext cx="603504" cy="384048"/>
           </a:xfrm>
           <a:prstGeom prst="rect">
             <a:avLst>
@@ -23596,8 +22873,8 @@
         </p:nvSpPr>
         <p:spPr>
           <a:xfrm>
-            <a:off x="2546188" y="4169664"/>
-            <a:ext cx="543652" cy="384048"/>
+            <a:off x="2605209" y="4169664"/>
+            <a:ext cx="603504" cy="384048"/>
           </a:xfrm>
           <a:prstGeom prst="rect">
             <a:avLst/>
@@ -23635,8 +22912,8 @@
         </p:nvSpPr>
         <p:spPr>
           <a:xfrm>
-            <a:off x="3140133" y="4169664"/>
-            <a:ext cx="543652" cy="384048"/>
+            <a:off x="3258589" y="4169664"/>
+            <a:ext cx="603504" cy="384048"/>
           </a:xfrm>
           <a:prstGeom prst="rect">
             <a:avLst>
@@ -23662,8 +22939,8 @@
         </p:nvSpPr>
         <p:spPr>
           <a:xfrm>
-            <a:off x="3140133" y="4169664"/>
-            <a:ext cx="543652" cy="384048"/>
+            <a:off x="3258589" y="4169664"/>
+            <a:ext cx="603504" cy="384048"/>
           </a:xfrm>
           <a:prstGeom prst="rect">
             <a:avLst/>
@@ -23701,8 +22978,8 @@
         </p:nvSpPr>
         <p:spPr>
           <a:xfrm>
-            <a:off x="3734077" y="4169664"/>
-            <a:ext cx="543652" cy="384048"/>
+            <a:off x="3911969" y="4169664"/>
+            <a:ext cx="603504" cy="384048"/>
           </a:xfrm>
           <a:prstGeom prst="rect">
             <a:avLst>
@@ -23728,8 +23005,8 @@
         </p:nvSpPr>
         <p:spPr>
           <a:xfrm>
-            <a:off x="3734077" y="4169664"/>
-            <a:ext cx="543652" cy="384048"/>
+            <a:off x="3911969" y="4169664"/>
+            <a:ext cx="603504" cy="384048"/>
           </a:xfrm>
           <a:prstGeom prst="rect">
             <a:avLst/>
@@ -23753,7 +23030,7 @@
                 <a:ea typeface="Trebuchet MS" pitchFamily="34" charset="-122"/>
                 <a:cs typeface="Trebuchet MS" pitchFamily="34" charset="-120"/>
               </a:rPr>
-              <a:t>i</a:t>
+              <a:t>ir</a:t>
             </a:r>
             <a:endParaRPr lang="en-US" sz="900" dirty="0"/>
           </a:p>
@@ -23767,8 +23044,8 @@
         </p:nvSpPr>
         <p:spPr>
           <a:xfrm>
-            <a:off x="4328021" y="4169664"/>
-            <a:ext cx="543652" cy="384048"/>
+            <a:off x="4565350" y="4169664"/>
+            <a:ext cx="603504" cy="384048"/>
           </a:xfrm>
           <a:prstGeom prst="rect">
             <a:avLst>
@@ -23794,8 +23071,8 @@
         </p:nvSpPr>
         <p:spPr>
           <a:xfrm>
-            <a:off x="4328021" y="4169664"/>
-            <a:ext cx="543652" cy="384048"/>
+            <a:off x="4565350" y="4169664"/>
+            <a:ext cx="603504" cy="384048"/>
           </a:xfrm>
           <a:prstGeom prst="rect">
             <a:avLst/>
@@ -23819,7 +23096,7 @@
                 <a:ea typeface="Trebuchet MS" pitchFamily="34" charset="-122"/>
                 <a:cs typeface="Trebuchet MS" pitchFamily="34" charset="-120"/>
               </a:rPr>
-              <a:t>r</a:t>
+              <a:t>a</a:t>
             </a:r>
             <a:endParaRPr lang="en-US" sz="900" dirty="0"/>
           </a:p>
@@ -23833,8 +23110,8 @@
         </p:nvSpPr>
         <p:spPr>
           <a:xfrm>
-            <a:off x="4921966" y="4169664"/>
-            <a:ext cx="543652" cy="384048"/>
+            <a:off x="5218730" y="4169664"/>
+            <a:ext cx="603504" cy="384048"/>
           </a:xfrm>
           <a:prstGeom prst="rect">
             <a:avLst>
@@ -23860,8 +23137,8 @@
         </p:nvSpPr>
         <p:spPr>
           <a:xfrm>
-            <a:off x="4921966" y="4169664"/>
-            <a:ext cx="543652" cy="384048"/>
+            <a:off x="5218730" y="4169664"/>
+            <a:ext cx="603504" cy="384048"/>
           </a:xfrm>
           <a:prstGeom prst="rect">
             <a:avLst/>
@@ -23885,7 +23162,7 @@
                 <a:ea typeface="Trebuchet MS" pitchFamily="34" charset="-122"/>
                 <a:cs typeface="Trebuchet MS" pitchFamily="34" charset="-120"/>
               </a:rPr>
-              <a:t>a</a:t>
+              <a:t>t</a:t>
             </a:r>
             <a:endParaRPr lang="en-US" sz="900" dirty="0"/>
           </a:p>
@@ -23893,14 +23170,53 @@
       </p:sp>
       <p:sp>
         <p:nvSpPr>
-          <p:cNvPr id="58" name="Shape 56"/>
-          <p:cNvSpPr/>
-          <p:nvPr/>
-        </p:nvSpPr>
-        <p:spPr>
-          <a:xfrm>
-            <a:off x="5515910" y="4169664"/>
-            <a:ext cx="543652" cy="384048"/>
+          <p:cNvPr id="58" name="Text 56"/>
+          <p:cNvSpPr/>
+          <p:nvPr/>
+        </p:nvSpPr>
+        <p:spPr>
+          <a:xfrm>
+            <a:off x="5218730" y="4572000"/>
+            <a:ext cx="603504" cy="219456"/>
+          </a:xfrm>
+          <a:prstGeom prst="rect">
+            <a:avLst/>
+          </a:prstGeom>
+          <a:noFill/>
+          <a:ln/>
+        </p:spPr>
+        <p:txBody>
+          <a:bodyPr wrap="square" lIns="0" tIns="0" rIns="0" bIns="0" rtlCol="0" anchor="t"/>
+          <a:lstStyle/>
+          <a:p>
+            <a:pPr algn="ctr" indent="0" marL="0">
+              <a:buNone/>
+            </a:pPr>
+            <a:r>
+              <a:rPr lang="en-US" sz="750" i="1" dirty="0">
+                <a:solidFill>
+                  <a:srgbClr val="94A3B8"/>
+                </a:solidFill>
+                <a:latin typeface="Calibri" pitchFamily="34" charset="0"/>
+                <a:ea typeface="Calibri" pitchFamily="34" charset="-122"/>
+                <a:cs typeface="Calibri" pitchFamily="34" charset="-120"/>
+              </a:rPr>
+              <a:t>/sh/</a:t>
+            </a:r>
+            <a:endParaRPr lang="en-US" sz="750" dirty="0"/>
+          </a:p>
+        </p:txBody>
+      </p:sp>
+      <p:sp>
+        <p:nvSpPr>
+          <p:cNvPr id="59" name="Shape 57"/>
+          <p:cNvSpPr/>
+          <p:nvPr/>
+        </p:nvSpPr>
+        <p:spPr>
+          <a:xfrm>
+            <a:off x="5872111" y="4169664"/>
+            <a:ext cx="603504" cy="384048"/>
           </a:xfrm>
           <a:prstGeom prst="rect">
             <a:avLst>
@@ -23920,14 +23236,14 @@
       </p:sp>
       <p:sp>
         <p:nvSpPr>
-          <p:cNvPr id="59" name="Text 57"/>
-          <p:cNvSpPr/>
-          <p:nvPr/>
-        </p:nvSpPr>
-        <p:spPr>
-          <a:xfrm>
-            <a:off x="5515910" y="4169664"/>
-            <a:ext cx="543652" cy="384048"/>
+          <p:cNvPr id="60" name="Text 58"/>
+          <p:cNvSpPr/>
+          <p:nvPr/>
+        </p:nvSpPr>
+        <p:spPr>
+          <a:xfrm>
+            <a:off x="5872111" y="4169664"/>
+            <a:ext cx="603504" cy="384048"/>
           </a:xfrm>
           <a:prstGeom prst="rect">
             <a:avLst/>
@@ -23951,7 +23267,7 @@
                 <a:ea typeface="Trebuchet MS" pitchFamily="34" charset="-122"/>
                 <a:cs typeface="Trebuchet MS" pitchFamily="34" charset="-120"/>
               </a:rPr>
-              <a:t>t</a:t>
+              <a:t>io</a:t>
             </a:r>
             <a:endParaRPr lang="en-US" sz="900" dirty="0"/>
           </a:p>
@@ -23959,53 +23275,14 @@
       </p:sp>
       <p:sp>
         <p:nvSpPr>
-          <p:cNvPr id="60" name="Text 58"/>
-          <p:cNvSpPr/>
-          <p:nvPr/>
-        </p:nvSpPr>
-        <p:spPr>
-          <a:xfrm>
-            <a:off x="5515910" y="4572000"/>
-            <a:ext cx="543652" cy="219456"/>
-          </a:xfrm>
-          <a:prstGeom prst="rect">
-            <a:avLst/>
-          </a:prstGeom>
-          <a:noFill/>
-          <a:ln/>
-        </p:spPr>
-        <p:txBody>
-          <a:bodyPr wrap="square" lIns="0" tIns="0" rIns="0" bIns="0" rtlCol="0" anchor="t"/>
-          <a:lstStyle/>
-          <a:p>
-            <a:pPr algn="ctr" indent="0" marL="0">
-              <a:buNone/>
-            </a:pPr>
-            <a:r>
-              <a:rPr lang="en-US" sz="750" i="1" dirty="0">
-                <a:solidFill>
-                  <a:srgbClr val="94A3B8"/>
-                </a:solidFill>
-                <a:latin typeface="Calibri" pitchFamily="34" charset="0"/>
-                <a:ea typeface="Calibri" pitchFamily="34" charset="-122"/>
-                <a:cs typeface="Calibri" pitchFamily="34" charset="-120"/>
-              </a:rPr>
-              <a:t>/sh/</a:t>
-            </a:r>
-            <a:endParaRPr lang="en-US" sz="750" dirty="0"/>
-          </a:p>
-        </p:txBody>
-      </p:sp>
-      <p:sp>
-        <p:nvSpPr>
           <p:cNvPr id="61" name="Shape 59"/>
           <p:cNvSpPr/>
           <p:nvPr/>
         </p:nvSpPr>
         <p:spPr>
           <a:xfrm>
-            <a:off x="6109855" y="4169664"/>
-            <a:ext cx="543652" cy="384048"/>
+            <a:off x="6525491" y="4169664"/>
+            <a:ext cx="603504" cy="384048"/>
           </a:xfrm>
           <a:prstGeom prst="rect">
             <a:avLst>
@@ -24031,8 +23308,8 @@
         </p:nvSpPr>
         <p:spPr>
           <a:xfrm>
-            <a:off x="6109855" y="4169664"/>
-            <a:ext cx="543652" cy="384048"/>
+            <a:off x="6525491" y="4169664"/>
+            <a:ext cx="603504" cy="384048"/>
           </a:xfrm>
           <a:prstGeom prst="rect">
             <a:avLst/>
@@ -24056,7 +23333,7 @@
                 <a:ea typeface="Trebuchet MS" pitchFamily="34" charset="-122"/>
                 <a:cs typeface="Trebuchet MS" pitchFamily="34" charset="-120"/>
               </a:rPr>
-              <a:t>io</a:t>
+              <a:t>n</a:t>
             </a:r>
             <a:endParaRPr lang="en-US" sz="900" dirty="0"/>
           </a:p>
@@ -24070,8 +23347,8 @@
         </p:nvSpPr>
         <p:spPr>
           <a:xfrm>
-            <a:off x="6703799" y="4169664"/>
-            <a:ext cx="543652" cy="384048"/>
+            <a:off x="7178871" y="4169664"/>
+            <a:ext cx="603504" cy="384048"/>
           </a:xfrm>
           <a:prstGeom prst="rect">
             <a:avLst>
@@ -24097,8 +23374,8 @@
         </p:nvSpPr>
         <p:spPr>
           <a:xfrm>
-            <a:off x="6703799" y="4169664"/>
-            <a:ext cx="543652" cy="384048"/>
+            <a:off x="7178871" y="4169664"/>
+            <a:ext cx="603504" cy="384048"/>
           </a:xfrm>
           <a:prstGeom prst="rect">
             <a:avLst/>
@@ -24122,7 +23399,7 @@
                 <a:ea typeface="Trebuchet MS" pitchFamily="34" charset="-122"/>
                 <a:cs typeface="Trebuchet MS" pitchFamily="34" charset="-120"/>
               </a:rPr>
-              <a:t>n</a:t>
+              <a:t>a</a:t>
             </a:r>
             <a:endParaRPr lang="en-US" sz="900" dirty="0"/>
           </a:p>
@@ -24136,8 +23413,8 @@
         </p:nvSpPr>
         <p:spPr>
           <a:xfrm>
-            <a:off x="7297743" y="4169664"/>
-            <a:ext cx="543652" cy="384048"/>
+            <a:off x="7832252" y="4169664"/>
+            <a:ext cx="603504" cy="384048"/>
           </a:xfrm>
           <a:prstGeom prst="rect">
             <a:avLst>
@@ -24163,74 +23440,8 @@
         </p:nvSpPr>
         <p:spPr>
           <a:xfrm>
-            <a:off x="7297743" y="4169664"/>
-            <a:ext cx="543652" cy="384048"/>
-          </a:xfrm>
-          <a:prstGeom prst="rect">
-            <a:avLst/>
-          </a:prstGeom>
-          <a:noFill/>
-          <a:ln/>
-        </p:spPr>
-        <p:txBody>
-          <a:bodyPr wrap="square" lIns="0" tIns="0" rIns="0" bIns="0" rtlCol="0" anchor="ctr"/>
-          <a:lstStyle/>
-          <a:p>
-            <a:pPr algn="ctr" indent="0" marL="0">
-              <a:buNone/>
-            </a:pPr>
-            <a:r>
-              <a:rPr lang="en-US" sz="900" b="1" dirty="0">
-                <a:solidFill>
-                  <a:srgbClr val="9D174D"/>
-                </a:solidFill>
-                <a:latin typeface="Trebuchet MS" pitchFamily="34" charset="0"/>
-                <a:ea typeface="Trebuchet MS" pitchFamily="34" charset="-122"/>
-                <a:cs typeface="Trebuchet MS" pitchFamily="34" charset="-120"/>
-              </a:rPr>
-              <a:t>a</a:t>
-            </a:r>
-            <a:endParaRPr lang="en-US" sz="900" dirty="0"/>
-          </a:p>
-        </p:txBody>
-      </p:sp>
-      <p:sp>
-        <p:nvSpPr>
-          <p:cNvPr id="67" name="Shape 65"/>
-          <p:cNvSpPr/>
-          <p:nvPr/>
-        </p:nvSpPr>
-        <p:spPr>
-          <a:xfrm>
-            <a:off x="7891688" y="4169664"/>
-            <a:ext cx="543652" cy="384048"/>
-          </a:xfrm>
-          <a:prstGeom prst="rect">
-            <a:avLst>
-              <a:gd name="adj" fmla="val 9524"/>
-            </a:avLst>
-          </a:prstGeom>
-          <a:solidFill>
-            <a:srgbClr val="FFFFFF"/>
-          </a:solidFill>
-          <a:ln w="12700">
-            <a:solidFill>
-              <a:srgbClr val="DB2777"/>
-            </a:solidFill>
-            <a:prstDash val="solid"/>
-          </a:ln>
-        </p:spPr>
-      </p:sp>
-      <p:sp>
-        <p:nvSpPr>
-          <p:cNvPr id="68" name="Text 66"/>
-          <p:cNvSpPr/>
-          <p:nvPr/>
-        </p:nvSpPr>
-        <p:spPr>
-          <a:xfrm>
-            <a:off x="7891688" y="4169664"/>
-            <a:ext cx="543652" cy="384048"/>
+            <a:off x="7832252" y="4169664"/>
+            <a:ext cx="603504" cy="384048"/>
           </a:xfrm>
           <a:prstGeom prst="rect">
             <a:avLst/>
@@ -24546,7 +23757,7 @@
                 <a:ea typeface="Calibri" pitchFamily="34" charset="-122"/>
                 <a:cs typeface="Calibri" pitchFamily="34" charset="-120"/>
               </a:rPr>
-              <a:t>Word Labs  •  wordlabs.app  •  Root: 'inspire' = to breathe life or ideas</a:t>
+              <a:t>Word Labs  •  wordlabs.app  •  Root: 'inspire' = breathe life or feeling into</a:t>
             </a:r>
             <a:endParaRPr lang="en-US" sz="800" dirty="0"/>
           </a:p>
@@ -24685,7 +23896,7 @@
                 <a:ea typeface="Trebuchet MS" pitchFamily="34" charset="-122"/>
                 <a:cs typeface="Trebuchet MS" pitchFamily="34" charset="-120"/>
               </a:rPr>
-              <a:t>reinspired</a:t>
+              <a:t>inspiration</a:t>
             </a:r>
             <a:endParaRPr lang="en-US" sz="2800" dirty="0"/>
           </a:p>
@@ -25373,7 +24584,7 @@
                 <a:ea typeface="Calibri" pitchFamily="34" charset="-122"/>
                 <a:cs typeface="Calibri" pitchFamily="34" charset="-120"/>
               </a:rPr>
-              <a:t>Word Labs  •  wordlabs.app  •  Root: 'inspire' = to breathe life or ideas</a:t>
+              <a:t>Word Labs  •  wordlabs.app  •  Root: 'inspire' = breathe life or feeling into</a:t>
             </a:r>
             <a:endParaRPr lang="en-US" sz="800" dirty="0"/>
           </a:p>
@@ -25512,7 +24723,7 @@
                 <a:ea typeface="Trebuchet MS" pitchFamily="34" charset="-122"/>
                 <a:cs typeface="Trebuchet MS" pitchFamily="34" charset="-120"/>
               </a:rPr>
-              <a:t>reinspired</a:t>
+              <a:t>inspiration</a:t>
             </a:r>
             <a:endParaRPr lang="en-US" sz="2800" dirty="0"/>
           </a:p>
@@ -25592,7 +24803,7 @@
         </p:nvSpPr>
         <p:spPr>
           <a:xfrm>
-            <a:off x="2221992" y="2258568"/>
+            <a:off x="2938272" y="2258568"/>
             <a:ext cx="1828800" cy="292608"/>
           </a:xfrm>
           <a:prstGeom prst="rect">
@@ -25601,11 +24812,11 @@
             </a:avLst>
           </a:prstGeom>
           <a:solidFill>
-            <a:srgbClr val="DDD6FE"/>
+            <a:srgbClr val="CCFBF1"/>
           </a:solidFill>
           <a:ln w="19050">
             <a:solidFill>
-              <a:srgbClr val="7C3AED"/>
+              <a:srgbClr val="0D9488"/>
             </a:solidFill>
             <a:prstDash val="solid"/>
           </a:ln>
@@ -25626,7 +24837,7 @@
         </p:nvSpPr>
         <p:spPr>
           <a:xfrm>
-            <a:off x="2221992" y="2258568"/>
+            <a:off x="2938272" y="2258568"/>
             <a:ext cx="1828800" cy="292608"/>
           </a:xfrm>
           <a:prstGeom prst="rect">
@@ -25645,13 +24856,13 @@
             <a:r>
               <a:rPr lang="en-US" sz="1300" b="1" dirty="0">
                 <a:solidFill>
-                  <a:srgbClr val="4C1D95"/>
+                  <a:srgbClr val="0F766E"/>
                 </a:solidFill>
                 <a:latin typeface="Trebuchet MS" pitchFamily="34" charset="0"/>
                 <a:ea typeface="Trebuchet MS" pitchFamily="34" charset="-122"/>
                 <a:cs typeface="Trebuchet MS" pitchFamily="34" charset="-120"/>
               </a:rPr>
-              <a:t>re</a:t>
+              <a:t>inspire</a:t>
             </a:r>
             <a:endParaRPr lang="en-US" sz="1300" dirty="0"/>
           </a:p>
@@ -25665,7 +24876,7 @@
         </p:nvSpPr>
         <p:spPr>
           <a:xfrm>
-            <a:off x="2221992" y="2569464"/>
+            <a:off x="2938272" y="2569464"/>
             <a:ext cx="1828800" cy="201168"/>
           </a:xfrm>
           <a:prstGeom prst="rect">
@@ -25690,7 +24901,7 @@
                 <a:ea typeface="Calibri" pitchFamily="34" charset="-122"/>
                 <a:cs typeface="Calibri" pitchFamily="34" charset="-120"/>
               </a:rPr>
-              <a:t>again</a:t>
+              <a:t>breathe life or feeling into</a:t>
             </a:r>
             <a:endParaRPr lang="en-US" sz="850" dirty="0"/>
           </a:p>
@@ -25698,13 +24909,52 @@
       </p:sp>
       <p:sp>
         <p:nvSpPr>
-          <p:cNvPr id="19" name="Shape 17"/>
-          <p:cNvSpPr/>
-          <p:nvPr/>
-        </p:nvSpPr>
-        <p:spPr>
-          <a:xfrm>
-            <a:off x="4370832" y="2258568"/>
+          <p:cNvPr id="19" name="Text 17"/>
+          <p:cNvSpPr/>
+          <p:nvPr/>
+        </p:nvSpPr>
+        <p:spPr>
+          <a:xfrm>
+            <a:off x="2938272" y="2752344"/>
+            <a:ext cx="1828800" cy="182880"/>
+          </a:xfrm>
+          <a:prstGeom prst="rect">
+            <a:avLst/>
+          </a:prstGeom>
+          <a:noFill/>
+          <a:ln/>
+        </p:spPr>
+        <p:txBody>
+          <a:bodyPr wrap="square" lIns="0" tIns="0" rIns="0" bIns="0" rtlCol="0" anchor="t"/>
+          <a:lstStyle/>
+          <a:p>
+            <a:pPr algn="ctr" indent="0" marL="0">
+              <a:buNone/>
+            </a:pPr>
+            <a:r>
+              <a:rPr lang="en-US" sz="700" i="1" dirty="0">
+                <a:solidFill>
+                  <a:srgbClr val="94A3B8"/>
+                </a:solidFill>
+                <a:latin typeface="Calibri" pitchFamily="34" charset="0"/>
+                <a:ea typeface="Calibri" pitchFamily="34" charset="-122"/>
+                <a:cs typeface="Calibri" pitchFamily="34" charset="-120"/>
+              </a:rPr>
+              <a:t>base drops 'e' before vowel suffix</a:t>
+            </a:r>
+            <a:endParaRPr lang="en-US" sz="700" dirty="0"/>
+          </a:p>
+        </p:txBody>
+      </p:sp>
+      <p:sp>
+        <p:nvSpPr>
+          <p:cNvPr id="20" name="Shape 18"/>
+          <p:cNvSpPr/>
+          <p:nvPr/>
+        </p:nvSpPr>
+        <p:spPr>
+          <a:xfrm>
+            <a:off x="5803392" y="2258568"/>
             <a:ext cx="1828800" cy="292608"/>
           </a:xfrm>
           <a:prstGeom prst="rect">
@@ -25713,11 +24963,11 @@
             </a:avLst>
           </a:prstGeom>
           <a:solidFill>
-            <a:srgbClr val="CCFBF1"/>
+            <a:srgbClr val="FCE7F3"/>
           </a:solidFill>
           <a:ln w="19050">
             <a:solidFill>
-              <a:srgbClr val="0D9488"/>
+              <a:srgbClr val="DB2777"/>
             </a:solidFill>
             <a:prstDash val="solid"/>
           </a:ln>
@@ -25732,13 +24982,13 @@
       </p:sp>
       <p:sp>
         <p:nvSpPr>
-          <p:cNvPr id="20" name="Text 18"/>
-          <p:cNvSpPr/>
-          <p:nvPr/>
-        </p:nvSpPr>
-        <p:spPr>
-          <a:xfrm>
-            <a:off x="4370832" y="2258568"/>
+          <p:cNvPr id="21" name="Text 19"/>
+          <p:cNvSpPr/>
+          <p:nvPr/>
+        </p:nvSpPr>
+        <p:spPr>
+          <a:xfrm>
+            <a:off x="5803392" y="2258568"/>
             <a:ext cx="1828800" cy="292608"/>
           </a:xfrm>
           <a:prstGeom prst="rect">
@@ -25757,13 +25007,13 @@
             <a:r>
               <a:rPr lang="en-US" sz="1300" b="1" dirty="0">
                 <a:solidFill>
-                  <a:srgbClr val="0F766E"/>
+                  <a:srgbClr val="9D174D"/>
                 </a:solidFill>
                 <a:latin typeface="Trebuchet MS" pitchFamily="34" charset="0"/>
                 <a:ea typeface="Trebuchet MS" pitchFamily="34" charset="-122"/>
                 <a:cs typeface="Trebuchet MS" pitchFamily="34" charset="-120"/>
               </a:rPr>
-              <a:t>inspire</a:t>
+              <a:t>ation</a:t>
             </a:r>
             <a:endParaRPr lang="en-US" sz="1300" dirty="0"/>
           </a:p>
@@ -25771,13 +25021,13 @@
       </p:sp>
       <p:sp>
         <p:nvSpPr>
-          <p:cNvPr id="21" name="Text 19"/>
-          <p:cNvSpPr/>
-          <p:nvPr/>
-        </p:nvSpPr>
-        <p:spPr>
-          <a:xfrm>
-            <a:off x="4370832" y="2569464"/>
+          <p:cNvPr id="22" name="Text 20"/>
+          <p:cNvSpPr/>
+          <p:nvPr/>
+        </p:nvSpPr>
+        <p:spPr>
+          <a:xfrm>
+            <a:off x="5803392" y="2569464"/>
             <a:ext cx="1828800" cy="201168"/>
           </a:xfrm>
           <a:prstGeom prst="rect">
@@ -25802,7 +25052,7 @@
                 <a:ea typeface="Calibri" pitchFamily="34" charset="-122"/>
                 <a:cs typeface="Calibri" pitchFamily="34" charset="-120"/>
               </a:rPr>
-              <a:t>to breathe life or ideas into</a:t>
+              <a:t>the act or result of</a:t>
             </a:r>
             <a:endParaRPr lang="en-US" sz="850" dirty="0"/>
           </a:p>
@@ -25810,216 +25060,197 @@
       </p:sp>
       <p:sp>
         <p:nvSpPr>
-          <p:cNvPr id="22" name="Text 20"/>
-          <p:cNvSpPr/>
-          <p:nvPr/>
-        </p:nvSpPr>
-        <p:spPr>
-          <a:xfrm>
-            <a:off x="4370832" y="2752344"/>
-            <a:ext cx="1828800" cy="182880"/>
-          </a:xfrm>
-          <a:prstGeom prst="rect">
-            <a:avLst/>
-          </a:prstGeom>
-          <a:noFill/>
-          <a:ln/>
-        </p:spPr>
-        <p:txBody>
-          <a:bodyPr wrap="square" lIns="0" tIns="0" rIns="0" bIns="0" rtlCol="0" anchor="t"/>
-          <a:lstStyle/>
-          <a:p>
-            <a:pPr algn="ctr" indent="0" marL="0">
-              <a:buNone/>
-            </a:pPr>
-            <a:r>
-              <a:rPr lang="en-US" sz="700" i="1" dirty="0">
-                <a:solidFill>
-                  <a:srgbClr val="94A3B8"/>
+          <p:cNvPr id="23" name="Shape 21"/>
+          <p:cNvSpPr/>
+          <p:nvPr/>
+        </p:nvSpPr>
+        <p:spPr>
+          <a:xfrm>
+            <a:off x="365760" y="3273552"/>
+            <a:ext cx="1371600" cy="658368"/>
+          </a:xfrm>
+          <a:prstGeom prst="rect">
+            <a:avLst>
+              <a:gd name="adj" fmla="val 8333"/>
+            </a:avLst>
+          </a:prstGeom>
+          <a:solidFill>
+            <a:srgbClr val="E2E8F0"/>
+          </a:solidFill>
+          <a:ln w="12700">
+            <a:solidFill>
+              <a:srgbClr val="E2E8F0"/>
+            </a:solidFill>
+            <a:prstDash val="solid"/>
+          </a:ln>
+        </p:spPr>
+      </p:sp>
+      <p:sp>
+        <p:nvSpPr>
+          <p:cNvPr id="24" name="Text 22"/>
+          <p:cNvSpPr/>
+          <p:nvPr/>
+        </p:nvSpPr>
+        <p:spPr>
+          <a:xfrm>
+            <a:off x="365760" y="3273552"/>
+            <a:ext cx="1371600" cy="658368"/>
+          </a:xfrm>
+          <a:prstGeom prst="rect">
+            <a:avLst/>
+          </a:prstGeom>
+          <a:noFill/>
+          <a:ln/>
+        </p:spPr>
+        <p:txBody>
+          <a:bodyPr wrap="square" lIns="0" tIns="0" rIns="0" bIns="0" rtlCol="0" anchor="ctr"/>
+          <a:lstStyle/>
+          <a:p>
+            <a:pPr algn="ctr" indent="0" marL="0">
+              <a:buNone/>
+            </a:pPr>
+            <a:r>
+              <a:rPr lang="en-US" sz="1100" b="1" dirty="0">
+                <a:solidFill>
+                  <a:srgbClr val="475569"/>
+                </a:solidFill>
+                <a:latin typeface="Trebuchet MS" pitchFamily="34" charset="0"/>
+                <a:ea typeface="Trebuchet MS" pitchFamily="34" charset="-122"/>
+                <a:cs typeface="Trebuchet MS" pitchFamily="34" charset="-120"/>
+              </a:rPr>
+              <a:t>Syllables</a:t>
+            </a:r>
+            <a:endParaRPr lang="en-US" sz="1100" dirty="0"/>
+          </a:p>
+        </p:txBody>
+      </p:sp>
+      <p:sp>
+        <p:nvSpPr>
+          <p:cNvPr id="25" name="Shape 23"/>
+          <p:cNvSpPr/>
+          <p:nvPr/>
+        </p:nvSpPr>
+        <p:spPr>
+          <a:xfrm>
+            <a:off x="1874520" y="3273552"/>
+            <a:ext cx="6903720" cy="658368"/>
+          </a:xfrm>
+          <a:prstGeom prst="rect">
+            <a:avLst>
+              <a:gd name="adj" fmla="val 8333"/>
+            </a:avLst>
+          </a:prstGeom>
+          <a:solidFill>
+            <a:srgbClr val="F8FAFC"/>
+          </a:solidFill>
+          <a:ln w="12700">
+            <a:solidFill>
+              <a:srgbClr val="E2E8F0"/>
+            </a:solidFill>
+            <a:prstDash val="dash"/>
+          </a:ln>
+        </p:spPr>
+      </p:sp>
+      <p:sp>
+        <p:nvSpPr>
+          <p:cNvPr id="26" name="Text 24"/>
+          <p:cNvSpPr/>
+          <p:nvPr/>
+        </p:nvSpPr>
+        <p:spPr>
+          <a:xfrm>
+            <a:off x="1874520" y="3273552"/>
+            <a:ext cx="6903720" cy="658368"/>
+          </a:xfrm>
+          <a:prstGeom prst="rect">
+            <a:avLst/>
+          </a:prstGeom>
+          <a:noFill/>
+          <a:ln/>
+        </p:spPr>
+        <p:txBody>
+          <a:bodyPr wrap="square" rtlCol="0" anchor="ctr"/>
+          <a:lstStyle/>
+          <a:p>
+            <a:pPr algn="ctr" indent="0" marL="0">
+              <a:buNone/>
+            </a:pPr>
+            <a:r>
+              <a:rPr lang="en-US" sz="1100" i="1" dirty="0">
+                <a:solidFill>
+                  <a:srgbClr val="CBD5E1"/>
                 </a:solidFill>
                 <a:latin typeface="Calibri" pitchFamily="34" charset="0"/>
                 <a:ea typeface="Calibri" pitchFamily="34" charset="-122"/>
                 <a:cs typeface="Calibri" pitchFamily="34" charset="-120"/>
               </a:rPr>
-              <a:t>'e' dropped before vowel suffix</a:t>
-            </a:r>
-            <a:endParaRPr lang="en-US" sz="700" dirty="0"/>
-          </a:p>
-        </p:txBody>
-      </p:sp>
-      <p:sp>
-        <p:nvSpPr>
-          <p:cNvPr id="23" name="Shape 21"/>
-          <p:cNvSpPr/>
-          <p:nvPr/>
-        </p:nvSpPr>
-        <p:spPr>
-          <a:xfrm>
-            <a:off x="6519672" y="2258568"/>
-            <a:ext cx="1828800" cy="292608"/>
+              <a:t>Write here...</a:t>
+            </a:r>
+            <a:endParaRPr lang="en-US" sz="1100" dirty="0"/>
+          </a:p>
+        </p:txBody>
+      </p:sp>
+      <p:sp>
+        <p:nvSpPr>
+          <p:cNvPr id="27" name="Shape 25"/>
+          <p:cNvSpPr/>
+          <p:nvPr/>
+        </p:nvSpPr>
+        <p:spPr>
+          <a:xfrm>
+            <a:off x="365760" y="4096512"/>
+            <a:ext cx="1371600" cy="804672"/>
           </a:xfrm>
           <a:prstGeom prst="rect">
             <a:avLst>
-              <a:gd name="adj" fmla="val 25000"/>
+              <a:gd name="adj" fmla="val 6818"/>
             </a:avLst>
           </a:prstGeom>
           <a:solidFill>
-            <a:srgbClr val="FCE7F3"/>
-          </a:solidFill>
-          <a:ln w="19050">
-            <a:solidFill>
-              <a:srgbClr val="DB2777"/>
-            </a:solidFill>
-            <a:prstDash val="solid"/>
-          </a:ln>
-          <a:effectLst>
-            <a:outerShdw sx="100000" sy="100000" kx="0" ky="0" algn="bl" rotWithShape="0" blurRad="101600" dist="38100" dir="8100000">
-              <a:srgbClr val="000000">
-                <a:alpha val="12000"/>
-              </a:srgbClr>
-            </a:outerShdw>
-          </a:effectLst>
-        </p:spPr>
-      </p:sp>
-      <p:sp>
-        <p:nvSpPr>
-          <p:cNvPr id="24" name="Text 22"/>
-          <p:cNvSpPr/>
-          <p:nvPr/>
-        </p:nvSpPr>
-        <p:spPr>
-          <a:xfrm>
-            <a:off x="6519672" y="2258568"/>
-            <a:ext cx="1828800" cy="292608"/>
-          </a:xfrm>
-          <a:prstGeom prst="rect">
-            <a:avLst/>
-          </a:prstGeom>
-          <a:noFill/>
-          <a:ln/>
-        </p:spPr>
-        <p:txBody>
-          <a:bodyPr wrap="square" lIns="0" tIns="0" rIns="0" bIns="0" rtlCol="0" anchor="ctr"/>
-          <a:lstStyle/>
-          <a:p>
-            <a:pPr algn="ctr" indent="0" marL="0">
-              <a:buNone/>
-            </a:pPr>
-            <a:r>
-              <a:rPr lang="en-US" sz="1300" b="1" dirty="0">
-                <a:solidFill>
-                  <a:srgbClr val="9D174D"/>
+            <a:srgbClr val="E2E8F0"/>
+          </a:solidFill>
+          <a:ln w="12700">
+            <a:solidFill>
+              <a:srgbClr val="E2E8F0"/>
+            </a:solidFill>
+            <a:prstDash val="solid"/>
+          </a:ln>
+        </p:spPr>
+      </p:sp>
+      <p:sp>
+        <p:nvSpPr>
+          <p:cNvPr id="28" name="Text 26"/>
+          <p:cNvSpPr/>
+          <p:nvPr/>
+        </p:nvSpPr>
+        <p:spPr>
+          <a:xfrm>
+            <a:off x="365760" y="4096512"/>
+            <a:ext cx="1371600" cy="804672"/>
+          </a:xfrm>
+          <a:prstGeom prst="rect">
+            <a:avLst/>
+          </a:prstGeom>
+          <a:noFill/>
+          <a:ln/>
+        </p:spPr>
+        <p:txBody>
+          <a:bodyPr wrap="square" lIns="0" tIns="0" rIns="0" bIns="0" rtlCol="0" anchor="ctr"/>
+          <a:lstStyle/>
+          <a:p>
+            <a:pPr algn="ctr" indent="0" marL="0">
+              <a:buNone/>
+            </a:pPr>
+            <a:r>
+              <a:rPr lang="en-US" sz="1100" b="1" dirty="0">
+                <a:solidFill>
+                  <a:srgbClr val="475569"/>
                 </a:solidFill>
                 <a:latin typeface="Trebuchet MS" pitchFamily="34" charset="0"/>
                 <a:ea typeface="Trebuchet MS" pitchFamily="34" charset="-122"/>
                 <a:cs typeface="Trebuchet MS" pitchFamily="34" charset="-120"/>
               </a:rPr>
-              <a:t>ed</a:t>
-            </a:r>
-            <a:endParaRPr lang="en-US" sz="1300" dirty="0"/>
-          </a:p>
-        </p:txBody>
-      </p:sp>
-      <p:sp>
-        <p:nvSpPr>
-          <p:cNvPr id="25" name="Text 23"/>
-          <p:cNvSpPr/>
-          <p:nvPr/>
-        </p:nvSpPr>
-        <p:spPr>
-          <a:xfrm>
-            <a:off x="6519672" y="2569464"/>
-            <a:ext cx="1828800" cy="201168"/>
-          </a:xfrm>
-          <a:prstGeom prst="rect">
-            <a:avLst/>
-          </a:prstGeom>
-          <a:noFill/>
-          <a:ln/>
-        </p:spPr>
-        <p:txBody>
-          <a:bodyPr wrap="square" lIns="0" tIns="0" rIns="0" bIns="0" rtlCol="0" anchor="t"/>
-          <a:lstStyle/>
-          <a:p>
-            <a:pPr algn="ctr" indent="0" marL="0">
-              <a:buNone/>
-            </a:pPr>
-            <a:r>
-              <a:rPr lang="en-US" sz="850" dirty="0">
-                <a:solidFill>
-                  <a:srgbClr val="475569"/>
-                </a:solidFill>
-                <a:latin typeface="Calibri" pitchFamily="34" charset="0"/>
-                <a:ea typeface="Calibri" pitchFamily="34" charset="-122"/>
-                <a:cs typeface="Calibri" pitchFamily="34" charset="-120"/>
-              </a:rPr>
-              <a:t>happened in the past</a:t>
-            </a:r>
-            <a:endParaRPr lang="en-US" sz="850" dirty="0"/>
-          </a:p>
-        </p:txBody>
-      </p:sp>
-      <p:sp>
-        <p:nvSpPr>
-          <p:cNvPr id="26" name="Shape 24"/>
-          <p:cNvSpPr/>
-          <p:nvPr/>
-        </p:nvSpPr>
-        <p:spPr>
-          <a:xfrm>
-            <a:off x="365760" y="3273552"/>
-            <a:ext cx="1371600" cy="658368"/>
-          </a:xfrm>
-          <a:prstGeom prst="rect">
-            <a:avLst>
-              <a:gd name="adj" fmla="val 8333"/>
-            </a:avLst>
-          </a:prstGeom>
-          <a:solidFill>
-            <a:srgbClr val="E2E8F0"/>
-          </a:solidFill>
-          <a:ln w="12700">
-            <a:solidFill>
-              <a:srgbClr val="E2E8F0"/>
-            </a:solidFill>
-            <a:prstDash val="solid"/>
-          </a:ln>
-        </p:spPr>
-      </p:sp>
-      <p:sp>
-        <p:nvSpPr>
-          <p:cNvPr id="27" name="Text 25"/>
-          <p:cNvSpPr/>
-          <p:nvPr/>
-        </p:nvSpPr>
-        <p:spPr>
-          <a:xfrm>
-            <a:off x="365760" y="3273552"/>
-            <a:ext cx="1371600" cy="658368"/>
-          </a:xfrm>
-          <a:prstGeom prst="rect">
-            <a:avLst/>
-          </a:prstGeom>
-          <a:noFill/>
-          <a:ln/>
-        </p:spPr>
-        <p:txBody>
-          <a:bodyPr wrap="square" lIns="0" tIns="0" rIns="0" bIns="0" rtlCol="0" anchor="ctr"/>
-          <a:lstStyle/>
-          <a:p>
-            <a:pPr algn="ctr" indent="0" marL="0">
-              <a:buNone/>
-            </a:pPr>
-            <a:r>
-              <a:rPr lang="en-US" sz="1100" b="1" dirty="0">
-                <a:solidFill>
-                  <a:srgbClr val="475569"/>
-                </a:solidFill>
-                <a:latin typeface="Trebuchet MS" pitchFamily="34" charset="0"/>
-                <a:ea typeface="Trebuchet MS" pitchFamily="34" charset="-122"/>
-                <a:cs typeface="Trebuchet MS" pitchFamily="34" charset="-120"/>
-              </a:rPr>
-              <a:t>Syllables</a:t>
+              <a:t>Phonemes</a:t>
             </a:r>
             <a:endParaRPr lang="en-US" sz="1100" dirty="0"/>
           </a:p>
@@ -26027,80 +25258,14 @@
       </p:sp>
       <p:sp>
         <p:nvSpPr>
-          <p:cNvPr id="28" name="Shape 26"/>
-          <p:cNvSpPr/>
-          <p:nvPr/>
-        </p:nvSpPr>
-        <p:spPr>
-          <a:xfrm>
-            <a:off x="1874520" y="3273552"/>
-            <a:ext cx="6903720" cy="658368"/>
-          </a:xfrm>
-          <a:prstGeom prst="rect">
-            <a:avLst>
-              <a:gd name="adj" fmla="val 8333"/>
-            </a:avLst>
-          </a:prstGeom>
-          <a:solidFill>
-            <a:srgbClr val="F8FAFC"/>
-          </a:solidFill>
-          <a:ln w="12700">
-            <a:solidFill>
-              <a:srgbClr val="E2E8F0"/>
-            </a:solidFill>
-            <a:prstDash val="dash"/>
-          </a:ln>
-        </p:spPr>
-      </p:sp>
-      <p:sp>
-        <p:nvSpPr>
-          <p:cNvPr id="29" name="Text 27"/>
-          <p:cNvSpPr/>
-          <p:nvPr/>
-        </p:nvSpPr>
-        <p:spPr>
-          <a:xfrm>
-            <a:off x="1874520" y="3273552"/>
-            <a:ext cx="6903720" cy="658368"/>
-          </a:xfrm>
-          <a:prstGeom prst="rect">
-            <a:avLst/>
-          </a:prstGeom>
-          <a:noFill/>
-          <a:ln/>
-        </p:spPr>
-        <p:txBody>
-          <a:bodyPr wrap="square" rtlCol="0" anchor="ctr"/>
-          <a:lstStyle/>
-          <a:p>
-            <a:pPr algn="ctr" indent="0" marL="0">
-              <a:buNone/>
-            </a:pPr>
-            <a:r>
-              <a:rPr lang="en-US" sz="1100" i="1" dirty="0">
-                <a:solidFill>
-                  <a:srgbClr val="CBD5E1"/>
-                </a:solidFill>
-                <a:latin typeface="Calibri" pitchFamily="34" charset="0"/>
-                <a:ea typeface="Calibri" pitchFamily="34" charset="-122"/>
-                <a:cs typeface="Calibri" pitchFamily="34" charset="-120"/>
-              </a:rPr>
-              <a:t>Write here...</a:t>
-            </a:r>
-            <a:endParaRPr lang="en-US" sz="1100" dirty="0"/>
-          </a:p>
-        </p:txBody>
-      </p:sp>
-      <p:sp>
-        <p:nvSpPr>
-          <p:cNvPr id="30" name="Shape 28"/>
-          <p:cNvSpPr/>
-          <p:nvPr/>
-        </p:nvSpPr>
-        <p:spPr>
-          <a:xfrm>
-            <a:off x="365760" y="4096512"/>
-            <a:ext cx="1371600" cy="804672"/>
+          <p:cNvPr id="29" name="Shape 27"/>
+          <p:cNvSpPr/>
+          <p:nvPr/>
+        </p:nvSpPr>
+        <p:spPr>
+          <a:xfrm>
+            <a:off x="1874520" y="4096512"/>
+            <a:ext cx="6903720" cy="804672"/>
           </a:xfrm>
           <a:prstGeom prst="rect">
             <a:avLst>
@@ -26108,85 +25273,19 @@
             </a:avLst>
           </a:prstGeom>
           <a:solidFill>
-            <a:srgbClr val="E2E8F0"/>
+            <a:srgbClr val="F8FAFC"/>
           </a:solidFill>
           <a:ln w="12700">
             <a:solidFill>
               <a:srgbClr val="E2E8F0"/>
             </a:solidFill>
-            <a:prstDash val="solid"/>
-          </a:ln>
-        </p:spPr>
-      </p:sp>
-      <p:sp>
-        <p:nvSpPr>
-          <p:cNvPr id="31" name="Text 29"/>
-          <p:cNvSpPr/>
-          <p:nvPr/>
-        </p:nvSpPr>
-        <p:spPr>
-          <a:xfrm>
-            <a:off x="365760" y="4096512"/>
-            <a:ext cx="1371600" cy="804672"/>
-          </a:xfrm>
-          <a:prstGeom prst="rect">
-            <a:avLst/>
-          </a:prstGeom>
-          <a:noFill/>
-          <a:ln/>
-        </p:spPr>
-        <p:txBody>
-          <a:bodyPr wrap="square" lIns="0" tIns="0" rIns="0" bIns="0" rtlCol="0" anchor="ctr"/>
-          <a:lstStyle/>
-          <a:p>
-            <a:pPr algn="ctr" indent="0" marL="0">
-              <a:buNone/>
-            </a:pPr>
-            <a:r>
-              <a:rPr lang="en-US" sz="1100" b="1" dirty="0">
-                <a:solidFill>
-                  <a:srgbClr val="475569"/>
-                </a:solidFill>
-                <a:latin typeface="Trebuchet MS" pitchFamily="34" charset="0"/>
-                <a:ea typeface="Trebuchet MS" pitchFamily="34" charset="-122"/>
-                <a:cs typeface="Trebuchet MS" pitchFamily="34" charset="-120"/>
-              </a:rPr>
-              <a:t>Phonemes</a:t>
-            </a:r>
-            <a:endParaRPr lang="en-US" sz="1100" dirty="0"/>
-          </a:p>
-        </p:txBody>
-      </p:sp>
-      <p:sp>
-        <p:nvSpPr>
-          <p:cNvPr id="32" name="Shape 30"/>
-          <p:cNvSpPr/>
-          <p:nvPr/>
-        </p:nvSpPr>
-        <p:spPr>
-          <a:xfrm>
-            <a:off x="1874520" y="4096512"/>
-            <a:ext cx="6903720" cy="804672"/>
-          </a:xfrm>
-          <a:prstGeom prst="rect">
-            <a:avLst>
-              <a:gd name="adj" fmla="val 6818"/>
-            </a:avLst>
-          </a:prstGeom>
-          <a:solidFill>
-            <a:srgbClr val="F8FAFC"/>
-          </a:solidFill>
-          <a:ln w="12700">
-            <a:solidFill>
-              <a:srgbClr val="E2E8F0"/>
-            </a:solidFill>
             <a:prstDash val="dash"/>
           </a:ln>
         </p:spPr>
       </p:sp>
       <p:sp>
         <p:nvSpPr>
-          <p:cNvPr id="33" name="Text 31"/>
+          <p:cNvPr id="30" name="Text 28"/>
           <p:cNvSpPr/>
           <p:nvPr/>
         </p:nvSpPr>
@@ -26509,7 +25608,7 @@
                 <a:ea typeface="Calibri" pitchFamily="34" charset="-122"/>
                 <a:cs typeface="Calibri" pitchFamily="34" charset="-120"/>
               </a:rPr>
-              <a:t>Word Labs  •  wordlabs.app  •  Root: 'inspire' = to breathe life or ideas</a:t>
+              <a:t>Word Labs  •  wordlabs.app  •  Root: 'inspire' = breathe life or feeling into</a:t>
             </a:r>
             <a:endParaRPr lang="en-US" sz="800" dirty="0"/>
           </a:p>
@@ -26582,7 +25681,7 @@
                 <a:ea typeface="Trebuchet MS" pitchFamily="34" charset="-122"/>
                 <a:cs typeface="Trebuchet MS" pitchFamily="34" charset="-120"/>
               </a:rPr>
-              <a:t>We are learning that the root 'inspire' means 'to breathe life or ideas'.</a:t>
+              <a:t>We are learning that the root 'inspire' means 'breathe life or feeling into'.</a:t>
             </a:r>
             <a:endParaRPr lang="en-US" sz="2000" dirty="0"/>
           </a:p>
@@ -27228,7 +26327,7 @@
                 <a:ea typeface="Calibri" pitchFamily="34" charset="-122"/>
                 <a:cs typeface="Calibri" pitchFamily="34" charset="-120"/>
               </a:rPr>
-              <a:t>Word Labs  •  wordlabs.app  •  Root: 'inspire' = to breathe life or ideas</a:t>
+              <a:t>Word Labs  •  wordlabs.app  •  Root: 'inspire' = breathe life or feeling into</a:t>
             </a:r>
             <a:endParaRPr lang="en-US" sz="800" dirty="0"/>
           </a:p>
@@ -27367,7 +26466,7 @@
                 <a:ea typeface="Trebuchet MS" pitchFamily="34" charset="-122"/>
                 <a:cs typeface="Trebuchet MS" pitchFamily="34" charset="-120"/>
               </a:rPr>
-              <a:t>reinspired</a:t>
+              <a:t>inspiration</a:t>
             </a:r>
             <a:endParaRPr lang="en-US" sz="2800" dirty="0"/>
           </a:p>
@@ -27447,7 +26546,7 @@
         </p:nvSpPr>
         <p:spPr>
           <a:xfrm>
-            <a:off x="2221992" y="2258568"/>
+            <a:off x="2938272" y="2258568"/>
             <a:ext cx="1828800" cy="292608"/>
           </a:xfrm>
           <a:prstGeom prst="rect">
@@ -27456,11 +26555,11 @@
             </a:avLst>
           </a:prstGeom>
           <a:solidFill>
-            <a:srgbClr val="DDD6FE"/>
+            <a:srgbClr val="CCFBF1"/>
           </a:solidFill>
           <a:ln w="19050">
             <a:solidFill>
-              <a:srgbClr val="7C3AED"/>
+              <a:srgbClr val="0D9488"/>
             </a:solidFill>
             <a:prstDash val="solid"/>
           </a:ln>
@@ -27481,7 +26580,7 @@
         </p:nvSpPr>
         <p:spPr>
           <a:xfrm>
-            <a:off x="2221992" y="2258568"/>
+            <a:off x="2938272" y="2258568"/>
             <a:ext cx="1828800" cy="292608"/>
           </a:xfrm>
           <a:prstGeom prst="rect">
@@ -27500,13 +26599,13 @@
             <a:r>
               <a:rPr lang="en-US" sz="1300" b="1" dirty="0">
                 <a:solidFill>
-                  <a:srgbClr val="4C1D95"/>
+                  <a:srgbClr val="0F766E"/>
                 </a:solidFill>
                 <a:latin typeface="Trebuchet MS" pitchFamily="34" charset="0"/>
                 <a:ea typeface="Trebuchet MS" pitchFamily="34" charset="-122"/>
                 <a:cs typeface="Trebuchet MS" pitchFamily="34" charset="-120"/>
               </a:rPr>
-              <a:t>re</a:t>
+              <a:t>inspire</a:t>
             </a:r>
             <a:endParaRPr lang="en-US" sz="1300" dirty="0"/>
           </a:p>
@@ -27520,7 +26619,7 @@
         </p:nvSpPr>
         <p:spPr>
           <a:xfrm>
-            <a:off x="2221992" y="2569464"/>
+            <a:off x="2938272" y="2569464"/>
             <a:ext cx="1828800" cy="201168"/>
           </a:xfrm>
           <a:prstGeom prst="rect">
@@ -27545,7 +26644,7 @@
                 <a:ea typeface="Calibri" pitchFamily="34" charset="-122"/>
                 <a:cs typeface="Calibri" pitchFamily="34" charset="-120"/>
               </a:rPr>
-              <a:t>again</a:t>
+              <a:t>breathe life or feeling into</a:t>
             </a:r>
             <a:endParaRPr lang="en-US" sz="850" dirty="0"/>
           </a:p>
@@ -27553,13 +26652,52 @@
       </p:sp>
       <p:sp>
         <p:nvSpPr>
-          <p:cNvPr id="19" name="Shape 17"/>
-          <p:cNvSpPr/>
-          <p:nvPr/>
-        </p:nvSpPr>
-        <p:spPr>
-          <a:xfrm>
-            <a:off x="4370832" y="2258568"/>
+          <p:cNvPr id="19" name="Text 17"/>
+          <p:cNvSpPr/>
+          <p:nvPr/>
+        </p:nvSpPr>
+        <p:spPr>
+          <a:xfrm>
+            <a:off x="2938272" y="2752344"/>
+            <a:ext cx="1828800" cy="182880"/>
+          </a:xfrm>
+          <a:prstGeom prst="rect">
+            <a:avLst/>
+          </a:prstGeom>
+          <a:noFill/>
+          <a:ln/>
+        </p:spPr>
+        <p:txBody>
+          <a:bodyPr wrap="square" lIns="0" tIns="0" rIns="0" bIns="0" rtlCol="0" anchor="t"/>
+          <a:lstStyle/>
+          <a:p>
+            <a:pPr algn="ctr" indent="0" marL="0">
+              <a:buNone/>
+            </a:pPr>
+            <a:r>
+              <a:rPr lang="en-US" sz="700" i="1" dirty="0">
+                <a:solidFill>
+                  <a:srgbClr val="94A3B8"/>
+                </a:solidFill>
+                <a:latin typeface="Calibri" pitchFamily="34" charset="0"/>
+                <a:ea typeface="Calibri" pitchFamily="34" charset="-122"/>
+                <a:cs typeface="Calibri" pitchFamily="34" charset="-120"/>
+              </a:rPr>
+              <a:t>base drops 'e' before vowel suffix</a:t>
+            </a:r>
+            <a:endParaRPr lang="en-US" sz="700" dirty="0"/>
+          </a:p>
+        </p:txBody>
+      </p:sp>
+      <p:sp>
+        <p:nvSpPr>
+          <p:cNvPr id="20" name="Shape 18"/>
+          <p:cNvSpPr/>
+          <p:nvPr/>
+        </p:nvSpPr>
+        <p:spPr>
+          <a:xfrm>
+            <a:off x="5803392" y="2258568"/>
             <a:ext cx="1828800" cy="292608"/>
           </a:xfrm>
           <a:prstGeom prst="rect">
@@ -27568,11 +26706,11 @@
             </a:avLst>
           </a:prstGeom>
           <a:solidFill>
-            <a:srgbClr val="CCFBF1"/>
+            <a:srgbClr val="FCE7F3"/>
           </a:solidFill>
           <a:ln w="19050">
             <a:solidFill>
-              <a:srgbClr val="0D9488"/>
+              <a:srgbClr val="DB2777"/>
             </a:solidFill>
             <a:prstDash val="solid"/>
           </a:ln>
@@ -27587,13 +26725,13 @@
       </p:sp>
       <p:sp>
         <p:nvSpPr>
-          <p:cNvPr id="20" name="Text 18"/>
-          <p:cNvSpPr/>
-          <p:nvPr/>
-        </p:nvSpPr>
-        <p:spPr>
-          <a:xfrm>
-            <a:off x="4370832" y="2258568"/>
+          <p:cNvPr id="21" name="Text 19"/>
+          <p:cNvSpPr/>
+          <p:nvPr/>
+        </p:nvSpPr>
+        <p:spPr>
+          <a:xfrm>
+            <a:off x="5803392" y="2258568"/>
             <a:ext cx="1828800" cy="292608"/>
           </a:xfrm>
           <a:prstGeom prst="rect">
@@ -27612,13 +26750,13 @@
             <a:r>
               <a:rPr lang="en-US" sz="1300" b="1" dirty="0">
                 <a:solidFill>
-                  <a:srgbClr val="0F766E"/>
+                  <a:srgbClr val="9D174D"/>
                 </a:solidFill>
                 <a:latin typeface="Trebuchet MS" pitchFamily="34" charset="0"/>
                 <a:ea typeface="Trebuchet MS" pitchFamily="34" charset="-122"/>
                 <a:cs typeface="Trebuchet MS" pitchFamily="34" charset="-120"/>
               </a:rPr>
-              <a:t>inspire</a:t>
+              <a:t>ation</a:t>
             </a:r>
             <a:endParaRPr lang="en-US" sz="1300" dirty="0"/>
           </a:p>
@@ -27626,13 +26764,13 @@
       </p:sp>
       <p:sp>
         <p:nvSpPr>
-          <p:cNvPr id="21" name="Text 19"/>
-          <p:cNvSpPr/>
-          <p:nvPr/>
-        </p:nvSpPr>
-        <p:spPr>
-          <a:xfrm>
-            <a:off x="4370832" y="2569464"/>
+          <p:cNvPr id="22" name="Text 20"/>
+          <p:cNvSpPr/>
+          <p:nvPr/>
+        </p:nvSpPr>
+        <p:spPr>
+          <a:xfrm>
+            <a:off x="5803392" y="2569464"/>
             <a:ext cx="1828800" cy="201168"/>
           </a:xfrm>
           <a:prstGeom prst="rect">
@@ -27657,7 +26795,7 @@
                 <a:ea typeface="Calibri" pitchFamily="34" charset="-122"/>
                 <a:cs typeface="Calibri" pitchFamily="34" charset="-120"/>
               </a:rPr>
-              <a:t>to breathe life or ideas into</a:t>
+              <a:t>the act or result of</a:t>
             </a:r>
             <a:endParaRPr lang="en-US" sz="850" dirty="0"/>
           </a:p>
@@ -27665,75 +26803,29 @@
       </p:sp>
       <p:sp>
         <p:nvSpPr>
-          <p:cNvPr id="22" name="Text 20"/>
-          <p:cNvSpPr/>
-          <p:nvPr/>
-        </p:nvSpPr>
-        <p:spPr>
-          <a:xfrm>
-            <a:off x="4370832" y="2752344"/>
-            <a:ext cx="1828800" cy="182880"/>
-          </a:xfrm>
-          <a:prstGeom prst="rect">
-            <a:avLst/>
-          </a:prstGeom>
-          <a:noFill/>
-          <a:ln/>
-        </p:spPr>
-        <p:txBody>
-          <a:bodyPr wrap="square" lIns="0" tIns="0" rIns="0" bIns="0" rtlCol="0" anchor="t"/>
-          <a:lstStyle/>
-          <a:p>
-            <a:pPr algn="ctr" indent="0" marL="0">
-              <a:buNone/>
-            </a:pPr>
-            <a:r>
-              <a:rPr lang="en-US" sz="700" i="1" dirty="0">
-                <a:solidFill>
-                  <a:srgbClr val="94A3B8"/>
-                </a:solidFill>
-                <a:latin typeface="Calibri" pitchFamily="34" charset="0"/>
-                <a:ea typeface="Calibri" pitchFamily="34" charset="-122"/>
-                <a:cs typeface="Calibri" pitchFamily="34" charset="-120"/>
-              </a:rPr>
-              <a:t>'e' dropped before vowel suffix</a:t>
-            </a:r>
-            <a:endParaRPr lang="en-US" sz="700" dirty="0"/>
-          </a:p>
-        </p:txBody>
-      </p:sp>
-      <p:sp>
-        <p:nvSpPr>
           <p:cNvPr id="23" name="Shape 21"/>
           <p:cNvSpPr/>
           <p:nvPr/>
         </p:nvSpPr>
         <p:spPr>
           <a:xfrm>
-            <a:off x="6519672" y="2258568"/>
-            <a:ext cx="1828800" cy="292608"/>
+            <a:off x="365760" y="3273552"/>
+            <a:ext cx="1371600" cy="658368"/>
           </a:xfrm>
           <a:prstGeom prst="rect">
             <a:avLst>
-              <a:gd name="adj" fmla="val 25000"/>
+              <a:gd name="adj" fmla="val 8333"/>
             </a:avLst>
           </a:prstGeom>
           <a:solidFill>
-            <a:srgbClr val="FCE7F3"/>
-          </a:solidFill>
-          <a:ln w="19050">
-            <a:solidFill>
-              <a:srgbClr val="DB2777"/>
-            </a:solidFill>
-            <a:prstDash val="solid"/>
-          </a:ln>
-          <a:effectLst>
-            <a:outerShdw sx="100000" sy="100000" kx="0" ky="0" algn="bl" rotWithShape="0" blurRad="101600" dist="38100" dir="8100000">
-              <a:srgbClr val="000000">
-                <a:alpha val="12000"/>
-              </a:srgbClr>
-            </a:outerShdw>
-          </a:effectLst>
+            <a:srgbClr val="E2E8F0"/>
+          </a:solidFill>
+          <a:ln w="12700">
+            <a:solidFill>
+              <a:srgbClr val="E2E8F0"/>
+            </a:solidFill>
+            <a:prstDash val="solid"/>
+          </a:ln>
         </p:spPr>
       </p:sp>
       <p:sp>
@@ -27744,86 +26836,47 @@
         </p:nvSpPr>
         <p:spPr>
           <a:xfrm>
-            <a:off x="6519672" y="2258568"/>
-            <a:ext cx="1828800" cy="292608"/>
-          </a:xfrm>
-          <a:prstGeom prst="rect">
-            <a:avLst/>
-          </a:prstGeom>
-          <a:noFill/>
-          <a:ln/>
-        </p:spPr>
-        <p:txBody>
-          <a:bodyPr wrap="square" lIns="0" tIns="0" rIns="0" bIns="0" rtlCol="0" anchor="ctr"/>
-          <a:lstStyle/>
-          <a:p>
-            <a:pPr algn="ctr" indent="0" marL="0">
-              <a:buNone/>
-            </a:pPr>
-            <a:r>
-              <a:rPr lang="en-US" sz="1300" b="1" dirty="0">
-                <a:solidFill>
-                  <a:srgbClr val="9D174D"/>
+            <a:off x="365760" y="3273552"/>
+            <a:ext cx="1371600" cy="658368"/>
+          </a:xfrm>
+          <a:prstGeom prst="rect">
+            <a:avLst/>
+          </a:prstGeom>
+          <a:noFill/>
+          <a:ln/>
+        </p:spPr>
+        <p:txBody>
+          <a:bodyPr wrap="square" lIns="0" tIns="0" rIns="0" bIns="0" rtlCol="0" anchor="ctr"/>
+          <a:lstStyle/>
+          <a:p>
+            <a:pPr algn="ctr" indent="0" marL="0">
+              <a:buNone/>
+            </a:pPr>
+            <a:r>
+              <a:rPr lang="en-US" sz="1100" b="1" dirty="0">
+                <a:solidFill>
+                  <a:srgbClr val="475569"/>
                 </a:solidFill>
                 <a:latin typeface="Trebuchet MS" pitchFamily="34" charset="0"/>
                 <a:ea typeface="Trebuchet MS" pitchFamily="34" charset="-122"/>
                 <a:cs typeface="Trebuchet MS" pitchFamily="34" charset="-120"/>
               </a:rPr>
-              <a:t>ed</a:t>
-            </a:r>
-            <a:endParaRPr lang="en-US" sz="1300" dirty="0"/>
-          </a:p>
-        </p:txBody>
-      </p:sp>
-      <p:sp>
-        <p:nvSpPr>
-          <p:cNvPr id="25" name="Text 23"/>
-          <p:cNvSpPr/>
-          <p:nvPr/>
-        </p:nvSpPr>
-        <p:spPr>
-          <a:xfrm>
-            <a:off x="6519672" y="2569464"/>
-            <a:ext cx="1828800" cy="201168"/>
-          </a:xfrm>
-          <a:prstGeom prst="rect">
-            <a:avLst/>
-          </a:prstGeom>
-          <a:noFill/>
-          <a:ln/>
-        </p:spPr>
-        <p:txBody>
-          <a:bodyPr wrap="square" lIns="0" tIns="0" rIns="0" bIns="0" rtlCol="0" anchor="t"/>
-          <a:lstStyle/>
-          <a:p>
-            <a:pPr algn="ctr" indent="0" marL="0">
-              <a:buNone/>
-            </a:pPr>
-            <a:r>
-              <a:rPr lang="en-US" sz="850" dirty="0">
-                <a:solidFill>
-                  <a:srgbClr val="475569"/>
-                </a:solidFill>
-                <a:latin typeface="Calibri" pitchFamily="34" charset="0"/>
-                <a:ea typeface="Calibri" pitchFamily="34" charset="-122"/>
-                <a:cs typeface="Calibri" pitchFamily="34" charset="-120"/>
-              </a:rPr>
-              <a:t>happened in the past</a:t>
-            </a:r>
-            <a:endParaRPr lang="en-US" sz="850" dirty="0"/>
-          </a:p>
-        </p:txBody>
-      </p:sp>
-      <p:sp>
-        <p:nvSpPr>
-          <p:cNvPr id="26" name="Shape 24"/>
-          <p:cNvSpPr/>
-          <p:nvPr/>
-        </p:nvSpPr>
-        <p:spPr>
-          <a:xfrm>
-            <a:off x="365760" y="3273552"/>
-            <a:ext cx="1371600" cy="658368"/>
+              <a:t>Syllables</a:t>
+            </a:r>
+            <a:endParaRPr lang="en-US" sz="1100" dirty="0"/>
+          </a:p>
+        </p:txBody>
+      </p:sp>
+      <p:sp>
+        <p:nvSpPr>
+          <p:cNvPr id="25" name="Shape 23"/>
+          <p:cNvSpPr/>
+          <p:nvPr/>
+        </p:nvSpPr>
+        <p:spPr>
+          <a:xfrm>
+            <a:off x="1874520" y="3273552"/>
+            <a:ext cx="6903720" cy="658368"/>
           </a:xfrm>
           <a:prstGeom prst="rect">
             <a:avLst>
@@ -27831,11 +26884,38 @@
             </a:avLst>
           </a:prstGeom>
           <a:solidFill>
-            <a:srgbClr val="E2E8F0"/>
-          </a:solidFill>
-          <a:ln w="12700">
-            <a:solidFill>
-              <a:srgbClr val="E2E8F0"/>
+            <a:srgbClr val="CCFBF1"/>
+          </a:solidFill>
+          <a:ln w="12700">
+            <a:solidFill>
+              <a:srgbClr val="0D9488"/>
+            </a:solidFill>
+            <a:prstDash val="solid"/>
+          </a:ln>
+        </p:spPr>
+      </p:sp>
+      <p:sp>
+        <p:nvSpPr>
+          <p:cNvPr id="26" name="Shape 24"/>
+          <p:cNvSpPr/>
+          <p:nvPr/>
+        </p:nvSpPr>
+        <p:spPr>
+          <a:xfrm>
+            <a:off x="1975104" y="3364992"/>
+            <a:ext cx="1554480" cy="475488"/>
+          </a:xfrm>
+          <a:prstGeom prst="rect">
+            <a:avLst>
+              <a:gd name="adj" fmla="val 9615"/>
+            </a:avLst>
+          </a:prstGeom>
+          <a:solidFill>
+            <a:srgbClr val="FFFFFF"/>
+          </a:solidFill>
+          <a:ln w="12700">
+            <a:solidFill>
+              <a:srgbClr val="0D9488"/>
             </a:solidFill>
             <a:prstDash val="solid"/>
           </a:ln>
@@ -27849,63 +26929,75 @@
         </p:nvSpPr>
         <p:spPr>
           <a:xfrm>
-            <a:off x="365760" y="3273552"/>
-            <a:ext cx="1371600" cy="658368"/>
-          </a:xfrm>
-          <a:prstGeom prst="rect">
-            <a:avLst/>
-          </a:prstGeom>
-          <a:noFill/>
-          <a:ln/>
-        </p:spPr>
-        <p:txBody>
-          <a:bodyPr wrap="square" lIns="0" tIns="0" rIns="0" bIns="0" rtlCol="0" anchor="ctr"/>
-          <a:lstStyle/>
-          <a:p>
-            <a:pPr algn="ctr" indent="0" marL="0">
-              <a:buNone/>
-            </a:pPr>
-            <a:r>
-              <a:rPr lang="en-US" sz="1100" b="1" dirty="0">
-                <a:solidFill>
-                  <a:srgbClr val="475569"/>
+            <a:off x="1975104" y="3364992"/>
+            <a:ext cx="1554480" cy="475488"/>
+          </a:xfrm>
+          <a:prstGeom prst="rect">
+            <a:avLst/>
+          </a:prstGeom>
+          <a:noFill/>
+          <a:ln/>
+        </p:spPr>
+        <p:txBody>
+          <a:bodyPr wrap="square" lIns="0" tIns="0" rIns="0" bIns="0" rtlCol="0" anchor="ctr"/>
+          <a:lstStyle/>
+          <a:p>
+            <a:pPr algn="ctr" indent="0" marL="0">
+              <a:buNone/>
+            </a:pPr>
+            <a:r>
+              <a:rPr lang="en-US" sz="1400" b="1" dirty="0">
+                <a:solidFill>
+                  <a:srgbClr val="0D9488"/>
                 </a:solidFill>
                 <a:latin typeface="Trebuchet MS" pitchFamily="34" charset="0"/>
                 <a:ea typeface="Trebuchet MS" pitchFamily="34" charset="-122"/>
                 <a:cs typeface="Trebuchet MS" pitchFamily="34" charset="-120"/>
               </a:rPr>
-              <a:t>Syllables</a:t>
-            </a:r>
-            <a:endParaRPr lang="en-US" sz="1100" dirty="0"/>
-          </a:p>
-        </p:txBody>
-      </p:sp>
-      <p:sp>
-        <p:nvSpPr>
-          <p:cNvPr id="28" name="Shape 26"/>
-          <p:cNvSpPr/>
-          <p:nvPr/>
-        </p:nvSpPr>
-        <p:spPr>
-          <a:xfrm>
-            <a:off x="1874520" y="3273552"/>
-            <a:ext cx="6903720" cy="658368"/>
-          </a:xfrm>
-          <a:prstGeom prst="rect">
-            <a:avLst>
-              <a:gd name="adj" fmla="val 8333"/>
-            </a:avLst>
-          </a:prstGeom>
-          <a:solidFill>
-            <a:srgbClr val="CCFBF1"/>
-          </a:solidFill>
-          <a:ln w="12700">
-            <a:solidFill>
-              <a:srgbClr val="0D9488"/>
-            </a:solidFill>
-            <a:prstDash val="solid"/>
-          </a:ln>
-        </p:spPr>
+              <a:t>in</a:t>
+            </a:r>
+            <a:endParaRPr lang="en-US" sz="1400" dirty="0"/>
+          </a:p>
+        </p:txBody>
+      </p:sp>
+      <p:sp>
+        <p:nvSpPr>
+          <p:cNvPr id="28" name="Text 26"/>
+          <p:cNvSpPr/>
+          <p:nvPr/>
+        </p:nvSpPr>
+        <p:spPr>
+          <a:xfrm>
+            <a:off x="3529584" y="3364992"/>
+            <a:ext cx="73152" cy="475488"/>
+          </a:xfrm>
+          <a:prstGeom prst="rect">
+            <a:avLst/>
+          </a:prstGeom>
+          <a:noFill/>
+          <a:ln/>
+        </p:spPr>
+        <p:txBody>
+          <a:bodyPr wrap="square" lIns="0" tIns="0" rIns="0" bIns="0" rtlCol="0" anchor="ctr"/>
+          <a:lstStyle/>
+          <a:p>
+            <a:pPr algn="ctr" indent="0" marL="0">
+              <a:buNone/>
+            </a:pPr>
+            <a:r>
+              <a:rPr lang="en-US" sz="1600" b="1" dirty="0">
+                <a:solidFill>
+                  <a:srgbClr val="0D9488"/>
+                </a:solidFill>
+                <a:latin typeface="Trebuchet MS" pitchFamily="34" charset="0"/>
+                <a:ea typeface="Trebuchet MS" pitchFamily="34" charset="-122"/>
+                <a:cs typeface="Trebuchet MS" pitchFamily="34" charset="-120"/>
+              </a:rPr>
+              <a:t>·</a:t>
+            </a:r>
+            <a:endParaRPr lang="en-US" sz="1600" dirty="0"/>
+          </a:p>
+        </p:txBody>
       </p:sp>
       <p:sp>
         <p:nvSpPr>
@@ -27915,8 +27007,8 @@
         </p:nvSpPr>
         <p:spPr>
           <a:xfrm>
-            <a:off x="2313432" y="3364992"/>
-            <a:ext cx="1645920" cy="475488"/>
+            <a:off x="3602736" y="3364992"/>
+            <a:ext cx="1554480" cy="475488"/>
           </a:xfrm>
           <a:prstGeom prst="rect">
             <a:avLst>
@@ -27942,8 +27034,8 @@
         </p:nvSpPr>
         <p:spPr>
           <a:xfrm>
-            <a:off x="2313432" y="3364992"/>
-            <a:ext cx="1645920" cy="475488"/>
+            <a:off x="3602736" y="3364992"/>
+            <a:ext cx="1554480" cy="475488"/>
           </a:xfrm>
           <a:prstGeom prst="rect">
             <a:avLst/>
@@ -27967,7 +27059,7 @@
                 <a:ea typeface="Trebuchet MS" pitchFamily="34" charset="-122"/>
                 <a:cs typeface="Trebuchet MS" pitchFamily="34" charset="-120"/>
               </a:rPr>
-              <a:t>re</a:t>
+              <a:t>spir</a:t>
             </a:r>
             <a:endParaRPr lang="en-US" sz="1400" dirty="0"/>
           </a:p>
@@ -27981,8 +27073,8 @@
         </p:nvSpPr>
         <p:spPr>
           <a:xfrm>
-            <a:off x="3959352" y="3364992"/>
-            <a:ext cx="411480" cy="475488"/>
+            <a:off x="5157216" y="3364992"/>
+            <a:ext cx="73152" cy="475488"/>
           </a:xfrm>
           <a:prstGeom prst="rect">
             <a:avLst/>
@@ -28020,8 +27112,8 @@
         </p:nvSpPr>
         <p:spPr>
           <a:xfrm>
-            <a:off x="4370832" y="3364992"/>
-            <a:ext cx="1645920" cy="475488"/>
+            <a:off x="5230368" y="3364992"/>
+            <a:ext cx="1554480" cy="475488"/>
           </a:xfrm>
           <a:prstGeom prst="rect">
             <a:avLst>
@@ -28047,8 +27139,8 @@
         </p:nvSpPr>
         <p:spPr>
           <a:xfrm>
-            <a:off x="4370832" y="3364992"/>
-            <a:ext cx="1645920" cy="475488"/>
+            <a:off x="5230368" y="3364992"/>
+            <a:ext cx="1554480" cy="475488"/>
           </a:xfrm>
           <a:prstGeom prst="rect">
             <a:avLst/>
@@ -28072,7 +27164,7 @@
                 <a:ea typeface="Trebuchet MS" pitchFamily="34" charset="-122"/>
                 <a:cs typeface="Trebuchet MS" pitchFamily="34" charset="-120"/>
               </a:rPr>
-              <a:t>in</a:t>
+              <a:t>a</a:t>
             </a:r>
             <a:endParaRPr lang="en-US" sz="1400" dirty="0"/>
           </a:p>
@@ -28086,8 +27178,8 @@
         </p:nvSpPr>
         <p:spPr>
           <a:xfrm>
-            <a:off x="6016752" y="3364992"/>
-            <a:ext cx="411480" cy="475488"/>
+            <a:off x="6784848" y="3364992"/>
+            <a:ext cx="73152" cy="475488"/>
           </a:xfrm>
           <a:prstGeom prst="rect">
             <a:avLst/>
@@ -28125,8 +27217,8 @@
         </p:nvSpPr>
         <p:spPr>
           <a:xfrm>
-            <a:off x="6428232" y="3364992"/>
-            <a:ext cx="1645920" cy="475488"/>
+            <a:off x="6858000" y="3364992"/>
+            <a:ext cx="1554480" cy="475488"/>
           </a:xfrm>
           <a:prstGeom prst="rect">
             <a:avLst>
@@ -28152,8 +27244,8 @@
         </p:nvSpPr>
         <p:spPr>
           <a:xfrm>
-            <a:off x="6428232" y="3364992"/>
-            <a:ext cx="1645920" cy="475488"/>
+            <a:off x="6858000" y="3364992"/>
+            <a:ext cx="1554480" cy="475488"/>
           </a:xfrm>
           <a:prstGeom prst="rect">
             <a:avLst/>
@@ -28177,7 +27269,7 @@
                 <a:ea typeface="Trebuchet MS" pitchFamily="34" charset="-122"/>
                 <a:cs typeface="Trebuchet MS" pitchFamily="34" charset="-120"/>
               </a:rPr>
-              <a:t>spired</a:t>
+              <a:t>tion</a:t>
             </a:r>
             <a:endParaRPr lang="en-US" sz="1400" dirty="0"/>
           </a:p>
@@ -28601,7 +27693,7 @@
                 <a:ea typeface="Calibri" pitchFamily="34" charset="-122"/>
                 <a:cs typeface="Calibri" pitchFamily="34" charset="-120"/>
               </a:rPr>
-              <a:t>Word Labs  •  wordlabs.app  •  Root: 'inspire' = to breathe life or ideas</a:t>
+              <a:t>Word Labs  •  wordlabs.app  •  Root: 'inspire' = breathe life or feeling into</a:t>
             </a:r>
             <a:endParaRPr lang="en-US" sz="800" dirty="0"/>
           </a:p>
@@ -28740,7 +27832,7 @@
                 <a:ea typeface="Trebuchet MS" pitchFamily="34" charset="-122"/>
                 <a:cs typeface="Trebuchet MS" pitchFamily="34" charset="-120"/>
               </a:rPr>
-              <a:t>reinspired</a:t>
+              <a:t>inspiration</a:t>
             </a:r>
             <a:endParaRPr lang="en-US" sz="2800" dirty="0"/>
           </a:p>
@@ -28820,7 +27912,7 @@
         </p:nvSpPr>
         <p:spPr>
           <a:xfrm>
-            <a:off x="2221992" y="2258568"/>
+            <a:off x="2938272" y="2258568"/>
             <a:ext cx="1828800" cy="292608"/>
           </a:xfrm>
           <a:prstGeom prst="rect">
@@ -28829,11 +27921,11 @@
             </a:avLst>
           </a:prstGeom>
           <a:solidFill>
-            <a:srgbClr val="DDD6FE"/>
+            <a:srgbClr val="CCFBF1"/>
           </a:solidFill>
           <a:ln w="19050">
             <a:solidFill>
-              <a:srgbClr val="7C3AED"/>
+              <a:srgbClr val="0D9488"/>
             </a:solidFill>
             <a:prstDash val="solid"/>
           </a:ln>
@@ -28854,7 +27946,7 @@
         </p:nvSpPr>
         <p:spPr>
           <a:xfrm>
-            <a:off x="2221992" y="2258568"/>
+            <a:off x="2938272" y="2258568"/>
             <a:ext cx="1828800" cy="292608"/>
           </a:xfrm>
           <a:prstGeom prst="rect">
@@ -28873,13 +27965,13 @@
             <a:r>
               <a:rPr lang="en-US" sz="1300" b="1" dirty="0">
                 <a:solidFill>
-                  <a:srgbClr val="4C1D95"/>
+                  <a:srgbClr val="0F766E"/>
                 </a:solidFill>
                 <a:latin typeface="Trebuchet MS" pitchFamily="34" charset="0"/>
                 <a:ea typeface="Trebuchet MS" pitchFamily="34" charset="-122"/>
                 <a:cs typeface="Trebuchet MS" pitchFamily="34" charset="-120"/>
               </a:rPr>
-              <a:t>re</a:t>
+              <a:t>inspire</a:t>
             </a:r>
             <a:endParaRPr lang="en-US" sz="1300" dirty="0"/>
           </a:p>
@@ -28893,7 +27985,7 @@
         </p:nvSpPr>
         <p:spPr>
           <a:xfrm>
-            <a:off x="2221992" y="2569464"/>
+            <a:off x="2938272" y="2569464"/>
             <a:ext cx="1828800" cy="201168"/>
           </a:xfrm>
           <a:prstGeom prst="rect">
@@ -28918,7 +28010,7 @@
                 <a:ea typeface="Calibri" pitchFamily="34" charset="-122"/>
                 <a:cs typeface="Calibri" pitchFamily="34" charset="-120"/>
               </a:rPr>
-              <a:t>again</a:t>
+              <a:t>breathe life or feeling into</a:t>
             </a:r>
             <a:endParaRPr lang="en-US" sz="850" dirty="0"/>
           </a:p>
@@ -28926,13 +28018,52 @@
       </p:sp>
       <p:sp>
         <p:nvSpPr>
-          <p:cNvPr id="19" name="Shape 17"/>
-          <p:cNvSpPr/>
-          <p:nvPr/>
-        </p:nvSpPr>
-        <p:spPr>
-          <a:xfrm>
-            <a:off x="4370832" y="2258568"/>
+          <p:cNvPr id="19" name="Text 17"/>
+          <p:cNvSpPr/>
+          <p:nvPr/>
+        </p:nvSpPr>
+        <p:spPr>
+          <a:xfrm>
+            <a:off x="2938272" y="2752344"/>
+            <a:ext cx="1828800" cy="182880"/>
+          </a:xfrm>
+          <a:prstGeom prst="rect">
+            <a:avLst/>
+          </a:prstGeom>
+          <a:noFill/>
+          <a:ln/>
+        </p:spPr>
+        <p:txBody>
+          <a:bodyPr wrap="square" lIns="0" tIns="0" rIns="0" bIns="0" rtlCol="0" anchor="t"/>
+          <a:lstStyle/>
+          <a:p>
+            <a:pPr algn="ctr" indent="0" marL="0">
+              <a:buNone/>
+            </a:pPr>
+            <a:r>
+              <a:rPr lang="en-US" sz="700" i="1" dirty="0">
+                <a:solidFill>
+                  <a:srgbClr val="94A3B8"/>
+                </a:solidFill>
+                <a:latin typeface="Calibri" pitchFamily="34" charset="0"/>
+                <a:ea typeface="Calibri" pitchFamily="34" charset="-122"/>
+                <a:cs typeface="Calibri" pitchFamily="34" charset="-120"/>
+              </a:rPr>
+              <a:t>base drops 'e' before vowel suffix</a:t>
+            </a:r>
+            <a:endParaRPr lang="en-US" sz="700" dirty="0"/>
+          </a:p>
+        </p:txBody>
+      </p:sp>
+      <p:sp>
+        <p:nvSpPr>
+          <p:cNvPr id="20" name="Shape 18"/>
+          <p:cNvSpPr/>
+          <p:nvPr/>
+        </p:nvSpPr>
+        <p:spPr>
+          <a:xfrm>
+            <a:off x="5803392" y="2258568"/>
             <a:ext cx="1828800" cy="292608"/>
           </a:xfrm>
           <a:prstGeom prst="rect">
@@ -28941,11 +28072,11 @@
             </a:avLst>
           </a:prstGeom>
           <a:solidFill>
-            <a:srgbClr val="CCFBF1"/>
+            <a:srgbClr val="FCE7F3"/>
           </a:solidFill>
           <a:ln w="19050">
             <a:solidFill>
-              <a:srgbClr val="0D9488"/>
+              <a:srgbClr val="DB2777"/>
             </a:solidFill>
             <a:prstDash val="solid"/>
           </a:ln>
@@ -28960,13 +28091,13 @@
       </p:sp>
       <p:sp>
         <p:nvSpPr>
-          <p:cNvPr id="20" name="Text 18"/>
-          <p:cNvSpPr/>
-          <p:nvPr/>
-        </p:nvSpPr>
-        <p:spPr>
-          <a:xfrm>
-            <a:off x="4370832" y="2258568"/>
+          <p:cNvPr id="21" name="Text 19"/>
+          <p:cNvSpPr/>
+          <p:nvPr/>
+        </p:nvSpPr>
+        <p:spPr>
+          <a:xfrm>
+            <a:off x="5803392" y="2258568"/>
             <a:ext cx="1828800" cy="292608"/>
           </a:xfrm>
           <a:prstGeom prst="rect">
@@ -28985,13 +28116,13 @@
             <a:r>
               <a:rPr lang="en-US" sz="1300" b="1" dirty="0">
                 <a:solidFill>
-                  <a:srgbClr val="0F766E"/>
+                  <a:srgbClr val="9D174D"/>
                 </a:solidFill>
                 <a:latin typeface="Trebuchet MS" pitchFamily="34" charset="0"/>
                 <a:ea typeface="Trebuchet MS" pitchFamily="34" charset="-122"/>
                 <a:cs typeface="Trebuchet MS" pitchFamily="34" charset="-120"/>
               </a:rPr>
-              <a:t>inspire</a:t>
+              <a:t>ation</a:t>
             </a:r>
             <a:endParaRPr lang="en-US" sz="1300" dirty="0"/>
           </a:p>
@@ -28999,13 +28130,13 @@
       </p:sp>
       <p:sp>
         <p:nvSpPr>
-          <p:cNvPr id="21" name="Text 19"/>
-          <p:cNvSpPr/>
-          <p:nvPr/>
-        </p:nvSpPr>
-        <p:spPr>
-          <a:xfrm>
-            <a:off x="4370832" y="2569464"/>
+          <p:cNvPr id="22" name="Text 20"/>
+          <p:cNvSpPr/>
+          <p:nvPr/>
+        </p:nvSpPr>
+        <p:spPr>
+          <a:xfrm>
+            <a:off x="5803392" y="2569464"/>
             <a:ext cx="1828800" cy="201168"/>
           </a:xfrm>
           <a:prstGeom prst="rect">
@@ -29030,7 +28161,7 @@
                 <a:ea typeface="Calibri" pitchFamily="34" charset="-122"/>
                 <a:cs typeface="Calibri" pitchFamily="34" charset="-120"/>
               </a:rPr>
-              <a:t>to breathe life or ideas into</a:t>
+              <a:t>the act or result of</a:t>
             </a:r>
             <a:endParaRPr lang="en-US" sz="850" dirty="0"/>
           </a:p>
@@ -29038,14 +28169,977 @@
       </p:sp>
       <p:sp>
         <p:nvSpPr>
-          <p:cNvPr id="22" name="Text 20"/>
-          <p:cNvSpPr/>
-          <p:nvPr/>
-        </p:nvSpPr>
-        <p:spPr>
-          <a:xfrm>
-            <a:off x="4370832" y="2752344"/>
-            <a:ext cx="1828800" cy="182880"/>
+          <p:cNvPr id="23" name="Shape 21"/>
+          <p:cNvSpPr/>
+          <p:nvPr/>
+        </p:nvSpPr>
+        <p:spPr>
+          <a:xfrm>
+            <a:off x="365760" y="3273552"/>
+            <a:ext cx="1371600" cy="658368"/>
+          </a:xfrm>
+          <a:prstGeom prst="rect">
+            <a:avLst>
+              <a:gd name="adj" fmla="val 8333"/>
+            </a:avLst>
+          </a:prstGeom>
+          <a:solidFill>
+            <a:srgbClr val="E2E8F0"/>
+          </a:solidFill>
+          <a:ln w="12700">
+            <a:solidFill>
+              <a:srgbClr val="E2E8F0"/>
+            </a:solidFill>
+            <a:prstDash val="solid"/>
+          </a:ln>
+        </p:spPr>
+      </p:sp>
+      <p:sp>
+        <p:nvSpPr>
+          <p:cNvPr id="24" name="Text 22"/>
+          <p:cNvSpPr/>
+          <p:nvPr/>
+        </p:nvSpPr>
+        <p:spPr>
+          <a:xfrm>
+            <a:off x="365760" y="3273552"/>
+            <a:ext cx="1371600" cy="658368"/>
+          </a:xfrm>
+          <a:prstGeom prst="rect">
+            <a:avLst/>
+          </a:prstGeom>
+          <a:noFill/>
+          <a:ln/>
+        </p:spPr>
+        <p:txBody>
+          <a:bodyPr wrap="square" lIns="0" tIns="0" rIns="0" bIns="0" rtlCol="0" anchor="ctr"/>
+          <a:lstStyle/>
+          <a:p>
+            <a:pPr algn="ctr" indent="0" marL="0">
+              <a:buNone/>
+            </a:pPr>
+            <a:r>
+              <a:rPr lang="en-US" sz="1100" b="1" dirty="0">
+                <a:solidFill>
+                  <a:srgbClr val="475569"/>
+                </a:solidFill>
+                <a:latin typeface="Trebuchet MS" pitchFamily="34" charset="0"/>
+                <a:ea typeface="Trebuchet MS" pitchFamily="34" charset="-122"/>
+                <a:cs typeface="Trebuchet MS" pitchFamily="34" charset="-120"/>
+              </a:rPr>
+              <a:t>Syllables</a:t>
+            </a:r>
+            <a:endParaRPr lang="en-US" sz="1100" dirty="0"/>
+          </a:p>
+        </p:txBody>
+      </p:sp>
+      <p:sp>
+        <p:nvSpPr>
+          <p:cNvPr id="25" name="Shape 23"/>
+          <p:cNvSpPr/>
+          <p:nvPr/>
+        </p:nvSpPr>
+        <p:spPr>
+          <a:xfrm>
+            <a:off x="1874520" y="3273552"/>
+            <a:ext cx="6903720" cy="658368"/>
+          </a:xfrm>
+          <a:prstGeom prst="rect">
+            <a:avLst>
+              <a:gd name="adj" fmla="val 8333"/>
+            </a:avLst>
+          </a:prstGeom>
+          <a:solidFill>
+            <a:srgbClr val="CCFBF1"/>
+          </a:solidFill>
+          <a:ln w="12700">
+            <a:solidFill>
+              <a:srgbClr val="0D9488"/>
+            </a:solidFill>
+            <a:prstDash val="solid"/>
+          </a:ln>
+        </p:spPr>
+      </p:sp>
+      <p:sp>
+        <p:nvSpPr>
+          <p:cNvPr id="26" name="Shape 24"/>
+          <p:cNvSpPr/>
+          <p:nvPr/>
+        </p:nvSpPr>
+        <p:spPr>
+          <a:xfrm>
+            <a:off x="1975104" y="3364992"/>
+            <a:ext cx="1554480" cy="475488"/>
+          </a:xfrm>
+          <a:prstGeom prst="rect">
+            <a:avLst>
+              <a:gd name="adj" fmla="val 9615"/>
+            </a:avLst>
+          </a:prstGeom>
+          <a:solidFill>
+            <a:srgbClr val="FFFFFF"/>
+          </a:solidFill>
+          <a:ln w="12700">
+            <a:solidFill>
+              <a:srgbClr val="0D9488"/>
+            </a:solidFill>
+            <a:prstDash val="solid"/>
+          </a:ln>
+        </p:spPr>
+      </p:sp>
+      <p:sp>
+        <p:nvSpPr>
+          <p:cNvPr id="27" name="Text 25"/>
+          <p:cNvSpPr/>
+          <p:nvPr/>
+        </p:nvSpPr>
+        <p:spPr>
+          <a:xfrm>
+            <a:off x="1975104" y="3364992"/>
+            <a:ext cx="1554480" cy="475488"/>
+          </a:xfrm>
+          <a:prstGeom prst="rect">
+            <a:avLst/>
+          </a:prstGeom>
+          <a:noFill/>
+          <a:ln/>
+        </p:spPr>
+        <p:txBody>
+          <a:bodyPr wrap="square" lIns="0" tIns="0" rIns="0" bIns="0" rtlCol="0" anchor="ctr"/>
+          <a:lstStyle/>
+          <a:p>
+            <a:pPr algn="ctr" indent="0" marL="0">
+              <a:buNone/>
+            </a:pPr>
+            <a:r>
+              <a:rPr lang="en-US" sz="1400" b="1" dirty="0">
+                <a:solidFill>
+                  <a:srgbClr val="0D9488"/>
+                </a:solidFill>
+                <a:latin typeface="Trebuchet MS" pitchFamily="34" charset="0"/>
+                <a:ea typeface="Trebuchet MS" pitchFamily="34" charset="-122"/>
+                <a:cs typeface="Trebuchet MS" pitchFamily="34" charset="-120"/>
+              </a:rPr>
+              <a:t>in</a:t>
+            </a:r>
+            <a:endParaRPr lang="en-US" sz="1400" dirty="0"/>
+          </a:p>
+        </p:txBody>
+      </p:sp>
+      <p:sp>
+        <p:nvSpPr>
+          <p:cNvPr id="28" name="Text 26"/>
+          <p:cNvSpPr/>
+          <p:nvPr/>
+        </p:nvSpPr>
+        <p:spPr>
+          <a:xfrm>
+            <a:off x="3529584" y="3364992"/>
+            <a:ext cx="73152" cy="475488"/>
+          </a:xfrm>
+          <a:prstGeom prst="rect">
+            <a:avLst/>
+          </a:prstGeom>
+          <a:noFill/>
+          <a:ln/>
+        </p:spPr>
+        <p:txBody>
+          <a:bodyPr wrap="square" lIns="0" tIns="0" rIns="0" bIns="0" rtlCol="0" anchor="ctr"/>
+          <a:lstStyle/>
+          <a:p>
+            <a:pPr algn="ctr" indent="0" marL="0">
+              <a:buNone/>
+            </a:pPr>
+            <a:r>
+              <a:rPr lang="en-US" sz="1600" b="1" dirty="0">
+                <a:solidFill>
+                  <a:srgbClr val="0D9488"/>
+                </a:solidFill>
+                <a:latin typeface="Trebuchet MS" pitchFamily="34" charset="0"/>
+                <a:ea typeface="Trebuchet MS" pitchFamily="34" charset="-122"/>
+                <a:cs typeface="Trebuchet MS" pitchFamily="34" charset="-120"/>
+              </a:rPr>
+              <a:t>·</a:t>
+            </a:r>
+            <a:endParaRPr lang="en-US" sz="1600" dirty="0"/>
+          </a:p>
+        </p:txBody>
+      </p:sp>
+      <p:sp>
+        <p:nvSpPr>
+          <p:cNvPr id="29" name="Shape 27"/>
+          <p:cNvSpPr/>
+          <p:nvPr/>
+        </p:nvSpPr>
+        <p:spPr>
+          <a:xfrm>
+            <a:off x="3602736" y="3364992"/>
+            <a:ext cx="1554480" cy="475488"/>
+          </a:xfrm>
+          <a:prstGeom prst="rect">
+            <a:avLst>
+              <a:gd name="adj" fmla="val 9615"/>
+            </a:avLst>
+          </a:prstGeom>
+          <a:solidFill>
+            <a:srgbClr val="FFFFFF"/>
+          </a:solidFill>
+          <a:ln w="12700">
+            <a:solidFill>
+              <a:srgbClr val="0D9488"/>
+            </a:solidFill>
+            <a:prstDash val="solid"/>
+          </a:ln>
+        </p:spPr>
+      </p:sp>
+      <p:sp>
+        <p:nvSpPr>
+          <p:cNvPr id="30" name="Text 28"/>
+          <p:cNvSpPr/>
+          <p:nvPr/>
+        </p:nvSpPr>
+        <p:spPr>
+          <a:xfrm>
+            <a:off x="3602736" y="3364992"/>
+            <a:ext cx="1554480" cy="475488"/>
+          </a:xfrm>
+          <a:prstGeom prst="rect">
+            <a:avLst/>
+          </a:prstGeom>
+          <a:noFill/>
+          <a:ln/>
+        </p:spPr>
+        <p:txBody>
+          <a:bodyPr wrap="square" lIns="0" tIns="0" rIns="0" bIns="0" rtlCol="0" anchor="ctr"/>
+          <a:lstStyle/>
+          <a:p>
+            <a:pPr algn="ctr" indent="0" marL="0">
+              <a:buNone/>
+            </a:pPr>
+            <a:r>
+              <a:rPr lang="en-US" sz="1400" b="1" dirty="0">
+                <a:solidFill>
+                  <a:srgbClr val="0D9488"/>
+                </a:solidFill>
+                <a:latin typeface="Trebuchet MS" pitchFamily="34" charset="0"/>
+                <a:ea typeface="Trebuchet MS" pitchFamily="34" charset="-122"/>
+                <a:cs typeface="Trebuchet MS" pitchFamily="34" charset="-120"/>
+              </a:rPr>
+              <a:t>spir</a:t>
+            </a:r>
+            <a:endParaRPr lang="en-US" sz="1400" dirty="0"/>
+          </a:p>
+        </p:txBody>
+      </p:sp>
+      <p:sp>
+        <p:nvSpPr>
+          <p:cNvPr id="31" name="Text 29"/>
+          <p:cNvSpPr/>
+          <p:nvPr/>
+        </p:nvSpPr>
+        <p:spPr>
+          <a:xfrm>
+            <a:off x="5157216" y="3364992"/>
+            <a:ext cx="73152" cy="475488"/>
+          </a:xfrm>
+          <a:prstGeom prst="rect">
+            <a:avLst/>
+          </a:prstGeom>
+          <a:noFill/>
+          <a:ln/>
+        </p:spPr>
+        <p:txBody>
+          <a:bodyPr wrap="square" lIns="0" tIns="0" rIns="0" bIns="0" rtlCol="0" anchor="ctr"/>
+          <a:lstStyle/>
+          <a:p>
+            <a:pPr algn="ctr" indent="0" marL="0">
+              <a:buNone/>
+            </a:pPr>
+            <a:r>
+              <a:rPr lang="en-US" sz="1600" b="1" dirty="0">
+                <a:solidFill>
+                  <a:srgbClr val="0D9488"/>
+                </a:solidFill>
+                <a:latin typeface="Trebuchet MS" pitchFamily="34" charset="0"/>
+                <a:ea typeface="Trebuchet MS" pitchFamily="34" charset="-122"/>
+                <a:cs typeface="Trebuchet MS" pitchFamily="34" charset="-120"/>
+              </a:rPr>
+              <a:t>·</a:t>
+            </a:r>
+            <a:endParaRPr lang="en-US" sz="1600" dirty="0"/>
+          </a:p>
+        </p:txBody>
+      </p:sp>
+      <p:sp>
+        <p:nvSpPr>
+          <p:cNvPr id="32" name="Shape 30"/>
+          <p:cNvSpPr/>
+          <p:nvPr/>
+        </p:nvSpPr>
+        <p:spPr>
+          <a:xfrm>
+            <a:off x="5230368" y="3364992"/>
+            <a:ext cx="1554480" cy="475488"/>
+          </a:xfrm>
+          <a:prstGeom prst="rect">
+            <a:avLst>
+              <a:gd name="adj" fmla="val 9615"/>
+            </a:avLst>
+          </a:prstGeom>
+          <a:solidFill>
+            <a:srgbClr val="FFFFFF"/>
+          </a:solidFill>
+          <a:ln w="12700">
+            <a:solidFill>
+              <a:srgbClr val="0D9488"/>
+            </a:solidFill>
+            <a:prstDash val="solid"/>
+          </a:ln>
+        </p:spPr>
+      </p:sp>
+      <p:sp>
+        <p:nvSpPr>
+          <p:cNvPr id="33" name="Text 31"/>
+          <p:cNvSpPr/>
+          <p:nvPr/>
+        </p:nvSpPr>
+        <p:spPr>
+          <a:xfrm>
+            <a:off x="5230368" y="3364992"/>
+            <a:ext cx="1554480" cy="475488"/>
+          </a:xfrm>
+          <a:prstGeom prst="rect">
+            <a:avLst/>
+          </a:prstGeom>
+          <a:noFill/>
+          <a:ln/>
+        </p:spPr>
+        <p:txBody>
+          <a:bodyPr wrap="square" lIns="0" tIns="0" rIns="0" bIns="0" rtlCol="0" anchor="ctr"/>
+          <a:lstStyle/>
+          <a:p>
+            <a:pPr algn="ctr" indent="0" marL="0">
+              <a:buNone/>
+            </a:pPr>
+            <a:r>
+              <a:rPr lang="en-US" sz="1400" b="1" dirty="0">
+                <a:solidFill>
+                  <a:srgbClr val="0D9488"/>
+                </a:solidFill>
+                <a:latin typeface="Trebuchet MS" pitchFamily="34" charset="0"/>
+                <a:ea typeface="Trebuchet MS" pitchFamily="34" charset="-122"/>
+                <a:cs typeface="Trebuchet MS" pitchFamily="34" charset="-120"/>
+              </a:rPr>
+              <a:t>a</a:t>
+            </a:r>
+            <a:endParaRPr lang="en-US" sz="1400" dirty="0"/>
+          </a:p>
+        </p:txBody>
+      </p:sp>
+      <p:sp>
+        <p:nvSpPr>
+          <p:cNvPr id="34" name="Text 32"/>
+          <p:cNvSpPr/>
+          <p:nvPr/>
+        </p:nvSpPr>
+        <p:spPr>
+          <a:xfrm>
+            <a:off x="6784848" y="3364992"/>
+            <a:ext cx="73152" cy="475488"/>
+          </a:xfrm>
+          <a:prstGeom prst="rect">
+            <a:avLst/>
+          </a:prstGeom>
+          <a:noFill/>
+          <a:ln/>
+        </p:spPr>
+        <p:txBody>
+          <a:bodyPr wrap="square" lIns="0" tIns="0" rIns="0" bIns="0" rtlCol="0" anchor="ctr"/>
+          <a:lstStyle/>
+          <a:p>
+            <a:pPr algn="ctr" indent="0" marL="0">
+              <a:buNone/>
+            </a:pPr>
+            <a:r>
+              <a:rPr lang="en-US" sz="1600" b="1" dirty="0">
+                <a:solidFill>
+                  <a:srgbClr val="0D9488"/>
+                </a:solidFill>
+                <a:latin typeface="Trebuchet MS" pitchFamily="34" charset="0"/>
+                <a:ea typeface="Trebuchet MS" pitchFamily="34" charset="-122"/>
+                <a:cs typeface="Trebuchet MS" pitchFamily="34" charset="-120"/>
+              </a:rPr>
+              <a:t>·</a:t>
+            </a:r>
+            <a:endParaRPr lang="en-US" sz="1600" dirty="0"/>
+          </a:p>
+        </p:txBody>
+      </p:sp>
+      <p:sp>
+        <p:nvSpPr>
+          <p:cNvPr id="35" name="Shape 33"/>
+          <p:cNvSpPr/>
+          <p:nvPr/>
+        </p:nvSpPr>
+        <p:spPr>
+          <a:xfrm>
+            <a:off x="6858000" y="3364992"/>
+            <a:ext cx="1554480" cy="475488"/>
+          </a:xfrm>
+          <a:prstGeom prst="rect">
+            <a:avLst>
+              <a:gd name="adj" fmla="val 9615"/>
+            </a:avLst>
+          </a:prstGeom>
+          <a:solidFill>
+            <a:srgbClr val="FFFFFF"/>
+          </a:solidFill>
+          <a:ln w="12700">
+            <a:solidFill>
+              <a:srgbClr val="0D9488"/>
+            </a:solidFill>
+            <a:prstDash val="solid"/>
+          </a:ln>
+        </p:spPr>
+      </p:sp>
+      <p:sp>
+        <p:nvSpPr>
+          <p:cNvPr id="36" name="Text 34"/>
+          <p:cNvSpPr/>
+          <p:nvPr/>
+        </p:nvSpPr>
+        <p:spPr>
+          <a:xfrm>
+            <a:off x="6858000" y="3364992"/>
+            <a:ext cx="1554480" cy="475488"/>
+          </a:xfrm>
+          <a:prstGeom prst="rect">
+            <a:avLst/>
+          </a:prstGeom>
+          <a:noFill/>
+          <a:ln/>
+        </p:spPr>
+        <p:txBody>
+          <a:bodyPr wrap="square" lIns="0" tIns="0" rIns="0" bIns="0" rtlCol="0" anchor="ctr"/>
+          <a:lstStyle/>
+          <a:p>
+            <a:pPr algn="ctr" indent="0" marL="0">
+              <a:buNone/>
+            </a:pPr>
+            <a:r>
+              <a:rPr lang="en-US" sz="1400" b="1" dirty="0">
+                <a:solidFill>
+                  <a:srgbClr val="0D9488"/>
+                </a:solidFill>
+                <a:latin typeface="Trebuchet MS" pitchFamily="34" charset="0"/>
+                <a:ea typeface="Trebuchet MS" pitchFamily="34" charset="-122"/>
+                <a:cs typeface="Trebuchet MS" pitchFamily="34" charset="-120"/>
+              </a:rPr>
+              <a:t>tion</a:t>
+            </a:r>
+            <a:endParaRPr lang="en-US" sz="1400" dirty="0"/>
+          </a:p>
+        </p:txBody>
+      </p:sp>
+      <p:sp>
+        <p:nvSpPr>
+          <p:cNvPr id="37" name="Shape 35"/>
+          <p:cNvSpPr/>
+          <p:nvPr/>
+        </p:nvSpPr>
+        <p:spPr>
+          <a:xfrm>
+            <a:off x="365760" y="4096512"/>
+            <a:ext cx="1371600" cy="804672"/>
+          </a:xfrm>
+          <a:prstGeom prst="rect">
+            <a:avLst>
+              <a:gd name="adj" fmla="val 6818"/>
+            </a:avLst>
+          </a:prstGeom>
+          <a:solidFill>
+            <a:srgbClr val="E2E8F0"/>
+          </a:solidFill>
+          <a:ln w="12700">
+            <a:solidFill>
+              <a:srgbClr val="E2E8F0"/>
+            </a:solidFill>
+            <a:prstDash val="solid"/>
+          </a:ln>
+        </p:spPr>
+      </p:sp>
+      <p:sp>
+        <p:nvSpPr>
+          <p:cNvPr id="38" name="Text 36"/>
+          <p:cNvSpPr/>
+          <p:nvPr/>
+        </p:nvSpPr>
+        <p:spPr>
+          <a:xfrm>
+            <a:off x="365760" y="4096512"/>
+            <a:ext cx="1371600" cy="804672"/>
+          </a:xfrm>
+          <a:prstGeom prst="rect">
+            <a:avLst/>
+          </a:prstGeom>
+          <a:noFill/>
+          <a:ln/>
+        </p:spPr>
+        <p:txBody>
+          <a:bodyPr wrap="square" lIns="0" tIns="0" rIns="0" bIns="0" rtlCol="0" anchor="ctr"/>
+          <a:lstStyle/>
+          <a:p>
+            <a:pPr algn="ctr" indent="0" marL="0">
+              <a:buNone/>
+            </a:pPr>
+            <a:r>
+              <a:rPr lang="en-US" sz="1100" b="1" dirty="0">
+                <a:solidFill>
+                  <a:srgbClr val="475569"/>
+                </a:solidFill>
+                <a:latin typeface="Trebuchet MS" pitchFamily="34" charset="0"/>
+                <a:ea typeface="Trebuchet MS" pitchFamily="34" charset="-122"/>
+                <a:cs typeface="Trebuchet MS" pitchFamily="34" charset="-120"/>
+              </a:rPr>
+              <a:t>Phonemes</a:t>
+            </a:r>
+            <a:endParaRPr lang="en-US" sz="1100" dirty="0"/>
+          </a:p>
+        </p:txBody>
+      </p:sp>
+      <p:sp>
+        <p:nvSpPr>
+          <p:cNvPr id="39" name="Shape 37"/>
+          <p:cNvSpPr/>
+          <p:nvPr/>
+        </p:nvSpPr>
+        <p:spPr>
+          <a:xfrm>
+            <a:off x="1874520" y="4096512"/>
+            <a:ext cx="6903720" cy="804672"/>
+          </a:xfrm>
+          <a:prstGeom prst="rect">
+            <a:avLst>
+              <a:gd name="adj" fmla="val 6818"/>
+            </a:avLst>
+          </a:prstGeom>
+          <a:solidFill>
+            <a:srgbClr val="FCE7F3"/>
+          </a:solidFill>
+          <a:ln w="12700">
+            <a:solidFill>
+              <a:srgbClr val="DB2777"/>
+            </a:solidFill>
+            <a:prstDash val="solid"/>
+          </a:ln>
+        </p:spPr>
+      </p:sp>
+      <p:sp>
+        <p:nvSpPr>
+          <p:cNvPr id="40" name="Shape 38"/>
+          <p:cNvSpPr/>
+          <p:nvPr/>
+        </p:nvSpPr>
+        <p:spPr>
+          <a:xfrm>
+            <a:off x="2023872" y="4169664"/>
+            <a:ext cx="685800" cy="384048"/>
+          </a:xfrm>
+          <a:prstGeom prst="rect">
+            <a:avLst>
+              <a:gd name="adj" fmla="val 9524"/>
+            </a:avLst>
+          </a:prstGeom>
+          <a:solidFill>
+            <a:srgbClr val="FFFFFF"/>
+          </a:solidFill>
+          <a:ln w="12700">
+            <a:solidFill>
+              <a:srgbClr val="DB2777"/>
+            </a:solidFill>
+            <a:prstDash val="solid"/>
+          </a:ln>
+        </p:spPr>
+      </p:sp>
+      <p:sp>
+        <p:nvSpPr>
+          <p:cNvPr id="41" name="Text 39"/>
+          <p:cNvSpPr/>
+          <p:nvPr/>
+        </p:nvSpPr>
+        <p:spPr>
+          <a:xfrm>
+            <a:off x="2023872" y="4169664"/>
+            <a:ext cx="685800" cy="384048"/>
+          </a:xfrm>
+          <a:prstGeom prst="rect">
+            <a:avLst/>
+          </a:prstGeom>
+          <a:noFill/>
+          <a:ln/>
+        </p:spPr>
+        <p:txBody>
+          <a:bodyPr wrap="square" lIns="0" tIns="0" rIns="0" bIns="0" rtlCol="0" anchor="ctr"/>
+          <a:lstStyle/>
+          <a:p>
+            <a:pPr algn="ctr" indent="0" marL="0">
+              <a:buNone/>
+            </a:pPr>
+            <a:r>
+              <a:rPr lang="en-US" sz="900" b="1" dirty="0">
+                <a:solidFill>
+                  <a:srgbClr val="9D174D"/>
+                </a:solidFill>
+                <a:latin typeface="Trebuchet MS" pitchFamily="34" charset="0"/>
+                <a:ea typeface="Trebuchet MS" pitchFamily="34" charset="-122"/>
+                <a:cs typeface="Trebuchet MS" pitchFamily="34" charset="-120"/>
+              </a:rPr>
+              <a:t>i</a:t>
+            </a:r>
+            <a:endParaRPr lang="en-US" sz="900" dirty="0"/>
+          </a:p>
+        </p:txBody>
+      </p:sp>
+      <p:sp>
+        <p:nvSpPr>
+          <p:cNvPr id="42" name="Shape 40"/>
+          <p:cNvSpPr/>
+          <p:nvPr/>
+        </p:nvSpPr>
+        <p:spPr>
+          <a:xfrm>
+            <a:off x="2831592" y="4169664"/>
+            <a:ext cx="685800" cy="384048"/>
+          </a:xfrm>
+          <a:prstGeom prst="rect">
+            <a:avLst>
+              <a:gd name="adj" fmla="val 9524"/>
+            </a:avLst>
+          </a:prstGeom>
+          <a:solidFill>
+            <a:srgbClr val="FFFFFF"/>
+          </a:solidFill>
+          <a:ln w="12700">
+            <a:solidFill>
+              <a:srgbClr val="DB2777"/>
+            </a:solidFill>
+            <a:prstDash val="solid"/>
+          </a:ln>
+        </p:spPr>
+      </p:sp>
+      <p:sp>
+        <p:nvSpPr>
+          <p:cNvPr id="43" name="Text 41"/>
+          <p:cNvSpPr/>
+          <p:nvPr/>
+        </p:nvSpPr>
+        <p:spPr>
+          <a:xfrm>
+            <a:off x="2831592" y="4169664"/>
+            <a:ext cx="685800" cy="384048"/>
+          </a:xfrm>
+          <a:prstGeom prst="rect">
+            <a:avLst/>
+          </a:prstGeom>
+          <a:noFill/>
+          <a:ln/>
+        </p:spPr>
+        <p:txBody>
+          <a:bodyPr wrap="square" lIns="0" tIns="0" rIns="0" bIns="0" rtlCol="0" anchor="ctr"/>
+          <a:lstStyle/>
+          <a:p>
+            <a:pPr algn="ctr" indent="0" marL="0">
+              <a:buNone/>
+            </a:pPr>
+            <a:r>
+              <a:rPr lang="en-US" sz="900" b="1" dirty="0">
+                <a:solidFill>
+                  <a:srgbClr val="9D174D"/>
+                </a:solidFill>
+                <a:latin typeface="Trebuchet MS" pitchFamily="34" charset="0"/>
+                <a:ea typeface="Trebuchet MS" pitchFamily="34" charset="-122"/>
+                <a:cs typeface="Trebuchet MS" pitchFamily="34" charset="-120"/>
+              </a:rPr>
+              <a:t>n</a:t>
+            </a:r>
+            <a:endParaRPr lang="en-US" sz="900" dirty="0"/>
+          </a:p>
+        </p:txBody>
+      </p:sp>
+      <p:sp>
+        <p:nvSpPr>
+          <p:cNvPr id="44" name="Shape 42"/>
+          <p:cNvSpPr/>
+          <p:nvPr/>
+        </p:nvSpPr>
+        <p:spPr>
+          <a:xfrm>
+            <a:off x="3639312" y="4169664"/>
+            <a:ext cx="685800" cy="384048"/>
+          </a:xfrm>
+          <a:prstGeom prst="rect">
+            <a:avLst>
+              <a:gd name="adj" fmla="val 9524"/>
+            </a:avLst>
+          </a:prstGeom>
+          <a:solidFill>
+            <a:srgbClr val="FFFFFF"/>
+          </a:solidFill>
+          <a:ln w="12700">
+            <a:solidFill>
+              <a:srgbClr val="DB2777"/>
+            </a:solidFill>
+            <a:prstDash val="solid"/>
+          </a:ln>
+        </p:spPr>
+      </p:sp>
+      <p:sp>
+        <p:nvSpPr>
+          <p:cNvPr id="45" name="Text 43"/>
+          <p:cNvSpPr/>
+          <p:nvPr/>
+        </p:nvSpPr>
+        <p:spPr>
+          <a:xfrm>
+            <a:off x="3639312" y="4169664"/>
+            <a:ext cx="685800" cy="384048"/>
+          </a:xfrm>
+          <a:prstGeom prst="rect">
+            <a:avLst/>
+          </a:prstGeom>
+          <a:noFill/>
+          <a:ln/>
+        </p:spPr>
+        <p:txBody>
+          <a:bodyPr wrap="square" lIns="0" tIns="0" rIns="0" bIns="0" rtlCol="0" anchor="ctr"/>
+          <a:lstStyle/>
+          <a:p>
+            <a:pPr algn="ctr" indent="0" marL="0">
+              <a:buNone/>
+            </a:pPr>
+            <a:r>
+              <a:rPr lang="en-US" sz="900" b="1" dirty="0">
+                <a:solidFill>
+                  <a:srgbClr val="9D174D"/>
+                </a:solidFill>
+                <a:latin typeface="Trebuchet MS" pitchFamily="34" charset="0"/>
+                <a:ea typeface="Trebuchet MS" pitchFamily="34" charset="-122"/>
+                <a:cs typeface="Trebuchet MS" pitchFamily="34" charset="-120"/>
+              </a:rPr>
+              <a:t>sp</a:t>
+            </a:r>
+            <a:endParaRPr lang="en-US" sz="900" dirty="0"/>
+          </a:p>
+        </p:txBody>
+      </p:sp>
+      <p:sp>
+        <p:nvSpPr>
+          <p:cNvPr id="46" name="Shape 44"/>
+          <p:cNvSpPr/>
+          <p:nvPr/>
+        </p:nvSpPr>
+        <p:spPr>
+          <a:xfrm>
+            <a:off x="4447032" y="4169664"/>
+            <a:ext cx="685800" cy="384048"/>
+          </a:xfrm>
+          <a:prstGeom prst="rect">
+            <a:avLst>
+              <a:gd name="adj" fmla="val 9524"/>
+            </a:avLst>
+          </a:prstGeom>
+          <a:solidFill>
+            <a:srgbClr val="FFFFFF"/>
+          </a:solidFill>
+          <a:ln w="12700">
+            <a:solidFill>
+              <a:srgbClr val="DB2777"/>
+            </a:solidFill>
+            <a:prstDash val="solid"/>
+          </a:ln>
+        </p:spPr>
+      </p:sp>
+      <p:sp>
+        <p:nvSpPr>
+          <p:cNvPr id="47" name="Text 45"/>
+          <p:cNvSpPr/>
+          <p:nvPr/>
+        </p:nvSpPr>
+        <p:spPr>
+          <a:xfrm>
+            <a:off x="4447032" y="4169664"/>
+            <a:ext cx="685800" cy="384048"/>
+          </a:xfrm>
+          <a:prstGeom prst="rect">
+            <a:avLst/>
+          </a:prstGeom>
+          <a:noFill/>
+          <a:ln/>
+        </p:spPr>
+        <p:txBody>
+          <a:bodyPr wrap="square" lIns="0" tIns="0" rIns="0" bIns="0" rtlCol="0" anchor="ctr"/>
+          <a:lstStyle/>
+          <a:p>
+            <a:pPr algn="ctr" indent="0" marL="0">
+              <a:buNone/>
+            </a:pPr>
+            <a:r>
+              <a:rPr lang="en-US" sz="900" b="1" dirty="0">
+                <a:solidFill>
+                  <a:srgbClr val="9D174D"/>
+                </a:solidFill>
+                <a:latin typeface="Trebuchet MS" pitchFamily="34" charset="0"/>
+                <a:ea typeface="Trebuchet MS" pitchFamily="34" charset="-122"/>
+                <a:cs typeface="Trebuchet MS" pitchFamily="34" charset="-120"/>
+              </a:rPr>
+              <a:t>ir</a:t>
+            </a:r>
+            <a:endParaRPr lang="en-US" sz="900" dirty="0"/>
+          </a:p>
+        </p:txBody>
+      </p:sp>
+      <p:sp>
+        <p:nvSpPr>
+          <p:cNvPr id="48" name="Shape 46"/>
+          <p:cNvSpPr/>
+          <p:nvPr/>
+        </p:nvSpPr>
+        <p:spPr>
+          <a:xfrm>
+            <a:off x="5254752" y="4169664"/>
+            <a:ext cx="685800" cy="384048"/>
+          </a:xfrm>
+          <a:prstGeom prst="rect">
+            <a:avLst>
+              <a:gd name="adj" fmla="val 9524"/>
+            </a:avLst>
+          </a:prstGeom>
+          <a:solidFill>
+            <a:srgbClr val="FFFFFF"/>
+          </a:solidFill>
+          <a:ln w="12700">
+            <a:solidFill>
+              <a:srgbClr val="DB2777"/>
+            </a:solidFill>
+            <a:prstDash val="solid"/>
+          </a:ln>
+        </p:spPr>
+      </p:sp>
+      <p:sp>
+        <p:nvSpPr>
+          <p:cNvPr id="49" name="Text 47"/>
+          <p:cNvSpPr/>
+          <p:nvPr/>
+        </p:nvSpPr>
+        <p:spPr>
+          <a:xfrm>
+            <a:off x="5254752" y="4169664"/>
+            <a:ext cx="685800" cy="384048"/>
+          </a:xfrm>
+          <a:prstGeom prst="rect">
+            <a:avLst/>
+          </a:prstGeom>
+          <a:noFill/>
+          <a:ln/>
+        </p:spPr>
+        <p:txBody>
+          <a:bodyPr wrap="square" lIns="0" tIns="0" rIns="0" bIns="0" rtlCol="0" anchor="ctr"/>
+          <a:lstStyle/>
+          <a:p>
+            <a:pPr algn="ctr" indent="0" marL="0">
+              <a:buNone/>
+            </a:pPr>
+            <a:r>
+              <a:rPr lang="en-US" sz="900" b="1" dirty="0">
+                <a:solidFill>
+                  <a:srgbClr val="9D174D"/>
+                </a:solidFill>
+                <a:latin typeface="Trebuchet MS" pitchFamily="34" charset="0"/>
+                <a:ea typeface="Trebuchet MS" pitchFamily="34" charset="-122"/>
+                <a:cs typeface="Trebuchet MS" pitchFamily="34" charset="-120"/>
+              </a:rPr>
+              <a:t>a</a:t>
+            </a:r>
+            <a:endParaRPr lang="en-US" sz="900" dirty="0"/>
+          </a:p>
+        </p:txBody>
+      </p:sp>
+      <p:sp>
+        <p:nvSpPr>
+          <p:cNvPr id="50" name="Shape 48"/>
+          <p:cNvSpPr/>
+          <p:nvPr/>
+        </p:nvSpPr>
+        <p:spPr>
+          <a:xfrm>
+            <a:off x="6062472" y="4169664"/>
+            <a:ext cx="685800" cy="384048"/>
+          </a:xfrm>
+          <a:prstGeom prst="rect">
+            <a:avLst>
+              <a:gd name="adj" fmla="val 9524"/>
+            </a:avLst>
+          </a:prstGeom>
+          <a:solidFill>
+            <a:srgbClr val="FFFFFF"/>
+          </a:solidFill>
+          <a:ln w="12700">
+            <a:solidFill>
+              <a:srgbClr val="DB2777"/>
+            </a:solidFill>
+            <a:prstDash val="solid"/>
+          </a:ln>
+        </p:spPr>
+      </p:sp>
+      <p:sp>
+        <p:nvSpPr>
+          <p:cNvPr id="51" name="Text 49"/>
+          <p:cNvSpPr/>
+          <p:nvPr/>
+        </p:nvSpPr>
+        <p:spPr>
+          <a:xfrm>
+            <a:off x="6062472" y="4169664"/>
+            <a:ext cx="685800" cy="384048"/>
+          </a:xfrm>
+          <a:prstGeom prst="rect">
+            <a:avLst/>
+          </a:prstGeom>
+          <a:noFill/>
+          <a:ln/>
+        </p:spPr>
+        <p:txBody>
+          <a:bodyPr wrap="square" lIns="0" tIns="0" rIns="0" bIns="0" rtlCol="0" anchor="ctr"/>
+          <a:lstStyle/>
+          <a:p>
+            <a:pPr algn="ctr" indent="0" marL="0">
+              <a:buNone/>
+            </a:pPr>
+            <a:r>
+              <a:rPr lang="en-US" sz="900" b="1" dirty="0">
+                <a:solidFill>
+                  <a:srgbClr val="9D174D"/>
+                </a:solidFill>
+                <a:latin typeface="Trebuchet MS" pitchFamily="34" charset="0"/>
+                <a:ea typeface="Trebuchet MS" pitchFamily="34" charset="-122"/>
+                <a:cs typeface="Trebuchet MS" pitchFamily="34" charset="-120"/>
+              </a:rPr>
+              <a:t>t</a:t>
+            </a:r>
+            <a:endParaRPr lang="en-US" sz="900" dirty="0"/>
+          </a:p>
+        </p:txBody>
+      </p:sp>
+      <p:sp>
+        <p:nvSpPr>
+          <p:cNvPr id="52" name="Text 50"/>
+          <p:cNvSpPr/>
+          <p:nvPr/>
+        </p:nvSpPr>
+        <p:spPr>
+          <a:xfrm>
+            <a:off x="6062472" y="4572000"/>
+            <a:ext cx="685800" cy="219456"/>
           </a:xfrm>
           <a:prstGeom prst="rect">
             <a:avLst/>
@@ -29061,7 +29155,7 @@
               <a:buNone/>
             </a:pPr>
             <a:r>
-              <a:rPr lang="en-US" sz="700" i="1" dirty="0">
+              <a:rPr lang="en-US" sz="750" i="1" dirty="0">
                 <a:solidFill>
                   <a:srgbClr val="94A3B8"/>
                 </a:solidFill>
@@ -29069,72 +29163,65 @@
                 <a:ea typeface="Calibri" pitchFamily="34" charset="-122"/>
                 <a:cs typeface="Calibri" pitchFamily="34" charset="-120"/>
               </a:rPr>
-              <a:t>'e' dropped before vowel suffix</a:t>
-            </a:r>
-            <a:endParaRPr lang="en-US" sz="700" dirty="0"/>
-          </a:p>
-        </p:txBody>
-      </p:sp>
-      <p:sp>
-        <p:nvSpPr>
-          <p:cNvPr id="23" name="Shape 21"/>
-          <p:cNvSpPr/>
-          <p:nvPr/>
-        </p:nvSpPr>
-        <p:spPr>
-          <a:xfrm>
-            <a:off x="6519672" y="2258568"/>
-            <a:ext cx="1828800" cy="292608"/>
+              <a:t>/sh/</a:t>
+            </a:r>
+            <a:endParaRPr lang="en-US" sz="750" dirty="0"/>
+          </a:p>
+        </p:txBody>
+      </p:sp>
+      <p:sp>
+        <p:nvSpPr>
+          <p:cNvPr id="53" name="Shape 51"/>
+          <p:cNvSpPr/>
+          <p:nvPr/>
+        </p:nvSpPr>
+        <p:spPr>
+          <a:xfrm>
+            <a:off x="6870192" y="4169664"/>
+            <a:ext cx="685800" cy="384048"/>
           </a:xfrm>
           <a:prstGeom prst="rect">
             <a:avLst>
-              <a:gd name="adj" fmla="val 25000"/>
+              <a:gd name="adj" fmla="val 9524"/>
             </a:avLst>
           </a:prstGeom>
           <a:solidFill>
-            <a:srgbClr val="FCE7F3"/>
-          </a:solidFill>
-          <a:ln w="19050">
+            <a:srgbClr val="FFFFFF"/>
+          </a:solidFill>
+          <a:ln w="12700">
             <a:solidFill>
               <a:srgbClr val="DB2777"/>
             </a:solidFill>
             <a:prstDash val="solid"/>
           </a:ln>
-          <a:effectLst>
-            <a:outerShdw sx="100000" sy="100000" kx="0" ky="0" algn="bl" rotWithShape="0" blurRad="101600" dist="38100" dir="8100000">
-              <a:srgbClr val="000000">
-                <a:alpha val="12000"/>
-              </a:srgbClr>
-            </a:outerShdw>
-          </a:effectLst>
-        </p:spPr>
-      </p:sp>
-      <p:sp>
-        <p:nvSpPr>
-          <p:cNvPr id="24" name="Text 22"/>
-          <p:cNvSpPr/>
-          <p:nvPr/>
-        </p:nvSpPr>
-        <p:spPr>
-          <a:xfrm>
-            <a:off x="6519672" y="2258568"/>
-            <a:ext cx="1828800" cy="292608"/>
-          </a:xfrm>
-          <a:prstGeom prst="rect">
-            <a:avLst/>
-          </a:prstGeom>
-          <a:noFill/>
-          <a:ln/>
-        </p:spPr>
-        <p:txBody>
-          <a:bodyPr wrap="square" lIns="0" tIns="0" rIns="0" bIns="0" rtlCol="0" anchor="ctr"/>
-          <a:lstStyle/>
-          <a:p>
-            <a:pPr algn="ctr" indent="0" marL="0">
-              <a:buNone/>
-            </a:pPr>
-            <a:r>
-              <a:rPr lang="en-US" sz="1300" b="1" dirty="0">
+        </p:spPr>
+      </p:sp>
+      <p:sp>
+        <p:nvSpPr>
+          <p:cNvPr id="54" name="Text 52"/>
+          <p:cNvSpPr/>
+          <p:nvPr/>
+        </p:nvSpPr>
+        <p:spPr>
+          <a:xfrm>
+            <a:off x="6870192" y="4169664"/>
+            <a:ext cx="685800" cy="384048"/>
+          </a:xfrm>
+          <a:prstGeom prst="rect">
+            <a:avLst/>
+          </a:prstGeom>
+          <a:noFill/>
+          <a:ln/>
+        </p:spPr>
+        <p:txBody>
+          <a:bodyPr wrap="square" lIns="0" tIns="0" rIns="0" bIns="0" rtlCol="0" anchor="ctr"/>
+          <a:lstStyle/>
+          <a:p>
+            <a:pPr algn="ctr" indent="0" marL="0">
+              <a:buNone/>
+            </a:pPr>
+            <a:r>
+              <a:rPr lang="en-US" sz="900" b="1" dirty="0">
                 <a:solidFill>
                   <a:srgbClr val="9D174D"/>
                 </a:solidFill>
@@ -29142,970 +29229,73 @@
                 <a:ea typeface="Trebuchet MS" pitchFamily="34" charset="-122"/>
                 <a:cs typeface="Trebuchet MS" pitchFamily="34" charset="-120"/>
               </a:rPr>
-              <a:t>ed</a:t>
-            </a:r>
-            <a:endParaRPr lang="en-US" sz="1300" dirty="0"/>
-          </a:p>
-        </p:txBody>
-      </p:sp>
-      <p:sp>
-        <p:nvSpPr>
-          <p:cNvPr id="25" name="Text 23"/>
-          <p:cNvSpPr/>
-          <p:nvPr/>
-        </p:nvSpPr>
-        <p:spPr>
-          <a:xfrm>
-            <a:off x="6519672" y="2569464"/>
-            <a:ext cx="1828800" cy="201168"/>
-          </a:xfrm>
-          <a:prstGeom prst="rect">
-            <a:avLst/>
-          </a:prstGeom>
-          <a:noFill/>
-          <a:ln/>
-        </p:spPr>
-        <p:txBody>
-          <a:bodyPr wrap="square" lIns="0" tIns="0" rIns="0" bIns="0" rtlCol="0" anchor="t"/>
-          <a:lstStyle/>
-          <a:p>
-            <a:pPr algn="ctr" indent="0" marL="0">
-              <a:buNone/>
-            </a:pPr>
-            <a:r>
-              <a:rPr lang="en-US" sz="850" dirty="0">
-                <a:solidFill>
-                  <a:srgbClr val="475569"/>
-                </a:solidFill>
-                <a:latin typeface="Calibri" pitchFamily="34" charset="0"/>
-                <a:ea typeface="Calibri" pitchFamily="34" charset="-122"/>
-                <a:cs typeface="Calibri" pitchFamily="34" charset="-120"/>
-              </a:rPr>
-              <a:t>happened in the past</a:t>
-            </a:r>
-            <a:endParaRPr lang="en-US" sz="850" dirty="0"/>
-          </a:p>
-        </p:txBody>
-      </p:sp>
-      <p:sp>
-        <p:nvSpPr>
-          <p:cNvPr id="26" name="Shape 24"/>
-          <p:cNvSpPr/>
-          <p:nvPr/>
-        </p:nvSpPr>
-        <p:spPr>
-          <a:xfrm>
-            <a:off x="365760" y="3273552"/>
-            <a:ext cx="1371600" cy="658368"/>
+              <a:t>io</a:t>
+            </a:r>
+            <a:endParaRPr lang="en-US" sz="900" dirty="0"/>
+          </a:p>
+        </p:txBody>
+      </p:sp>
+      <p:sp>
+        <p:nvSpPr>
+          <p:cNvPr id="55" name="Shape 53"/>
+          <p:cNvSpPr/>
+          <p:nvPr/>
+        </p:nvSpPr>
+        <p:spPr>
+          <a:xfrm>
+            <a:off x="7677912" y="4169664"/>
+            <a:ext cx="685800" cy="384048"/>
           </a:xfrm>
           <a:prstGeom prst="rect">
             <a:avLst>
-              <a:gd name="adj" fmla="val 8333"/>
+              <a:gd name="adj" fmla="val 9524"/>
             </a:avLst>
           </a:prstGeom>
           <a:solidFill>
-            <a:srgbClr val="E2E8F0"/>
-          </a:solidFill>
-          <a:ln w="12700">
-            <a:solidFill>
-              <a:srgbClr val="E2E8F0"/>
-            </a:solidFill>
-            <a:prstDash val="solid"/>
-          </a:ln>
-        </p:spPr>
-      </p:sp>
-      <p:sp>
-        <p:nvSpPr>
-          <p:cNvPr id="27" name="Text 25"/>
-          <p:cNvSpPr/>
-          <p:nvPr/>
-        </p:nvSpPr>
-        <p:spPr>
-          <a:xfrm>
-            <a:off x="365760" y="3273552"/>
-            <a:ext cx="1371600" cy="658368"/>
-          </a:xfrm>
-          <a:prstGeom prst="rect">
-            <a:avLst/>
-          </a:prstGeom>
-          <a:noFill/>
-          <a:ln/>
-        </p:spPr>
-        <p:txBody>
-          <a:bodyPr wrap="square" lIns="0" tIns="0" rIns="0" bIns="0" rtlCol="0" anchor="ctr"/>
-          <a:lstStyle/>
-          <a:p>
-            <a:pPr algn="ctr" indent="0" marL="0">
-              <a:buNone/>
-            </a:pPr>
-            <a:r>
-              <a:rPr lang="en-US" sz="1100" b="1" dirty="0">
-                <a:solidFill>
-                  <a:srgbClr val="475569"/>
+            <a:srgbClr val="FFFFFF"/>
+          </a:solidFill>
+          <a:ln w="12700">
+            <a:solidFill>
+              <a:srgbClr val="DB2777"/>
+            </a:solidFill>
+            <a:prstDash val="solid"/>
+          </a:ln>
+        </p:spPr>
+      </p:sp>
+      <p:sp>
+        <p:nvSpPr>
+          <p:cNvPr id="56" name="Text 54"/>
+          <p:cNvSpPr/>
+          <p:nvPr/>
+        </p:nvSpPr>
+        <p:spPr>
+          <a:xfrm>
+            <a:off x="7677912" y="4169664"/>
+            <a:ext cx="685800" cy="384048"/>
+          </a:xfrm>
+          <a:prstGeom prst="rect">
+            <a:avLst/>
+          </a:prstGeom>
+          <a:noFill/>
+          <a:ln/>
+        </p:spPr>
+        <p:txBody>
+          <a:bodyPr wrap="square" lIns="0" tIns="0" rIns="0" bIns="0" rtlCol="0" anchor="ctr"/>
+          <a:lstStyle/>
+          <a:p>
+            <a:pPr algn="ctr" indent="0" marL="0">
+              <a:buNone/>
+            </a:pPr>
+            <a:r>
+              <a:rPr lang="en-US" sz="900" b="1" dirty="0">
+                <a:solidFill>
+                  <a:srgbClr val="9D174D"/>
                 </a:solidFill>
                 <a:latin typeface="Trebuchet MS" pitchFamily="34" charset="0"/>
                 <a:ea typeface="Trebuchet MS" pitchFamily="34" charset="-122"/>
                 <a:cs typeface="Trebuchet MS" pitchFamily="34" charset="-120"/>
               </a:rPr>
-              <a:t>Syllables</a:t>
-            </a:r>
-            <a:endParaRPr lang="en-US" sz="1100" dirty="0"/>
-          </a:p>
-        </p:txBody>
-      </p:sp>
-      <p:sp>
-        <p:nvSpPr>
-          <p:cNvPr id="28" name="Shape 26"/>
-          <p:cNvSpPr/>
-          <p:nvPr/>
-        </p:nvSpPr>
-        <p:spPr>
-          <a:xfrm>
-            <a:off x="1874520" y="3273552"/>
-            <a:ext cx="6903720" cy="658368"/>
-          </a:xfrm>
-          <a:prstGeom prst="rect">
-            <a:avLst>
-              <a:gd name="adj" fmla="val 8333"/>
-            </a:avLst>
-          </a:prstGeom>
-          <a:solidFill>
-            <a:srgbClr val="CCFBF1"/>
-          </a:solidFill>
-          <a:ln w="12700">
-            <a:solidFill>
-              <a:srgbClr val="0D9488"/>
-            </a:solidFill>
-            <a:prstDash val="solid"/>
-          </a:ln>
-        </p:spPr>
-      </p:sp>
-      <p:sp>
-        <p:nvSpPr>
-          <p:cNvPr id="29" name="Shape 27"/>
-          <p:cNvSpPr/>
-          <p:nvPr/>
-        </p:nvSpPr>
-        <p:spPr>
-          <a:xfrm>
-            <a:off x="2313432" y="3364992"/>
-            <a:ext cx="1645920" cy="475488"/>
-          </a:xfrm>
-          <a:prstGeom prst="rect">
-            <a:avLst>
-              <a:gd name="adj" fmla="val 9615"/>
-            </a:avLst>
-          </a:prstGeom>
-          <a:solidFill>
-            <a:srgbClr val="FFFFFF"/>
-          </a:solidFill>
-          <a:ln w="12700">
-            <a:solidFill>
-              <a:srgbClr val="0D9488"/>
-            </a:solidFill>
-            <a:prstDash val="solid"/>
-          </a:ln>
-        </p:spPr>
-      </p:sp>
-      <p:sp>
-        <p:nvSpPr>
-          <p:cNvPr id="30" name="Text 28"/>
-          <p:cNvSpPr/>
-          <p:nvPr/>
-        </p:nvSpPr>
-        <p:spPr>
-          <a:xfrm>
-            <a:off x="2313432" y="3364992"/>
-            <a:ext cx="1645920" cy="475488"/>
-          </a:xfrm>
-          <a:prstGeom prst="rect">
-            <a:avLst/>
-          </a:prstGeom>
-          <a:noFill/>
-          <a:ln/>
-        </p:spPr>
-        <p:txBody>
-          <a:bodyPr wrap="square" lIns="0" tIns="0" rIns="0" bIns="0" rtlCol="0" anchor="ctr"/>
-          <a:lstStyle/>
-          <a:p>
-            <a:pPr algn="ctr" indent="0" marL="0">
-              <a:buNone/>
-            </a:pPr>
-            <a:r>
-              <a:rPr lang="en-US" sz="1400" b="1" dirty="0">
-                <a:solidFill>
-                  <a:srgbClr val="0D9488"/>
-                </a:solidFill>
-                <a:latin typeface="Trebuchet MS" pitchFamily="34" charset="0"/>
-                <a:ea typeface="Trebuchet MS" pitchFamily="34" charset="-122"/>
-                <a:cs typeface="Trebuchet MS" pitchFamily="34" charset="-120"/>
-              </a:rPr>
-              <a:t>re</a:t>
-            </a:r>
-            <a:endParaRPr lang="en-US" sz="1400" dirty="0"/>
-          </a:p>
-        </p:txBody>
-      </p:sp>
-      <p:sp>
-        <p:nvSpPr>
-          <p:cNvPr id="31" name="Text 29"/>
-          <p:cNvSpPr/>
-          <p:nvPr/>
-        </p:nvSpPr>
-        <p:spPr>
-          <a:xfrm>
-            <a:off x="3959352" y="3364992"/>
-            <a:ext cx="411480" cy="475488"/>
-          </a:xfrm>
-          <a:prstGeom prst="rect">
-            <a:avLst/>
-          </a:prstGeom>
-          <a:noFill/>
-          <a:ln/>
-        </p:spPr>
-        <p:txBody>
-          <a:bodyPr wrap="square" lIns="0" tIns="0" rIns="0" bIns="0" rtlCol="0" anchor="ctr"/>
-          <a:lstStyle/>
-          <a:p>
-            <a:pPr algn="ctr" indent="0" marL="0">
-              <a:buNone/>
-            </a:pPr>
-            <a:r>
-              <a:rPr lang="en-US" sz="1600" b="1" dirty="0">
-                <a:solidFill>
-                  <a:srgbClr val="0D9488"/>
-                </a:solidFill>
-                <a:latin typeface="Trebuchet MS" pitchFamily="34" charset="0"/>
-                <a:ea typeface="Trebuchet MS" pitchFamily="34" charset="-122"/>
-                <a:cs typeface="Trebuchet MS" pitchFamily="34" charset="-120"/>
-              </a:rPr>
-              <a:t>·</a:t>
-            </a:r>
-            <a:endParaRPr lang="en-US" sz="1600" dirty="0"/>
-          </a:p>
-        </p:txBody>
-      </p:sp>
-      <p:sp>
-        <p:nvSpPr>
-          <p:cNvPr id="32" name="Shape 30"/>
-          <p:cNvSpPr/>
-          <p:nvPr/>
-        </p:nvSpPr>
-        <p:spPr>
-          <a:xfrm>
-            <a:off x="4370832" y="3364992"/>
-            <a:ext cx="1645920" cy="475488"/>
-          </a:xfrm>
-          <a:prstGeom prst="rect">
-            <a:avLst>
-              <a:gd name="adj" fmla="val 9615"/>
-            </a:avLst>
-          </a:prstGeom>
-          <a:solidFill>
-            <a:srgbClr val="FFFFFF"/>
-          </a:solidFill>
-          <a:ln w="12700">
-            <a:solidFill>
-              <a:srgbClr val="0D9488"/>
-            </a:solidFill>
-            <a:prstDash val="solid"/>
-          </a:ln>
-        </p:spPr>
-      </p:sp>
-      <p:sp>
-        <p:nvSpPr>
-          <p:cNvPr id="33" name="Text 31"/>
-          <p:cNvSpPr/>
-          <p:nvPr/>
-        </p:nvSpPr>
-        <p:spPr>
-          <a:xfrm>
-            <a:off x="4370832" y="3364992"/>
-            <a:ext cx="1645920" cy="475488"/>
-          </a:xfrm>
-          <a:prstGeom prst="rect">
-            <a:avLst/>
-          </a:prstGeom>
-          <a:noFill/>
-          <a:ln/>
-        </p:spPr>
-        <p:txBody>
-          <a:bodyPr wrap="square" lIns="0" tIns="0" rIns="0" bIns="0" rtlCol="0" anchor="ctr"/>
-          <a:lstStyle/>
-          <a:p>
-            <a:pPr algn="ctr" indent="0" marL="0">
-              <a:buNone/>
-            </a:pPr>
-            <a:r>
-              <a:rPr lang="en-US" sz="1400" b="1" dirty="0">
-                <a:solidFill>
-                  <a:srgbClr val="0D9488"/>
-                </a:solidFill>
-                <a:latin typeface="Trebuchet MS" pitchFamily="34" charset="0"/>
-                <a:ea typeface="Trebuchet MS" pitchFamily="34" charset="-122"/>
-                <a:cs typeface="Trebuchet MS" pitchFamily="34" charset="-120"/>
-              </a:rPr>
-              <a:t>in</a:t>
-            </a:r>
-            <a:endParaRPr lang="en-US" sz="1400" dirty="0"/>
-          </a:p>
-        </p:txBody>
-      </p:sp>
-      <p:sp>
-        <p:nvSpPr>
-          <p:cNvPr id="34" name="Text 32"/>
-          <p:cNvSpPr/>
-          <p:nvPr/>
-        </p:nvSpPr>
-        <p:spPr>
-          <a:xfrm>
-            <a:off x="6016752" y="3364992"/>
-            <a:ext cx="411480" cy="475488"/>
-          </a:xfrm>
-          <a:prstGeom prst="rect">
-            <a:avLst/>
-          </a:prstGeom>
-          <a:noFill/>
-          <a:ln/>
-        </p:spPr>
-        <p:txBody>
-          <a:bodyPr wrap="square" lIns="0" tIns="0" rIns="0" bIns="0" rtlCol="0" anchor="ctr"/>
-          <a:lstStyle/>
-          <a:p>
-            <a:pPr algn="ctr" indent="0" marL="0">
-              <a:buNone/>
-            </a:pPr>
-            <a:r>
-              <a:rPr lang="en-US" sz="1600" b="1" dirty="0">
-                <a:solidFill>
-                  <a:srgbClr val="0D9488"/>
-                </a:solidFill>
-                <a:latin typeface="Trebuchet MS" pitchFamily="34" charset="0"/>
-                <a:ea typeface="Trebuchet MS" pitchFamily="34" charset="-122"/>
-                <a:cs typeface="Trebuchet MS" pitchFamily="34" charset="-120"/>
-              </a:rPr>
-              <a:t>·</a:t>
-            </a:r>
-            <a:endParaRPr lang="en-US" sz="1600" dirty="0"/>
-          </a:p>
-        </p:txBody>
-      </p:sp>
-      <p:sp>
-        <p:nvSpPr>
-          <p:cNvPr id="35" name="Shape 33"/>
-          <p:cNvSpPr/>
-          <p:nvPr/>
-        </p:nvSpPr>
-        <p:spPr>
-          <a:xfrm>
-            <a:off x="6428232" y="3364992"/>
-            <a:ext cx="1645920" cy="475488"/>
-          </a:xfrm>
-          <a:prstGeom prst="rect">
-            <a:avLst>
-              <a:gd name="adj" fmla="val 9615"/>
-            </a:avLst>
-          </a:prstGeom>
-          <a:solidFill>
-            <a:srgbClr val="FFFFFF"/>
-          </a:solidFill>
-          <a:ln w="12700">
-            <a:solidFill>
-              <a:srgbClr val="0D9488"/>
-            </a:solidFill>
-            <a:prstDash val="solid"/>
-          </a:ln>
-        </p:spPr>
-      </p:sp>
-      <p:sp>
-        <p:nvSpPr>
-          <p:cNvPr id="36" name="Text 34"/>
-          <p:cNvSpPr/>
-          <p:nvPr/>
-        </p:nvSpPr>
-        <p:spPr>
-          <a:xfrm>
-            <a:off x="6428232" y="3364992"/>
-            <a:ext cx="1645920" cy="475488"/>
-          </a:xfrm>
-          <a:prstGeom prst="rect">
-            <a:avLst/>
-          </a:prstGeom>
-          <a:noFill/>
-          <a:ln/>
-        </p:spPr>
-        <p:txBody>
-          <a:bodyPr wrap="square" lIns="0" tIns="0" rIns="0" bIns="0" rtlCol="0" anchor="ctr"/>
-          <a:lstStyle/>
-          <a:p>
-            <a:pPr algn="ctr" indent="0" marL="0">
-              <a:buNone/>
-            </a:pPr>
-            <a:r>
-              <a:rPr lang="en-US" sz="1400" b="1" dirty="0">
-                <a:solidFill>
-                  <a:srgbClr val="0D9488"/>
-                </a:solidFill>
-                <a:latin typeface="Trebuchet MS" pitchFamily="34" charset="0"/>
-                <a:ea typeface="Trebuchet MS" pitchFamily="34" charset="-122"/>
-                <a:cs typeface="Trebuchet MS" pitchFamily="34" charset="-120"/>
-              </a:rPr>
-              <a:t>spired</a:t>
-            </a:r>
-            <a:endParaRPr lang="en-US" sz="1400" dirty="0"/>
-          </a:p>
-        </p:txBody>
-      </p:sp>
-      <p:sp>
-        <p:nvSpPr>
-          <p:cNvPr id="37" name="Shape 35"/>
-          <p:cNvSpPr/>
-          <p:nvPr/>
-        </p:nvSpPr>
-        <p:spPr>
-          <a:xfrm>
-            <a:off x="365760" y="4096512"/>
-            <a:ext cx="1371600" cy="804672"/>
-          </a:xfrm>
-          <a:prstGeom prst="rect">
-            <a:avLst>
-              <a:gd name="adj" fmla="val 6818"/>
-            </a:avLst>
-          </a:prstGeom>
-          <a:solidFill>
-            <a:srgbClr val="E2E8F0"/>
-          </a:solidFill>
-          <a:ln w="12700">
-            <a:solidFill>
-              <a:srgbClr val="E2E8F0"/>
-            </a:solidFill>
-            <a:prstDash val="solid"/>
-          </a:ln>
-        </p:spPr>
-      </p:sp>
-      <p:sp>
-        <p:nvSpPr>
-          <p:cNvPr id="38" name="Text 36"/>
-          <p:cNvSpPr/>
-          <p:nvPr/>
-        </p:nvSpPr>
-        <p:spPr>
-          <a:xfrm>
-            <a:off x="365760" y="4096512"/>
-            <a:ext cx="1371600" cy="804672"/>
-          </a:xfrm>
-          <a:prstGeom prst="rect">
-            <a:avLst/>
-          </a:prstGeom>
-          <a:noFill/>
-          <a:ln/>
-        </p:spPr>
-        <p:txBody>
-          <a:bodyPr wrap="square" lIns="0" tIns="0" rIns="0" bIns="0" rtlCol="0" anchor="ctr"/>
-          <a:lstStyle/>
-          <a:p>
-            <a:pPr algn="ctr" indent="0" marL="0">
-              <a:buNone/>
-            </a:pPr>
-            <a:r>
-              <a:rPr lang="en-US" sz="1100" b="1" dirty="0">
-                <a:solidFill>
-                  <a:srgbClr val="475569"/>
-                </a:solidFill>
-                <a:latin typeface="Trebuchet MS" pitchFamily="34" charset="0"/>
-                <a:ea typeface="Trebuchet MS" pitchFamily="34" charset="-122"/>
-                <a:cs typeface="Trebuchet MS" pitchFamily="34" charset="-120"/>
-              </a:rPr>
-              <a:t>Phonemes</a:t>
-            </a:r>
-            <a:endParaRPr lang="en-US" sz="1100" dirty="0"/>
-          </a:p>
-        </p:txBody>
-      </p:sp>
-      <p:sp>
-        <p:nvSpPr>
-          <p:cNvPr id="39" name="Shape 37"/>
-          <p:cNvSpPr/>
-          <p:nvPr/>
-        </p:nvSpPr>
-        <p:spPr>
-          <a:xfrm>
-            <a:off x="1874520" y="4096512"/>
-            <a:ext cx="6903720" cy="658368"/>
-          </a:xfrm>
-          <a:prstGeom prst="rect">
-            <a:avLst>
-              <a:gd name="adj" fmla="val 8333"/>
-            </a:avLst>
-          </a:prstGeom>
-          <a:solidFill>
-            <a:srgbClr val="FCE7F3"/>
-          </a:solidFill>
-          <a:ln w="12700">
-            <a:solidFill>
-              <a:srgbClr val="DB2777"/>
-            </a:solidFill>
-            <a:prstDash val="solid"/>
-          </a:ln>
-        </p:spPr>
-      </p:sp>
-      <p:sp>
-        <p:nvSpPr>
-          <p:cNvPr id="40" name="Shape 38"/>
-          <p:cNvSpPr/>
-          <p:nvPr/>
-        </p:nvSpPr>
-        <p:spPr>
-          <a:xfrm>
-            <a:off x="2124837" y="4169664"/>
-            <a:ext cx="685800" cy="475488"/>
-          </a:xfrm>
-          <a:prstGeom prst="rect">
-            <a:avLst>
-              <a:gd name="adj" fmla="val 7692"/>
-            </a:avLst>
-          </a:prstGeom>
-          <a:solidFill>
-            <a:srgbClr val="FFFFFF"/>
-          </a:solidFill>
-          <a:ln w="12700">
-            <a:solidFill>
-              <a:srgbClr val="DB2777"/>
-            </a:solidFill>
-            <a:prstDash val="solid"/>
-          </a:ln>
-        </p:spPr>
-      </p:sp>
-      <p:sp>
-        <p:nvSpPr>
-          <p:cNvPr id="41" name="Text 39"/>
-          <p:cNvSpPr/>
-          <p:nvPr/>
-        </p:nvSpPr>
-        <p:spPr>
-          <a:xfrm>
-            <a:off x="2124837" y="4169664"/>
-            <a:ext cx="685800" cy="475488"/>
-          </a:xfrm>
-          <a:prstGeom prst="rect">
-            <a:avLst/>
-          </a:prstGeom>
-          <a:noFill/>
-          <a:ln/>
-        </p:spPr>
-        <p:txBody>
-          <a:bodyPr wrap="square" lIns="0" tIns="0" rIns="0" bIns="0" rtlCol="0" anchor="ctr"/>
-          <a:lstStyle/>
-          <a:p>
-            <a:pPr algn="ctr" indent="0" marL="0">
-              <a:buNone/>
-            </a:pPr>
-            <a:r>
-              <a:rPr lang="en-US" sz="900" b="1" dirty="0">
-                <a:solidFill>
-                  <a:srgbClr val="9D174D"/>
-                </a:solidFill>
-                <a:latin typeface="Trebuchet MS" pitchFamily="34" charset="0"/>
-                <a:ea typeface="Trebuchet MS" pitchFamily="34" charset="-122"/>
-                <a:cs typeface="Trebuchet MS" pitchFamily="34" charset="-120"/>
-              </a:rPr>
-              <a:t>r</a:t>
-            </a:r>
-            <a:endParaRPr lang="en-US" sz="900" dirty="0"/>
-          </a:p>
-        </p:txBody>
-      </p:sp>
-      <p:sp>
-        <p:nvSpPr>
-          <p:cNvPr id="42" name="Shape 40"/>
-          <p:cNvSpPr/>
-          <p:nvPr/>
-        </p:nvSpPr>
-        <p:spPr>
-          <a:xfrm>
-            <a:off x="3033522" y="4169664"/>
-            <a:ext cx="685800" cy="475488"/>
-          </a:xfrm>
-          <a:prstGeom prst="rect">
-            <a:avLst>
-              <a:gd name="adj" fmla="val 7692"/>
-            </a:avLst>
-          </a:prstGeom>
-          <a:solidFill>
-            <a:srgbClr val="FFFFFF"/>
-          </a:solidFill>
-          <a:ln w="12700">
-            <a:solidFill>
-              <a:srgbClr val="DB2777"/>
-            </a:solidFill>
-            <a:prstDash val="solid"/>
-          </a:ln>
-        </p:spPr>
-      </p:sp>
-      <p:sp>
-        <p:nvSpPr>
-          <p:cNvPr id="43" name="Text 41"/>
-          <p:cNvSpPr/>
-          <p:nvPr/>
-        </p:nvSpPr>
-        <p:spPr>
-          <a:xfrm>
-            <a:off x="3033522" y="4169664"/>
-            <a:ext cx="685800" cy="475488"/>
-          </a:xfrm>
-          <a:prstGeom prst="rect">
-            <a:avLst/>
-          </a:prstGeom>
-          <a:noFill/>
-          <a:ln/>
-        </p:spPr>
-        <p:txBody>
-          <a:bodyPr wrap="square" lIns="0" tIns="0" rIns="0" bIns="0" rtlCol="0" anchor="ctr"/>
-          <a:lstStyle/>
-          <a:p>
-            <a:pPr algn="ctr" indent="0" marL="0">
-              <a:buNone/>
-            </a:pPr>
-            <a:r>
-              <a:rPr lang="en-US" sz="900" b="1" dirty="0">
-                <a:solidFill>
-                  <a:srgbClr val="9D174D"/>
-                </a:solidFill>
-                <a:latin typeface="Trebuchet MS" pitchFamily="34" charset="0"/>
-                <a:ea typeface="Trebuchet MS" pitchFamily="34" charset="-122"/>
-                <a:cs typeface="Trebuchet MS" pitchFamily="34" charset="-120"/>
-              </a:rPr>
-              <a:t>e</a:t>
-            </a:r>
-            <a:endParaRPr lang="en-US" sz="900" dirty="0"/>
-          </a:p>
-        </p:txBody>
-      </p:sp>
-      <p:sp>
-        <p:nvSpPr>
-          <p:cNvPr id="44" name="Shape 42"/>
-          <p:cNvSpPr/>
-          <p:nvPr/>
-        </p:nvSpPr>
-        <p:spPr>
-          <a:xfrm>
-            <a:off x="3942207" y="4169664"/>
-            <a:ext cx="685800" cy="475488"/>
-          </a:xfrm>
-          <a:prstGeom prst="rect">
-            <a:avLst>
-              <a:gd name="adj" fmla="val 7692"/>
-            </a:avLst>
-          </a:prstGeom>
-          <a:solidFill>
-            <a:srgbClr val="FFFFFF"/>
-          </a:solidFill>
-          <a:ln w="12700">
-            <a:solidFill>
-              <a:srgbClr val="DB2777"/>
-            </a:solidFill>
-            <a:prstDash val="solid"/>
-          </a:ln>
-        </p:spPr>
-      </p:sp>
-      <p:sp>
-        <p:nvSpPr>
-          <p:cNvPr id="45" name="Text 43"/>
-          <p:cNvSpPr/>
-          <p:nvPr/>
-        </p:nvSpPr>
-        <p:spPr>
-          <a:xfrm>
-            <a:off x="3942207" y="4169664"/>
-            <a:ext cx="685800" cy="475488"/>
-          </a:xfrm>
-          <a:prstGeom prst="rect">
-            <a:avLst/>
-          </a:prstGeom>
-          <a:noFill/>
-          <a:ln/>
-        </p:spPr>
-        <p:txBody>
-          <a:bodyPr wrap="square" lIns="0" tIns="0" rIns="0" bIns="0" rtlCol="0" anchor="ctr"/>
-          <a:lstStyle/>
-          <a:p>
-            <a:pPr algn="ctr" indent="0" marL="0">
-              <a:buNone/>
-            </a:pPr>
-            <a:r>
-              <a:rPr lang="en-US" sz="900" b="1" dirty="0">
-                <a:solidFill>
-                  <a:srgbClr val="9D174D"/>
-                </a:solidFill>
-                <a:latin typeface="Trebuchet MS" pitchFamily="34" charset="0"/>
-                <a:ea typeface="Trebuchet MS" pitchFamily="34" charset="-122"/>
-                <a:cs typeface="Trebuchet MS" pitchFamily="34" charset="-120"/>
-              </a:rPr>
-              <a:t>i</a:t>
-            </a:r>
-            <a:endParaRPr lang="en-US" sz="900" dirty="0"/>
-          </a:p>
-        </p:txBody>
-      </p:sp>
-      <p:sp>
-        <p:nvSpPr>
-          <p:cNvPr id="46" name="Shape 44"/>
-          <p:cNvSpPr/>
-          <p:nvPr/>
-        </p:nvSpPr>
-        <p:spPr>
-          <a:xfrm>
-            <a:off x="4850892" y="4169664"/>
-            <a:ext cx="685800" cy="475488"/>
-          </a:xfrm>
-          <a:prstGeom prst="rect">
-            <a:avLst>
-              <a:gd name="adj" fmla="val 7692"/>
-            </a:avLst>
-          </a:prstGeom>
-          <a:solidFill>
-            <a:srgbClr val="FFFFFF"/>
-          </a:solidFill>
-          <a:ln w="12700">
-            <a:solidFill>
-              <a:srgbClr val="DB2777"/>
-            </a:solidFill>
-            <a:prstDash val="solid"/>
-          </a:ln>
-        </p:spPr>
-      </p:sp>
-      <p:sp>
-        <p:nvSpPr>
-          <p:cNvPr id="47" name="Text 45"/>
-          <p:cNvSpPr/>
-          <p:nvPr/>
-        </p:nvSpPr>
-        <p:spPr>
-          <a:xfrm>
-            <a:off x="4850892" y="4169664"/>
-            <a:ext cx="685800" cy="475488"/>
-          </a:xfrm>
-          <a:prstGeom prst="rect">
-            <a:avLst/>
-          </a:prstGeom>
-          <a:noFill/>
-          <a:ln/>
-        </p:spPr>
-        <p:txBody>
-          <a:bodyPr wrap="square" lIns="0" tIns="0" rIns="0" bIns="0" rtlCol="0" anchor="ctr"/>
-          <a:lstStyle/>
-          <a:p>
-            <a:pPr algn="ctr" indent="0" marL="0">
-              <a:buNone/>
-            </a:pPr>
-            <a:r>
-              <a:rPr lang="en-US" sz="900" b="1" dirty="0">
-                <a:solidFill>
-                  <a:srgbClr val="9D174D"/>
-                </a:solidFill>
-                <a:latin typeface="Trebuchet MS" pitchFamily="34" charset="0"/>
-                <a:ea typeface="Trebuchet MS" pitchFamily="34" charset="-122"/>
-                <a:cs typeface="Trebuchet MS" pitchFamily="34" charset="-120"/>
-              </a:rPr>
               <a:t>n</a:t>
-            </a:r>
-            <a:endParaRPr lang="en-US" sz="900" dirty="0"/>
-          </a:p>
-        </p:txBody>
-      </p:sp>
-      <p:sp>
-        <p:nvSpPr>
-          <p:cNvPr id="48" name="Shape 46"/>
-          <p:cNvSpPr/>
-          <p:nvPr/>
-        </p:nvSpPr>
-        <p:spPr>
-          <a:xfrm>
-            <a:off x="5759577" y="4169664"/>
-            <a:ext cx="685800" cy="475488"/>
-          </a:xfrm>
-          <a:prstGeom prst="rect">
-            <a:avLst>
-              <a:gd name="adj" fmla="val 7692"/>
-            </a:avLst>
-          </a:prstGeom>
-          <a:solidFill>
-            <a:srgbClr val="FFFFFF"/>
-          </a:solidFill>
-          <a:ln w="12700">
-            <a:solidFill>
-              <a:srgbClr val="DB2777"/>
-            </a:solidFill>
-            <a:prstDash val="solid"/>
-          </a:ln>
-        </p:spPr>
-      </p:sp>
-      <p:sp>
-        <p:nvSpPr>
-          <p:cNvPr id="49" name="Text 47"/>
-          <p:cNvSpPr/>
-          <p:nvPr/>
-        </p:nvSpPr>
-        <p:spPr>
-          <a:xfrm>
-            <a:off x="5759577" y="4169664"/>
-            <a:ext cx="685800" cy="475488"/>
-          </a:xfrm>
-          <a:prstGeom prst="rect">
-            <a:avLst/>
-          </a:prstGeom>
-          <a:noFill/>
-          <a:ln/>
-        </p:spPr>
-        <p:txBody>
-          <a:bodyPr wrap="square" lIns="0" tIns="0" rIns="0" bIns="0" rtlCol="0" anchor="ctr"/>
-          <a:lstStyle/>
-          <a:p>
-            <a:pPr algn="ctr" indent="0" marL="0">
-              <a:buNone/>
-            </a:pPr>
-            <a:r>
-              <a:rPr lang="en-US" sz="900" b="1" dirty="0">
-                <a:solidFill>
-                  <a:srgbClr val="9D174D"/>
-                </a:solidFill>
-                <a:latin typeface="Trebuchet MS" pitchFamily="34" charset="0"/>
-                <a:ea typeface="Trebuchet MS" pitchFamily="34" charset="-122"/>
-                <a:cs typeface="Trebuchet MS" pitchFamily="34" charset="-120"/>
-              </a:rPr>
-              <a:t>sp</a:t>
-            </a:r>
-            <a:endParaRPr lang="en-US" sz="900" dirty="0"/>
-          </a:p>
-        </p:txBody>
-      </p:sp>
-      <p:sp>
-        <p:nvSpPr>
-          <p:cNvPr id="50" name="Shape 48"/>
-          <p:cNvSpPr/>
-          <p:nvPr/>
-        </p:nvSpPr>
-        <p:spPr>
-          <a:xfrm>
-            <a:off x="6668262" y="4169664"/>
-            <a:ext cx="685800" cy="475488"/>
-          </a:xfrm>
-          <a:prstGeom prst="rect">
-            <a:avLst>
-              <a:gd name="adj" fmla="val 7692"/>
-            </a:avLst>
-          </a:prstGeom>
-          <a:solidFill>
-            <a:srgbClr val="FFFFFF"/>
-          </a:solidFill>
-          <a:ln w="12700">
-            <a:solidFill>
-              <a:srgbClr val="DB2777"/>
-            </a:solidFill>
-            <a:prstDash val="solid"/>
-          </a:ln>
-        </p:spPr>
-      </p:sp>
-      <p:sp>
-        <p:nvSpPr>
-          <p:cNvPr id="51" name="Text 49"/>
-          <p:cNvSpPr/>
-          <p:nvPr/>
-        </p:nvSpPr>
-        <p:spPr>
-          <a:xfrm>
-            <a:off x="6668262" y="4169664"/>
-            <a:ext cx="685800" cy="475488"/>
-          </a:xfrm>
-          <a:prstGeom prst="rect">
-            <a:avLst/>
-          </a:prstGeom>
-          <a:noFill/>
-          <a:ln/>
-        </p:spPr>
-        <p:txBody>
-          <a:bodyPr wrap="square" lIns="0" tIns="0" rIns="0" bIns="0" rtlCol="0" anchor="ctr"/>
-          <a:lstStyle/>
-          <a:p>
-            <a:pPr algn="ctr" indent="0" marL="0">
-              <a:buNone/>
-            </a:pPr>
-            <a:r>
-              <a:rPr lang="en-US" sz="900" b="1" dirty="0">
-                <a:solidFill>
-                  <a:srgbClr val="9D174D"/>
-                </a:solidFill>
-                <a:latin typeface="Trebuchet MS" pitchFamily="34" charset="0"/>
-                <a:ea typeface="Trebuchet MS" pitchFamily="34" charset="-122"/>
-                <a:cs typeface="Trebuchet MS" pitchFamily="34" charset="-120"/>
-              </a:rPr>
-              <a:t>ir</a:t>
-            </a:r>
-            <a:endParaRPr lang="en-US" sz="900" dirty="0"/>
-          </a:p>
-        </p:txBody>
-      </p:sp>
-      <p:sp>
-        <p:nvSpPr>
-          <p:cNvPr id="52" name="Shape 50"/>
-          <p:cNvSpPr/>
-          <p:nvPr/>
-        </p:nvSpPr>
-        <p:spPr>
-          <a:xfrm>
-            <a:off x="7576947" y="4169664"/>
-            <a:ext cx="685800" cy="475488"/>
-          </a:xfrm>
-          <a:prstGeom prst="rect">
-            <a:avLst>
-              <a:gd name="adj" fmla="val 7692"/>
-            </a:avLst>
-          </a:prstGeom>
-          <a:solidFill>
-            <a:srgbClr val="FFFFFF"/>
-          </a:solidFill>
-          <a:ln w="12700">
-            <a:solidFill>
-              <a:srgbClr val="DB2777"/>
-            </a:solidFill>
-            <a:prstDash val="solid"/>
-          </a:ln>
-        </p:spPr>
-      </p:sp>
-      <p:sp>
-        <p:nvSpPr>
-          <p:cNvPr id="53" name="Text 51"/>
-          <p:cNvSpPr/>
-          <p:nvPr/>
-        </p:nvSpPr>
-        <p:spPr>
-          <a:xfrm>
-            <a:off x="7576947" y="4169664"/>
-            <a:ext cx="685800" cy="475488"/>
-          </a:xfrm>
-          <a:prstGeom prst="rect">
-            <a:avLst/>
-          </a:prstGeom>
-          <a:noFill/>
-          <a:ln/>
-        </p:spPr>
-        <p:txBody>
-          <a:bodyPr wrap="square" lIns="0" tIns="0" rIns="0" bIns="0" rtlCol="0" anchor="ctr"/>
-          <a:lstStyle/>
-          <a:p>
-            <a:pPr algn="ctr" indent="0" marL="0">
-              <a:buNone/>
-            </a:pPr>
-            <a:r>
-              <a:rPr lang="en-US" sz="900" b="1" dirty="0">
-                <a:solidFill>
-                  <a:srgbClr val="9D174D"/>
-                </a:solidFill>
-                <a:latin typeface="Trebuchet MS" pitchFamily="34" charset="0"/>
-                <a:ea typeface="Trebuchet MS" pitchFamily="34" charset="-122"/>
-                <a:cs typeface="Trebuchet MS" pitchFamily="34" charset="-120"/>
-              </a:rPr>
-              <a:t>ed</a:t>
             </a:r>
             <a:endParaRPr lang="en-US" sz="900" dirty="0"/>
           </a:p>
@@ -30397,7 +29587,7 @@
                 <a:ea typeface="Calibri" pitchFamily="34" charset="-122"/>
                 <a:cs typeface="Calibri" pitchFamily="34" charset="-120"/>
               </a:rPr>
-              <a:t>Word Labs  •  wordlabs.app  •  Root: 'inspire' = to breathe life or ideas</a:t>
+              <a:t>Word Labs  •  wordlabs.app  •  Root: 'inspire' = breathe life or feeling into</a:t>
             </a:r>
             <a:endParaRPr lang="en-US" sz="800" dirty="0"/>
           </a:p>
@@ -30536,7 +29726,7 @@
                 <a:ea typeface="Trebuchet MS" pitchFamily="34" charset="-122"/>
                 <a:cs typeface="Trebuchet MS" pitchFamily="34" charset="-120"/>
               </a:rPr>
-              <a:t>inspired</a:t>
+              <a:t>reinspired</a:t>
             </a:r>
             <a:endParaRPr lang="en-US" sz="2800" dirty="0"/>
           </a:p>
@@ -31224,7 +30414,7 @@
                 <a:ea typeface="Calibri" pitchFamily="34" charset="-122"/>
                 <a:cs typeface="Calibri" pitchFamily="34" charset="-120"/>
               </a:rPr>
-              <a:t>Word Labs  •  wordlabs.app  •  Root: 'inspire' = to breathe life or ideas</a:t>
+              <a:t>Word Labs  •  wordlabs.app  •  Root: 'inspire' = breathe life or feeling into</a:t>
             </a:r>
             <a:endParaRPr lang="en-US" sz="800" dirty="0"/>
           </a:p>
@@ -31363,7 +30553,7 @@
                 <a:ea typeface="Trebuchet MS" pitchFamily="34" charset="-122"/>
                 <a:cs typeface="Trebuchet MS" pitchFamily="34" charset="-120"/>
               </a:rPr>
-              <a:t>inspired</a:t>
+              <a:t>reinspired</a:t>
             </a:r>
             <a:endParaRPr lang="en-US" sz="2800" dirty="0"/>
           </a:p>
@@ -31443,7 +30633,7 @@
         </p:nvSpPr>
         <p:spPr>
           <a:xfrm>
-            <a:off x="2938272" y="2258568"/>
+            <a:off x="2221992" y="2258568"/>
             <a:ext cx="1828800" cy="292608"/>
           </a:xfrm>
           <a:prstGeom prst="rect">
@@ -31452,11 +30642,11 @@
             </a:avLst>
           </a:prstGeom>
           <a:solidFill>
-            <a:srgbClr val="CCFBF1"/>
+            <a:srgbClr val="DDD6FE"/>
           </a:solidFill>
           <a:ln w="19050">
             <a:solidFill>
-              <a:srgbClr val="0D9488"/>
+              <a:srgbClr val="7C3AED"/>
             </a:solidFill>
             <a:prstDash val="solid"/>
           </a:ln>
@@ -31477,7 +30667,7 @@
         </p:nvSpPr>
         <p:spPr>
           <a:xfrm>
-            <a:off x="2938272" y="2258568"/>
+            <a:off x="2221992" y="2258568"/>
             <a:ext cx="1828800" cy="292608"/>
           </a:xfrm>
           <a:prstGeom prst="rect">
@@ -31496,13 +30686,13 @@
             <a:r>
               <a:rPr lang="en-US" sz="1300" b="1" dirty="0">
                 <a:solidFill>
-                  <a:srgbClr val="0F766E"/>
+                  <a:srgbClr val="4C1D95"/>
                 </a:solidFill>
                 <a:latin typeface="Trebuchet MS" pitchFamily="34" charset="0"/>
                 <a:ea typeface="Trebuchet MS" pitchFamily="34" charset="-122"/>
                 <a:cs typeface="Trebuchet MS" pitchFamily="34" charset="-120"/>
               </a:rPr>
-              <a:t>inspire</a:t>
+              <a:t>re</a:t>
             </a:r>
             <a:endParaRPr lang="en-US" sz="1300" dirty="0"/>
           </a:p>
@@ -31516,7 +30706,7 @@
         </p:nvSpPr>
         <p:spPr>
           <a:xfrm>
-            <a:off x="2938272" y="2569464"/>
+            <a:off x="2221992" y="2569464"/>
             <a:ext cx="1828800" cy="201168"/>
           </a:xfrm>
           <a:prstGeom prst="rect">
@@ -31541,7 +30731,7 @@
                 <a:ea typeface="Calibri" pitchFamily="34" charset="-122"/>
                 <a:cs typeface="Calibri" pitchFamily="34" charset="-120"/>
               </a:rPr>
-              <a:t>to breathe life or ideas into</a:t>
+              <a:t>again</a:t>
             </a:r>
             <a:endParaRPr lang="en-US" sz="850" dirty="0"/>
           </a:p>
@@ -31549,52 +30739,13 @@
       </p:sp>
       <p:sp>
         <p:nvSpPr>
-          <p:cNvPr id="19" name="Text 17"/>
-          <p:cNvSpPr/>
-          <p:nvPr/>
-        </p:nvSpPr>
-        <p:spPr>
-          <a:xfrm>
-            <a:off x="2938272" y="2752344"/>
-            <a:ext cx="1828800" cy="182880"/>
-          </a:xfrm>
-          <a:prstGeom prst="rect">
-            <a:avLst/>
-          </a:prstGeom>
-          <a:noFill/>
-          <a:ln/>
-        </p:spPr>
-        <p:txBody>
-          <a:bodyPr wrap="square" lIns="0" tIns="0" rIns="0" bIns="0" rtlCol="0" anchor="t"/>
-          <a:lstStyle/>
-          <a:p>
-            <a:pPr algn="ctr" indent="0" marL="0">
-              <a:buNone/>
-            </a:pPr>
-            <a:r>
-              <a:rPr lang="en-US" sz="700" i="1" dirty="0">
-                <a:solidFill>
-                  <a:srgbClr val="94A3B8"/>
-                </a:solidFill>
-                <a:latin typeface="Calibri" pitchFamily="34" charset="0"/>
-                <a:ea typeface="Calibri" pitchFamily="34" charset="-122"/>
-                <a:cs typeface="Calibri" pitchFamily="34" charset="-120"/>
-              </a:rPr>
-              <a:t>'e' dropped before vowel suffix</a:t>
-            </a:r>
-            <a:endParaRPr lang="en-US" sz="700" dirty="0"/>
-          </a:p>
-        </p:txBody>
-      </p:sp>
-      <p:sp>
-        <p:nvSpPr>
-          <p:cNvPr id="20" name="Shape 18"/>
-          <p:cNvSpPr/>
-          <p:nvPr/>
-        </p:nvSpPr>
-        <p:spPr>
-          <a:xfrm>
-            <a:off x="5803392" y="2258568"/>
+          <p:cNvPr id="19" name="Shape 17"/>
+          <p:cNvSpPr/>
+          <p:nvPr/>
+        </p:nvSpPr>
+        <p:spPr>
+          <a:xfrm>
+            <a:off x="4370832" y="2258568"/>
             <a:ext cx="1828800" cy="292608"/>
           </a:xfrm>
           <a:prstGeom prst="rect">
@@ -31603,11 +30754,11 @@
             </a:avLst>
           </a:prstGeom>
           <a:solidFill>
-            <a:srgbClr val="FCE7F3"/>
+            <a:srgbClr val="CCFBF1"/>
           </a:solidFill>
           <a:ln w="19050">
             <a:solidFill>
-              <a:srgbClr val="DB2777"/>
+              <a:srgbClr val="0D9488"/>
             </a:solidFill>
             <a:prstDash val="solid"/>
           </a:ln>
@@ -31622,13 +30773,13 @@
       </p:sp>
       <p:sp>
         <p:nvSpPr>
-          <p:cNvPr id="21" name="Text 19"/>
-          <p:cNvSpPr/>
-          <p:nvPr/>
-        </p:nvSpPr>
-        <p:spPr>
-          <a:xfrm>
-            <a:off x="5803392" y="2258568"/>
+          <p:cNvPr id="20" name="Text 18"/>
+          <p:cNvSpPr/>
+          <p:nvPr/>
+        </p:nvSpPr>
+        <p:spPr>
+          <a:xfrm>
+            <a:off x="4370832" y="2258568"/>
             <a:ext cx="1828800" cy="292608"/>
           </a:xfrm>
           <a:prstGeom prst="rect">
@@ -31647,13 +30798,13 @@
             <a:r>
               <a:rPr lang="en-US" sz="1300" b="1" dirty="0">
                 <a:solidFill>
-                  <a:srgbClr val="9D174D"/>
+                  <a:srgbClr val="0F766E"/>
                 </a:solidFill>
                 <a:latin typeface="Trebuchet MS" pitchFamily="34" charset="0"/>
                 <a:ea typeface="Trebuchet MS" pitchFamily="34" charset="-122"/>
                 <a:cs typeface="Trebuchet MS" pitchFamily="34" charset="-120"/>
               </a:rPr>
-              <a:t>ed</a:t>
+              <a:t>inspire</a:t>
             </a:r>
             <a:endParaRPr lang="en-US" sz="1300" dirty="0"/>
           </a:p>
@@ -31661,13 +30812,13 @@
       </p:sp>
       <p:sp>
         <p:nvSpPr>
-          <p:cNvPr id="22" name="Text 20"/>
-          <p:cNvSpPr/>
-          <p:nvPr/>
-        </p:nvSpPr>
-        <p:spPr>
-          <a:xfrm>
-            <a:off x="5803392" y="2569464"/>
+          <p:cNvPr id="21" name="Text 19"/>
+          <p:cNvSpPr/>
+          <p:nvPr/>
+        </p:nvSpPr>
+        <p:spPr>
+          <a:xfrm>
+            <a:off x="4370832" y="2569464"/>
             <a:ext cx="1828800" cy="201168"/>
           </a:xfrm>
           <a:prstGeom prst="rect">
@@ -31692,7 +30843,7 @@
                 <a:ea typeface="Calibri" pitchFamily="34" charset="-122"/>
                 <a:cs typeface="Calibri" pitchFamily="34" charset="-120"/>
               </a:rPr>
-              <a:t>happened in the past</a:t>
+              <a:t>breathe life or feeling into</a:t>
             </a:r>
             <a:endParaRPr lang="en-US" sz="850" dirty="0"/>
           </a:p>
@@ -31700,7 +30851,158 @@
       </p:sp>
       <p:sp>
         <p:nvSpPr>
+          <p:cNvPr id="22" name="Text 20"/>
+          <p:cNvSpPr/>
+          <p:nvPr/>
+        </p:nvSpPr>
+        <p:spPr>
+          <a:xfrm>
+            <a:off x="4370832" y="2752344"/>
+            <a:ext cx="1828800" cy="182880"/>
+          </a:xfrm>
+          <a:prstGeom prst="rect">
+            <a:avLst/>
+          </a:prstGeom>
+          <a:noFill/>
+          <a:ln/>
+        </p:spPr>
+        <p:txBody>
+          <a:bodyPr wrap="square" lIns="0" tIns="0" rIns="0" bIns="0" rtlCol="0" anchor="t"/>
+          <a:lstStyle/>
+          <a:p>
+            <a:pPr algn="ctr" indent="0" marL="0">
+              <a:buNone/>
+            </a:pPr>
+            <a:r>
+              <a:rPr lang="en-US" sz="700" i="1" dirty="0">
+                <a:solidFill>
+                  <a:srgbClr val="94A3B8"/>
+                </a:solidFill>
+                <a:latin typeface="Calibri" pitchFamily="34" charset="0"/>
+                <a:ea typeface="Calibri" pitchFamily="34" charset="-122"/>
+                <a:cs typeface="Calibri" pitchFamily="34" charset="-120"/>
+              </a:rPr>
+              <a:t>base drops 'e' before vowel suffix</a:t>
+            </a:r>
+            <a:endParaRPr lang="en-US" sz="700" dirty="0"/>
+          </a:p>
+        </p:txBody>
+      </p:sp>
+      <p:sp>
+        <p:nvSpPr>
           <p:cNvPr id="23" name="Shape 21"/>
+          <p:cNvSpPr/>
+          <p:nvPr/>
+        </p:nvSpPr>
+        <p:spPr>
+          <a:xfrm>
+            <a:off x="6519672" y="2258568"/>
+            <a:ext cx="1828800" cy="292608"/>
+          </a:xfrm>
+          <a:prstGeom prst="rect">
+            <a:avLst>
+              <a:gd name="adj" fmla="val 25000"/>
+            </a:avLst>
+          </a:prstGeom>
+          <a:solidFill>
+            <a:srgbClr val="FCE7F3"/>
+          </a:solidFill>
+          <a:ln w="19050">
+            <a:solidFill>
+              <a:srgbClr val="DB2777"/>
+            </a:solidFill>
+            <a:prstDash val="solid"/>
+          </a:ln>
+          <a:effectLst>
+            <a:outerShdw sx="100000" sy="100000" kx="0" ky="0" algn="bl" rotWithShape="0" blurRad="101600" dist="38100" dir="8100000">
+              <a:srgbClr val="000000">
+                <a:alpha val="12000"/>
+              </a:srgbClr>
+            </a:outerShdw>
+          </a:effectLst>
+        </p:spPr>
+      </p:sp>
+      <p:sp>
+        <p:nvSpPr>
+          <p:cNvPr id="24" name="Text 22"/>
+          <p:cNvSpPr/>
+          <p:nvPr/>
+        </p:nvSpPr>
+        <p:spPr>
+          <a:xfrm>
+            <a:off x="6519672" y="2258568"/>
+            <a:ext cx="1828800" cy="292608"/>
+          </a:xfrm>
+          <a:prstGeom prst="rect">
+            <a:avLst/>
+          </a:prstGeom>
+          <a:noFill/>
+          <a:ln/>
+        </p:spPr>
+        <p:txBody>
+          <a:bodyPr wrap="square" lIns="0" tIns="0" rIns="0" bIns="0" rtlCol="0" anchor="ctr"/>
+          <a:lstStyle/>
+          <a:p>
+            <a:pPr algn="ctr" indent="0" marL="0">
+              <a:buNone/>
+            </a:pPr>
+            <a:r>
+              <a:rPr lang="en-US" sz="1300" b="1" dirty="0">
+                <a:solidFill>
+                  <a:srgbClr val="9D174D"/>
+                </a:solidFill>
+                <a:latin typeface="Trebuchet MS" pitchFamily="34" charset="0"/>
+                <a:ea typeface="Trebuchet MS" pitchFamily="34" charset="-122"/>
+                <a:cs typeface="Trebuchet MS" pitchFamily="34" charset="-120"/>
+              </a:rPr>
+              <a:t>ed</a:t>
+            </a:r>
+            <a:endParaRPr lang="en-US" sz="1300" dirty="0"/>
+          </a:p>
+        </p:txBody>
+      </p:sp>
+      <p:sp>
+        <p:nvSpPr>
+          <p:cNvPr id="25" name="Text 23"/>
+          <p:cNvSpPr/>
+          <p:nvPr/>
+        </p:nvSpPr>
+        <p:spPr>
+          <a:xfrm>
+            <a:off x="6519672" y="2569464"/>
+            <a:ext cx="1828800" cy="201168"/>
+          </a:xfrm>
+          <a:prstGeom prst="rect">
+            <a:avLst/>
+          </a:prstGeom>
+          <a:noFill/>
+          <a:ln/>
+        </p:spPr>
+        <p:txBody>
+          <a:bodyPr wrap="square" lIns="0" tIns="0" rIns="0" bIns="0" rtlCol="0" anchor="t"/>
+          <a:lstStyle/>
+          <a:p>
+            <a:pPr algn="ctr" indent="0" marL="0">
+              <a:buNone/>
+            </a:pPr>
+            <a:r>
+              <a:rPr lang="en-US" sz="850" dirty="0">
+                <a:solidFill>
+                  <a:srgbClr val="475569"/>
+                </a:solidFill>
+                <a:latin typeface="Calibri" pitchFamily="34" charset="0"/>
+                <a:ea typeface="Calibri" pitchFamily="34" charset="-122"/>
+                <a:cs typeface="Calibri" pitchFamily="34" charset="-120"/>
+              </a:rPr>
+              <a:t>in the past / having been done</a:t>
+            </a:r>
+            <a:endParaRPr lang="en-US" sz="850" dirty="0"/>
+          </a:p>
+        </p:txBody>
+      </p:sp>
+      <p:sp>
+        <p:nvSpPr>
+          <p:cNvPr id="26" name="Shape 24"/>
           <p:cNvSpPr/>
           <p:nvPr/>
         </p:nvSpPr>
@@ -31727,7 +31029,7 @@
       </p:sp>
       <p:sp>
         <p:nvSpPr>
-          <p:cNvPr id="24" name="Text 22"/>
+          <p:cNvPr id="27" name="Text 25"/>
           <p:cNvSpPr/>
           <p:nvPr/>
         </p:nvSpPr>
@@ -31766,7 +31068,7 @@
       </p:sp>
       <p:sp>
         <p:nvSpPr>
-          <p:cNvPr id="25" name="Shape 23"/>
+          <p:cNvPr id="28" name="Shape 26"/>
           <p:cNvSpPr/>
           <p:nvPr/>
         </p:nvSpPr>
@@ -31793,7 +31095,7 @@
       </p:sp>
       <p:sp>
         <p:nvSpPr>
-          <p:cNvPr id="26" name="Text 24"/>
+          <p:cNvPr id="29" name="Text 27"/>
           <p:cNvSpPr/>
           <p:nvPr/>
         </p:nvSpPr>
@@ -31832,7 +31134,7 @@
       </p:sp>
       <p:sp>
         <p:nvSpPr>
-          <p:cNvPr id="27" name="Shape 25"/>
+          <p:cNvPr id="30" name="Shape 28"/>
           <p:cNvSpPr/>
           <p:nvPr/>
         </p:nvSpPr>
@@ -31859,7 +31161,7 @@
       </p:sp>
       <p:sp>
         <p:nvSpPr>
-          <p:cNvPr id="28" name="Text 26"/>
+          <p:cNvPr id="31" name="Text 29"/>
           <p:cNvSpPr/>
           <p:nvPr/>
         </p:nvSpPr>
@@ -31898,7 +31200,7 @@
       </p:sp>
       <p:sp>
         <p:nvSpPr>
-          <p:cNvPr id="29" name="Shape 27"/>
+          <p:cNvPr id="32" name="Shape 30"/>
           <p:cNvSpPr/>
           <p:nvPr/>
         </p:nvSpPr>
@@ -31925,7 +31227,7 @@
       </p:sp>
       <p:sp>
         <p:nvSpPr>
-          <p:cNvPr id="30" name="Text 28"/>
+          <p:cNvPr id="33" name="Text 31"/>
           <p:cNvSpPr/>
           <p:nvPr/>
         </p:nvSpPr>
@@ -32248,7 +31550,7 @@
                 <a:ea typeface="Calibri" pitchFamily="34" charset="-122"/>
                 <a:cs typeface="Calibri" pitchFamily="34" charset="-120"/>
               </a:rPr>
-              <a:t>Word Labs  •  wordlabs.app  •  Root: 'inspire' = to breathe life or ideas</a:t>
+              <a:t>Word Labs  •  wordlabs.app  •  Root: 'inspire' = breathe life or feeling into</a:t>
             </a:r>
             <a:endParaRPr lang="en-US" sz="800" dirty="0"/>
           </a:p>
@@ -32387,7 +31689,7 @@
                 <a:ea typeface="Trebuchet MS" pitchFamily="34" charset="-122"/>
                 <a:cs typeface="Trebuchet MS" pitchFamily="34" charset="-120"/>
               </a:rPr>
-              <a:t>inspired</a:t>
+              <a:t>reinspired</a:t>
             </a:r>
             <a:endParaRPr lang="en-US" sz="2800" dirty="0"/>
           </a:p>
@@ -32467,7 +31769,7 @@
         </p:nvSpPr>
         <p:spPr>
           <a:xfrm>
-            <a:off x="2938272" y="2258568"/>
+            <a:off x="2221992" y="2258568"/>
             <a:ext cx="1828800" cy="292608"/>
           </a:xfrm>
           <a:prstGeom prst="rect">
@@ -32476,11 +31778,11 @@
             </a:avLst>
           </a:prstGeom>
           <a:solidFill>
-            <a:srgbClr val="CCFBF1"/>
+            <a:srgbClr val="DDD6FE"/>
           </a:solidFill>
           <a:ln w="19050">
             <a:solidFill>
-              <a:srgbClr val="0D9488"/>
+              <a:srgbClr val="7C3AED"/>
             </a:solidFill>
             <a:prstDash val="solid"/>
           </a:ln>
@@ -32501,7 +31803,7 @@
         </p:nvSpPr>
         <p:spPr>
           <a:xfrm>
-            <a:off x="2938272" y="2258568"/>
+            <a:off x="2221992" y="2258568"/>
             <a:ext cx="1828800" cy="292608"/>
           </a:xfrm>
           <a:prstGeom prst="rect">
@@ -32520,13 +31822,13 @@
             <a:r>
               <a:rPr lang="en-US" sz="1300" b="1" dirty="0">
                 <a:solidFill>
-                  <a:srgbClr val="0F766E"/>
+                  <a:srgbClr val="4C1D95"/>
                 </a:solidFill>
                 <a:latin typeface="Trebuchet MS" pitchFamily="34" charset="0"/>
                 <a:ea typeface="Trebuchet MS" pitchFamily="34" charset="-122"/>
                 <a:cs typeface="Trebuchet MS" pitchFamily="34" charset="-120"/>
               </a:rPr>
-              <a:t>inspire</a:t>
+              <a:t>re</a:t>
             </a:r>
             <a:endParaRPr lang="en-US" sz="1300" dirty="0"/>
           </a:p>
@@ -32540,7 +31842,7 @@
         </p:nvSpPr>
         <p:spPr>
           <a:xfrm>
-            <a:off x="2938272" y="2569464"/>
+            <a:off x="2221992" y="2569464"/>
             <a:ext cx="1828800" cy="201168"/>
           </a:xfrm>
           <a:prstGeom prst="rect">
@@ -32565,7 +31867,7 @@
                 <a:ea typeface="Calibri" pitchFamily="34" charset="-122"/>
                 <a:cs typeface="Calibri" pitchFamily="34" charset="-120"/>
               </a:rPr>
-              <a:t>to breathe life or ideas into</a:t>
+              <a:t>again</a:t>
             </a:r>
             <a:endParaRPr lang="en-US" sz="850" dirty="0"/>
           </a:p>
@@ -32573,52 +31875,13 @@
       </p:sp>
       <p:sp>
         <p:nvSpPr>
-          <p:cNvPr id="19" name="Text 17"/>
-          <p:cNvSpPr/>
-          <p:nvPr/>
-        </p:nvSpPr>
-        <p:spPr>
-          <a:xfrm>
-            <a:off x="2938272" y="2752344"/>
-            <a:ext cx="1828800" cy="182880"/>
-          </a:xfrm>
-          <a:prstGeom prst="rect">
-            <a:avLst/>
-          </a:prstGeom>
-          <a:noFill/>
-          <a:ln/>
-        </p:spPr>
-        <p:txBody>
-          <a:bodyPr wrap="square" lIns="0" tIns="0" rIns="0" bIns="0" rtlCol="0" anchor="t"/>
-          <a:lstStyle/>
-          <a:p>
-            <a:pPr algn="ctr" indent="0" marL="0">
-              <a:buNone/>
-            </a:pPr>
-            <a:r>
-              <a:rPr lang="en-US" sz="700" i="1" dirty="0">
-                <a:solidFill>
-                  <a:srgbClr val="94A3B8"/>
-                </a:solidFill>
-                <a:latin typeface="Calibri" pitchFamily="34" charset="0"/>
-                <a:ea typeface="Calibri" pitchFamily="34" charset="-122"/>
-                <a:cs typeface="Calibri" pitchFamily="34" charset="-120"/>
-              </a:rPr>
-              <a:t>'e' dropped before vowel suffix</a:t>
-            </a:r>
-            <a:endParaRPr lang="en-US" sz="700" dirty="0"/>
-          </a:p>
-        </p:txBody>
-      </p:sp>
-      <p:sp>
-        <p:nvSpPr>
-          <p:cNvPr id="20" name="Shape 18"/>
-          <p:cNvSpPr/>
-          <p:nvPr/>
-        </p:nvSpPr>
-        <p:spPr>
-          <a:xfrm>
-            <a:off x="5803392" y="2258568"/>
+          <p:cNvPr id="19" name="Shape 17"/>
+          <p:cNvSpPr/>
+          <p:nvPr/>
+        </p:nvSpPr>
+        <p:spPr>
+          <a:xfrm>
+            <a:off x="4370832" y="2258568"/>
             <a:ext cx="1828800" cy="292608"/>
           </a:xfrm>
           <a:prstGeom prst="rect">
@@ -32627,11 +31890,11 @@
             </a:avLst>
           </a:prstGeom>
           <a:solidFill>
-            <a:srgbClr val="FCE7F3"/>
+            <a:srgbClr val="CCFBF1"/>
           </a:solidFill>
           <a:ln w="19050">
             <a:solidFill>
-              <a:srgbClr val="DB2777"/>
+              <a:srgbClr val="0D9488"/>
             </a:solidFill>
             <a:prstDash val="solid"/>
           </a:ln>
@@ -32646,13 +31909,13 @@
       </p:sp>
       <p:sp>
         <p:nvSpPr>
-          <p:cNvPr id="21" name="Text 19"/>
-          <p:cNvSpPr/>
-          <p:nvPr/>
-        </p:nvSpPr>
-        <p:spPr>
-          <a:xfrm>
-            <a:off x="5803392" y="2258568"/>
+          <p:cNvPr id="20" name="Text 18"/>
+          <p:cNvSpPr/>
+          <p:nvPr/>
+        </p:nvSpPr>
+        <p:spPr>
+          <a:xfrm>
+            <a:off x="4370832" y="2258568"/>
             <a:ext cx="1828800" cy="292608"/>
           </a:xfrm>
           <a:prstGeom prst="rect">
@@ -32671,13 +31934,13 @@
             <a:r>
               <a:rPr lang="en-US" sz="1300" b="1" dirty="0">
                 <a:solidFill>
-                  <a:srgbClr val="9D174D"/>
+                  <a:srgbClr val="0F766E"/>
                 </a:solidFill>
                 <a:latin typeface="Trebuchet MS" pitchFamily="34" charset="0"/>
                 <a:ea typeface="Trebuchet MS" pitchFamily="34" charset="-122"/>
                 <a:cs typeface="Trebuchet MS" pitchFamily="34" charset="-120"/>
               </a:rPr>
-              <a:t>ed</a:t>
+              <a:t>inspire</a:t>
             </a:r>
             <a:endParaRPr lang="en-US" sz="1300" dirty="0"/>
           </a:p>
@@ -32685,13 +31948,13 @@
       </p:sp>
       <p:sp>
         <p:nvSpPr>
-          <p:cNvPr id="22" name="Text 20"/>
-          <p:cNvSpPr/>
-          <p:nvPr/>
-        </p:nvSpPr>
-        <p:spPr>
-          <a:xfrm>
-            <a:off x="5803392" y="2569464"/>
+          <p:cNvPr id="21" name="Text 19"/>
+          <p:cNvSpPr/>
+          <p:nvPr/>
+        </p:nvSpPr>
+        <p:spPr>
+          <a:xfrm>
+            <a:off x="4370832" y="2569464"/>
             <a:ext cx="1828800" cy="201168"/>
           </a:xfrm>
           <a:prstGeom prst="rect">
@@ -32716,7 +31979,7 @@
                 <a:ea typeface="Calibri" pitchFamily="34" charset="-122"/>
                 <a:cs typeface="Calibri" pitchFamily="34" charset="-120"/>
               </a:rPr>
-              <a:t>happened in the past</a:t>
+              <a:t>breathe life or feeling into</a:t>
             </a:r>
             <a:endParaRPr lang="en-US" sz="850" dirty="0"/>
           </a:p>
@@ -32724,7 +31987,158 @@
       </p:sp>
       <p:sp>
         <p:nvSpPr>
+          <p:cNvPr id="22" name="Text 20"/>
+          <p:cNvSpPr/>
+          <p:nvPr/>
+        </p:nvSpPr>
+        <p:spPr>
+          <a:xfrm>
+            <a:off x="4370832" y="2752344"/>
+            <a:ext cx="1828800" cy="182880"/>
+          </a:xfrm>
+          <a:prstGeom prst="rect">
+            <a:avLst/>
+          </a:prstGeom>
+          <a:noFill/>
+          <a:ln/>
+        </p:spPr>
+        <p:txBody>
+          <a:bodyPr wrap="square" lIns="0" tIns="0" rIns="0" bIns="0" rtlCol="0" anchor="t"/>
+          <a:lstStyle/>
+          <a:p>
+            <a:pPr algn="ctr" indent="0" marL="0">
+              <a:buNone/>
+            </a:pPr>
+            <a:r>
+              <a:rPr lang="en-US" sz="700" i="1" dirty="0">
+                <a:solidFill>
+                  <a:srgbClr val="94A3B8"/>
+                </a:solidFill>
+                <a:latin typeface="Calibri" pitchFamily="34" charset="0"/>
+                <a:ea typeface="Calibri" pitchFamily="34" charset="-122"/>
+                <a:cs typeface="Calibri" pitchFamily="34" charset="-120"/>
+              </a:rPr>
+              <a:t>base drops 'e' before vowel suffix</a:t>
+            </a:r>
+            <a:endParaRPr lang="en-US" sz="700" dirty="0"/>
+          </a:p>
+        </p:txBody>
+      </p:sp>
+      <p:sp>
+        <p:nvSpPr>
           <p:cNvPr id="23" name="Shape 21"/>
+          <p:cNvSpPr/>
+          <p:nvPr/>
+        </p:nvSpPr>
+        <p:spPr>
+          <a:xfrm>
+            <a:off x="6519672" y="2258568"/>
+            <a:ext cx="1828800" cy="292608"/>
+          </a:xfrm>
+          <a:prstGeom prst="rect">
+            <a:avLst>
+              <a:gd name="adj" fmla="val 25000"/>
+            </a:avLst>
+          </a:prstGeom>
+          <a:solidFill>
+            <a:srgbClr val="FCE7F3"/>
+          </a:solidFill>
+          <a:ln w="19050">
+            <a:solidFill>
+              <a:srgbClr val="DB2777"/>
+            </a:solidFill>
+            <a:prstDash val="solid"/>
+          </a:ln>
+          <a:effectLst>
+            <a:outerShdw sx="100000" sy="100000" kx="0" ky="0" algn="bl" rotWithShape="0" blurRad="101600" dist="38100" dir="8100000">
+              <a:srgbClr val="000000">
+                <a:alpha val="12000"/>
+              </a:srgbClr>
+            </a:outerShdw>
+          </a:effectLst>
+        </p:spPr>
+      </p:sp>
+      <p:sp>
+        <p:nvSpPr>
+          <p:cNvPr id="24" name="Text 22"/>
+          <p:cNvSpPr/>
+          <p:nvPr/>
+        </p:nvSpPr>
+        <p:spPr>
+          <a:xfrm>
+            <a:off x="6519672" y="2258568"/>
+            <a:ext cx="1828800" cy="292608"/>
+          </a:xfrm>
+          <a:prstGeom prst="rect">
+            <a:avLst/>
+          </a:prstGeom>
+          <a:noFill/>
+          <a:ln/>
+        </p:spPr>
+        <p:txBody>
+          <a:bodyPr wrap="square" lIns="0" tIns="0" rIns="0" bIns="0" rtlCol="0" anchor="ctr"/>
+          <a:lstStyle/>
+          <a:p>
+            <a:pPr algn="ctr" indent="0" marL="0">
+              <a:buNone/>
+            </a:pPr>
+            <a:r>
+              <a:rPr lang="en-US" sz="1300" b="1" dirty="0">
+                <a:solidFill>
+                  <a:srgbClr val="9D174D"/>
+                </a:solidFill>
+                <a:latin typeface="Trebuchet MS" pitchFamily="34" charset="0"/>
+                <a:ea typeface="Trebuchet MS" pitchFamily="34" charset="-122"/>
+                <a:cs typeface="Trebuchet MS" pitchFamily="34" charset="-120"/>
+              </a:rPr>
+              <a:t>ed</a:t>
+            </a:r>
+            <a:endParaRPr lang="en-US" sz="1300" dirty="0"/>
+          </a:p>
+        </p:txBody>
+      </p:sp>
+      <p:sp>
+        <p:nvSpPr>
+          <p:cNvPr id="25" name="Text 23"/>
+          <p:cNvSpPr/>
+          <p:nvPr/>
+        </p:nvSpPr>
+        <p:spPr>
+          <a:xfrm>
+            <a:off x="6519672" y="2569464"/>
+            <a:ext cx="1828800" cy="201168"/>
+          </a:xfrm>
+          <a:prstGeom prst="rect">
+            <a:avLst/>
+          </a:prstGeom>
+          <a:noFill/>
+          <a:ln/>
+        </p:spPr>
+        <p:txBody>
+          <a:bodyPr wrap="square" lIns="0" tIns="0" rIns="0" bIns="0" rtlCol="0" anchor="t"/>
+          <a:lstStyle/>
+          <a:p>
+            <a:pPr algn="ctr" indent="0" marL="0">
+              <a:buNone/>
+            </a:pPr>
+            <a:r>
+              <a:rPr lang="en-US" sz="850" dirty="0">
+                <a:solidFill>
+                  <a:srgbClr val="475569"/>
+                </a:solidFill>
+                <a:latin typeface="Calibri" pitchFamily="34" charset="0"/>
+                <a:ea typeface="Calibri" pitchFamily="34" charset="-122"/>
+                <a:cs typeface="Calibri" pitchFamily="34" charset="-120"/>
+              </a:rPr>
+              <a:t>in the past / having been done</a:t>
+            </a:r>
+            <a:endParaRPr lang="en-US" sz="850" dirty="0"/>
+          </a:p>
+        </p:txBody>
+      </p:sp>
+      <p:sp>
+        <p:nvSpPr>
+          <p:cNvPr id="26" name="Shape 24"/>
           <p:cNvSpPr/>
           <p:nvPr/>
         </p:nvSpPr>
@@ -32751,7 +32165,7 @@
       </p:sp>
       <p:sp>
         <p:nvSpPr>
-          <p:cNvPr id="24" name="Text 22"/>
+          <p:cNvPr id="27" name="Text 25"/>
           <p:cNvSpPr/>
           <p:nvPr/>
         </p:nvSpPr>
@@ -32790,7 +32204,7 @@
       </p:sp>
       <p:sp>
         <p:nvSpPr>
-          <p:cNvPr id="25" name="Shape 23"/>
+          <p:cNvPr id="28" name="Shape 26"/>
           <p:cNvSpPr/>
           <p:nvPr/>
         </p:nvSpPr>
@@ -32817,13 +32231,13 @@
       </p:sp>
       <p:sp>
         <p:nvSpPr>
-          <p:cNvPr id="26" name="Shape 24"/>
-          <p:cNvSpPr/>
-          <p:nvPr/>
-        </p:nvSpPr>
-        <p:spPr>
-          <a:xfrm>
-            <a:off x="2999232" y="3364992"/>
+          <p:cNvPr id="29" name="Shape 27"/>
+          <p:cNvSpPr/>
+          <p:nvPr/>
+        </p:nvSpPr>
+        <p:spPr>
+          <a:xfrm>
+            <a:off x="2313432" y="3364992"/>
             <a:ext cx="1645920" cy="475488"/>
           </a:xfrm>
           <a:prstGeom prst="rect">
@@ -32844,13 +32258,13 @@
       </p:sp>
       <p:sp>
         <p:nvSpPr>
-          <p:cNvPr id="27" name="Text 25"/>
-          <p:cNvSpPr/>
-          <p:nvPr/>
-        </p:nvSpPr>
-        <p:spPr>
-          <a:xfrm>
-            <a:off x="2999232" y="3364992"/>
+          <p:cNvPr id="30" name="Text 28"/>
+          <p:cNvSpPr/>
+          <p:nvPr/>
+        </p:nvSpPr>
+        <p:spPr>
+          <a:xfrm>
+            <a:off x="2313432" y="3364992"/>
             <a:ext cx="1645920" cy="475488"/>
           </a:xfrm>
           <a:prstGeom prst="rect">
@@ -32875,7 +32289,7 @@
                 <a:ea typeface="Trebuchet MS" pitchFamily="34" charset="-122"/>
                 <a:cs typeface="Trebuchet MS" pitchFamily="34" charset="-120"/>
               </a:rPr>
-              <a:t>in</a:t>
+              <a:t>re</a:t>
             </a:r>
             <a:endParaRPr lang="en-US" sz="1400" dirty="0"/>
           </a:p>
@@ -32883,14 +32297,14 @@
       </p:sp>
       <p:sp>
         <p:nvSpPr>
-          <p:cNvPr id="28" name="Text 26"/>
-          <p:cNvSpPr/>
-          <p:nvPr/>
-        </p:nvSpPr>
-        <p:spPr>
-          <a:xfrm>
-            <a:off x="4645152" y="3364992"/>
-            <a:ext cx="1097280" cy="475488"/>
+          <p:cNvPr id="31" name="Text 29"/>
+          <p:cNvSpPr/>
+          <p:nvPr/>
+        </p:nvSpPr>
+        <p:spPr>
+          <a:xfrm>
+            <a:off x="3959352" y="3364992"/>
+            <a:ext cx="411480" cy="475488"/>
           </a:xfrm>
           <a:prstGeom prst="rect">
             <a:avLst/>
@@ -32922,13 +32336,13 @@
       </p:sp>
       <p:sp>
         <p:nvSpPr>
-          <p:cNvPr id="29" name="Shape 27"/>
-          <p:cNvSpPr/>
-          <p:nvPr/>
-        </p:nvSpPr>
-        <p:spPr>
-          <a:xfrm>
-            <a:off x="5742432" y="3364992"/>
+          <p:cNvPr id="32" name="Shape 30"/>
+          <p:cNvSpPr/>
+          <p:nvPr/>
+        </p:nvSpPr>
+        <p:spPr>
+          <a:xfrm>
+            <a:off x="4370832" y="3364992"/>
             <a:ext cx="1645920" cy="475488"/>
           </a:xfrm>
           <a:prstGeom prst="rect">
@@ -32949,13 +32363,13 @@
       </p:sp>
       <p:sp>
         <p:nvSpPr>
-          <p:cNvPr id="30" name="Text 28"/>
-          <p:cNvSpPr/>
-          <p:nvPr/>
-        </p:nvSpPr>
-        <p:spPr>
-          <a:xfrm>
-            <a:off x="5742432" y="3364992"/>
+          <p:cNvPr id="33" name="Text 31"/>
+          <p:cNvSpPr/>
+          <p:nvPr/>
+        </p:nvSpPr>
+        <p:spPr>
+          <a:xfrm>
+            <a:off x="4370832" y="3364992"/>
             <a:ext cx="1645920" cy="475488"/>
           </a:xfrm>
           <a:prstGeom prst="rect">
@@ -32980,6 +32394,111 @@
                 <a:ea typeface="Trebuchet MS" pitchFamily="34" charset="-122"/>
                 <a:cs typeface="Trebuchet MS" pitchFamily="34" charset="-120"/>
               </a:rPr>
+              <a:t>in</a:t>
+            </a:r>
+            <a:endParaRPr lang="en-US" sz="1400" dirty="0"/>
+          </a:p>
+        </p:txBody>
+      </p:sp>
+      <p:sp>
+        <p:nvSpPr>
+          <p:cNvPr id="34" name="Text 32"/>
+          <p:cNvSpPr/>
+          <p:nvPr/>
+        </p:nvSpPr>
+        <p:spPr>
+          <a:xfrm>
+            <a:off x="6016752" y="3364992"/>
+            <a:ext cx="411480" cy="475488"/>
+          </a:xfrm>
+          <a:prstGeom prst="rect">
+            <a:avLst/>
+          </a:prstGeom>
+          <a:noFill/>
+          <a:ln/>
+        </p:spPr>
+        <p:txBody>
+          <a:bodyPr wrap="square" lIns="0" tIns="0" rIns="0" bIns="0" rtlCol="0" anchor="ctr"/>
+          <a:lstStyle/>
+          <a:p>
+            <a:pPr algn="ctr" indent="0" marL="0">
+              <a:buNone/>
+            </a:pPr>
+            <a:r>
+              <a:rPr lang="en-US" sz="1600" b="1" dirty="0">
+                <a:solidFill>
+                  <a:srgbClr val="0D9488"/>
+                </a:solidFill>
+                <a:latin typeface="Trebuchet MS" pitchFamily="34" charset="0"/>
+                <a:ea typeface="Trebuchet MS" pitchFamily="34" charset="-122"/>
+                <a:cs typeface="Trebuchet MS" pitchFamily="34" charset="-120"/>
+              </a:rPr>
+              <a:t>·</a:t>
+            </a:r>
+            <a:endParaRPr lang="en-US" sz="1600" dirty="0"/>
+          </a:p>
+        </p:txBody>
+      </p:sp>
+      <p:sp>
+        <p:nvSpPr>
+          <p:cNvPr id="35" name="Shape 33"/>
+          <p:cNvSpPr/>
+          <p:nvPr/>
+        </p:nvSpPr>
+        <p:spPr>
+          <a:xfrm>
+            <a:off x="6428232" y="3364992"/>
+            <a:ext cx="1645920" cy="475488"/>
+          </a:xfrm>
+          <a:prstGeom prst="rect">
+            <a:avLst>
+              <a:gd name="adj" fmla="val 9615"/>
+            </a:avLst>
+          </a:prstGeom>
+          <a:solidFill>
+            <a:srgbClr val="FFFFFF"/>
+          </a:solidFill>
+          <a:ln w="12700">
+            <a:solidFill>
+              <a:srgbClr val="0D9488"/>
+            </a:solidFill>
+            <a:prstDash val="solid"/>
+          </a:ln>
+        </p:spPr>
+      </p:sp>
+      <p:sp>
+        <p:nvSpPr>
+          <p:cNvPr id="36" name="Text 34"/>
+          <p:cNvSpPr/>
+          <p:nvPr/>
+        </p:nvSpPr>
+        <p:spPr>
+          <a:xfrm>
+            <a:off x="6428232" y="3364992"/>
+            <a:ext cx="1645920" cy="475488"/>
+          </a:xfrm>
+          <a:prstGeom prst="rect">
+            <a:avLst/>
+          </a:prstGeom>
+          <a:noFill/>
+          <a:ln/>
+        </p:spPr>
+        <p:txBody>
+          <a:bodyPr wrap="square" lIns="0" tIns="0" rIns="0" bIns="0" rtlCol="0" anchor="ctr"/>
+          <a:lstStyle/>
+          <a:p>
+            <a:pPr algn="ctr" indent="0" marL="0">
+              <a:buNone/>
+            </a:pPr>
+            <a:r>
+              <a:rPr lang="en-US" sz="1400" b="1" dirty="0">
+                <a:solidFill>
+                  <a:srgbClr val="0D9488"/>
+                </a:solidFill>
+                <a:latin typeface="Trebuchet MS" pitchFamily="34" charset="0"/>
+                <a:ea typeface="Trebuchet MS" pitchFamily="34" charset="-122"/>
+                <a:cs typeface="Trebuchet MS" pitchFamily="34" charset="-120"/>
+              </a:rPr>
               <a:t>spired</a:t>
             </a:r>
             <a:endParaRPr lang="en-US" sz="1400" dirty="0"/>
@@ -32988,7 +32507,7 @@
       </p:sp>
       <p:sp>
         <p:nvSpPr>
-          <p:cNvPr id="31" name="Shape 29"/>
+          <p:cNvPr id="37" name="Shape 35"/>
           <p:cNvSpPr/>
           <p:nvPr/>
         </p:nvSpPr>
@@ -33015,7 +32534,7 @@
       </p:sp>
       <p:sp>
         <p:nvSpPr>
-          <p:cNvPr id="32" name="Text 30"/>
+          <p:cNvPr id="38" name="Text 36"/>
           <p:cNvSpPr/>
           <p:nvPr/>
         </p:nvSpPr>
@@ -33054,7 +32573,7 @@
       </p:sp>
       <p:sp>
         <p:nvSpPr>
-          <p:cNvPr id="33" name="Shape 31"/>
+          <p:cNvPr id="39" name="Shape 37"/>
           <p:cNvSpPr/>
           <p:nvPr/>
         </p:nvSpPr>
@@ -33081,7 +32600,7 @@
       </p:sp>
       <p:sp>
         <p:nvSpPr>
-          <p:cNvPr id="34" name="Text 32"/>
+          <p:cNvPr id="40" name="Text 38"/>
           <p:cNvSpPr/>
           <p:nvPr/>
         </p:nvSpPr>
@@ -33404,7 +32923,7 @@
                 <a:ea typeface="Calibri" pitchFamily="34" charset="-122"/>
                 <a:cs typeface="Calibri" pitchFamily="34" charset="-120"/>
               </a:rPr>
-              <a:t>Word Labs  •  wordlabs.app  •  Root: 'inspire' = to breathe life or ideas</a:t>
+              <a:t>Word Labs  •  wordlabs.app  •  Root: 'inspire' = breathe life or feeling into</a:t>
             </a:r>
             <a:endParaRPr lang="en-US" sz="800" dirty="0"/>
           </a:p>
@@ -33543,7 +33062,7 @@
                 <a:ea typeface="Trebuchet MS" pitchFamily="34" charset="-122"/>
                 <a:cs typeface="Trebuchet MS" pitchFamily="34" charset="-120"/>
               </a:rPr>
-              <a:t>inspired</a:t>
+              <a:t>reinspired</a:t>
             </a:r>
             <a:endParaRPr lang="en-US" sz="2800" dirty="0"/>
           </a:p>
@@ -33623,7 +33142,7 @@
         </p:nvSpPr>
         <p:spPr>
           <a:xfrm>
-            <a:off x="2938272" y="2258568"/>
+            <a:off x="2221992" y="2258568"/>
             <a:ext cx="1828800" cy="292608"/>
           </a:xfrm>
           <a:prstGeom prst="rect">
@@ -33632,11 +33151,11 @@
             </a:avLst>
           </a:prstGeom>
           <a:solidFill>
-            <a:srgbClr val="CCFBF1"/>
+            <a:srgbClr val="DDD6FE"/>
           </a:solidFill>
           <a:ln w="19050">
             <a:solidFill>
-              <a:srgbClr val="0D9488"/>
+              <a:srgbClr val="7C3AED"/>
             </a:solidFill>
             <a:prstDash val="solid"/>
           </a:ln>
@@ -33657,7 +33176,7 @@
         </p:nvSpPr>
         <p:spPr>
           <a:xfrm>
-            <a:off x="2938272" y="2258568"/>
+            <a:off x="2221992" y="2258568"/>
             <a:ext cx="1828800" cy="292608"/>
           </a:xfrm>
           <a:prstGeom prst="rect">
@@ -33676,13 +33195,13 @@
             <a:r>
               <a:rPr lang="en-US" sz="1300" b="1" dirty="0">
                 <a:solidFill>
-                  <a:srgbClr val="0F766E"/>
+                  <a:srgbClr val="4C1D95"/>
                 </a:solidFill>
                 <a:latin typeface="Trebuchet MS" pitchFamily="34" charset="0"/>
                 <a:ea typeface="Trebuchet MS" pitchFamily="34" charset="-122"/>
                 <a:cs typeface="Trebuchet MS" pitchFamily="34" charset="-120"/>
               </a:rPr>
-              <a:t>inspire</a:t>
+              <a:t>re</a:t>
             </a:r>
             <a:endParaRPr lang="en-US" sz="1300" dirty="0"/>
           </a:p>
@@ -33696,7 +33215,7 @@
         </p:nvSpPr>
         <p:spPr>
           <a:xfrm>
-            <a:off x="2938272" y="2569464"/>
+            <a:off x="2221992" y="2569464"/>
             <a:ext cx="1828800" cy="201168"/>
           </a:xfrm>
           <a:prstGeom prst="rect">
@@ -33721,7 +33240,7 @@
                 <a:ea typeface="Calibri" pitchFamily="34" charset="-122"/>
                 <a:cs typeface="Calibri" pitchFamily="34" charset="-120"/>
               </a:rPr>
-              <a:t>to breathe life or ideas into</a:t>
+              <a:t>again</a:t>
             </a:r>
             <a:endParaRPr lang="en-US" sz="850" dirty="0"/>
           </a:p>
@@ -33729,52 +33248,13 @@
       </p:sp>
       <p:sp>
         <p:nvSpPr>
-          <p:cNvPr id="19" name="Text 17"/>
-          <p:cNvSpPr/>
-          <p:nvPr/>
-        </p:nvSpPr>
-        <p:spPr>
-          <a:xfrm>
-            <a:off x="2938272" y="2752344"/>
-            <a:ext cx="1828800" cy="182880"/>
-          </a:xfrm>
-          <a:prstGeom prst="rect">
-            <a:avLst/>
-          </a:prstGeom>
-          <a:noFill/>
-          <a:ln/>
-        </p:spPr>
-        <p:txBody>
-          <a:bodyPr wrap="square" lIns="0" tIns="0" rIns="0" bIns="0" rtlCol="0" anchor="t"/>
-          <a:lstStyle/>
-          <a:p>
-            <a:pPr algn="ctr" indent="0" marL="0">
-              <a:buNone/>
-            </a:pPr>
-            <a:r>
-              <a:rPr lang="en-US" sz="700" i="1" dirty="0">
-                <a:solidFill>
-                  <a:srgbClr val="94A3B8"/>
-                </a:solidFill>
-                <a:latin typeface="Calibri" pitchFamily="34" charset="0"/>
-                <a:ea typeface="Calibri" pitchFamily="34" charset="-122"/>
-                <a:cs typeface="Calibri" pitchFamily="34" charset="-120"/>
-              </a:rPr>
-              <a:t>'e' dropped before vowel suffix</a:t>
-            </a:r>
-            <a:endParaRPr lang="en-US" sz="700" dirty="0"/>
-          </a:p>
-        </p:txBody>
-      </p:sp>
-      <p:sp>
-        <p:nvSpPr>
-          <p:cNvPr id="20" name="Shape 18"/>
-          <p:cNvSpPr/>
-          <p:nvPr/>
-        </p:nvSpPr>
-        <p:spPr>
-          <a:xfrm>
-            <a:off x="5803392" y="2258568"/>
+          <p:cNvPr id="19" name="Shape 17"/>
+          <p:cNvSpPr/>
+          <p:nvPr/>
+        </p:nvSpPr>
+        <p:spPr>
+          <a:xfrm>
+            <a:off x="4370832" y="2258568"/>
             <a:ext cx="1828800" cy="292608"/>
           </a:xfrm>
           <a:prstGeom prst="rect">
@@ -33783,11 +33263,11 @@
             </a:avLst>
           </a:prstGeom>
           <a:solidFill>
-            <a:srgbClr val="FCE7F3"/>
+            <a:srgbClr val="CCFBF1"/>
           </a:solidFill>
           <a:ln w="19050">
             <a:solidFill>
-              <a:srgbClr val="DB2777"/>
+              <a:srgbClr val="0D9488"/>
             </a:solidFill>
             <a:prstDash val="solid"/>
           </a:ln>
@@ -33802,13 +33282,13 @@
       </p:sp>
       <p:sp>
         <p:nvSpPr>
-          <p:cNvPr id="21" name="Text 19"/>
-          <p:cNvSpPr/>
-          <p:nvPr/>
-        </p:nvSpPr>
-        <p:spPr>
-          <a:xfrm>
-            <a:off x="5803392" y="2258568"/>
+          <p:cNvPr id="20" name="Text 18"/>
+          <p:cNvSpPr/>
+          <p:nvPr/>
+        </p:nvSpPr>
+        <p:spPr>
+          <a:xfrm>
+            <a:off x="4370832" y="2258568"/>
             <a:ext cx="1828800" cy="292608"/>
           </a:xfrm>
           <a:prstGeom prst="rect">
@@ -33827,13 +33307,13 @@
             <a:r>
               <a:rPr lang="en-US" sz="1300" b="1" dirty="0">
                 <a:solidFill>
-                  <a:srgbClr val="9D174D"/>
+                  <a:srgbClr val="0F766E"/>
                 </a:solidFill>
                 <a:latin typeface="Trebuchet MS" pitchFamily="34" charset="0"/>
                 <a:ea typeface="Trebuchet MS" pitchFamily="34" charset="-122"/>
                 <a:cs typeface="Trebuchet MS" pitchFamily="34" charset="-120"/>
               </a:rPr>
-              <a:t>ed</a:t>
+              <a:t>inspire</a:t>
             </a:r>
             <a:endParaRPr lang="en-US" sz="1300" dirty="0"/>
           </a:p>
@@ -33841,13 +33321,13 @@
       </p:sp>
       <p:sp>
         <p:nvSpPr>
-          <p:cNvPr id="22" name="Text 20"/>
-          <p:cNvSpPr/>
-          <p:nvPr/>
-        </p:nvSpPr>
-        <p:spPr>
-          <a:xfrm>
-            <a:off x="5803392" y="2569464"/>
+          <p:cNvPr id="21" name="Text 19"/>
+          <p:cNvSpPr/>
+          <p:nvPr/>
+        </p:nvSpPr>
+        <p:spPr>
+          <a:xfrm>
+            <a:off x="4370832" y="2569464"/>
             <a:ext cx="1828800" cy="201168"/>
           </a:xfrm>
           <a:prstGeom prst="rect">
@@ -33872,7 +33352,7 @@
                 <a:ea typeface="Calibri" pitchFamily="34" charset="-122"/>
                 <a:cs typeface="Calibri" pitchFamily="34" charset="-120"/>
               </a:rPr>
-              <a:t>happened in the past</a:t>
+              <a:t>breathe life or feeling into</a:t>
             </a:r>
             <a:endParaRPr lang="en-US" sz="850" dirty="0"/>
           </a:p>
@@ -33880,7 +33360,158 @@
       </p:sp>
       <p:sp>
         <p:nvSpPr>
+          <p:cNvPr id="22" name="Text 20"/>
+          <p:cNvSpPr/>
+          <p:nvPr/>
+        </p:nvSpPr>
+        <p:spPr>
+          <a:xfrm>
+            <a:off x="4370832" y="2752344"/>
+            <a:ext cx="1828800" cy="182880"/>
+          </a:xfrm>
+          <a:prstGeom prst="rect">
+            <a:avLst/>
+          </a:prstGeom>
+          <a:noFill/>
+          <a:ln/>
+        </p:spPr>
+        <p:txBody>
+          <a:bodyPr wrap="square" lIns="0" tIns="0" rIns="0" bIns="0" rtlCol="0" anchor="t"/>
+          <a:lstStyle/>
+          <a:p>
+            <a:pPr algn="ctr" indent="0" marL="0">
+              <a:buNone/>
+            </a:pPr>
+            <a:r>
+              <a:rPr lang="en-US" sz="700" i="1" dirty="0">
+                <a:solidFill>
+                  <a:srgbClr val="94A3B8"/>
+                </a:solidFill>
+                <a:latin typeface="Calibri" pitchFamily="34" charset="0"/>
+                <a:ea typeface="Calibri" pitchFamily="34" charset="-122"/>
+                <a:cs typeface="Calibri" pitchFamily="34" charset="-120"/>
+              </a:rPr>
+              <a:t>base drops 'e' before vowel suffix</a:t>
+            </a:r>
+            <a:endParaRPr lang="en-US" sz="700" dirty="0"/>
+          </a:p>
+        </p:txBody>
+      </p:sp>
+      <p:sp>
+        <p:nvSpPr>
           <p:cNvPr id="23" name="Shape 21"/>
+          <p:cNvSpPr/>
+          <p:nvPr/>
+        </p:nvSpPr>
+        <p:spPr>
+          <a:xfrm>
+            <a:off x="6519672" y="2258568"/>
+            <a:ext cx="1828800" cy="292608"/>
+          </a:xfrm>
+          <a:prstGeom prst="rect">
+            <a:avLst>
+              <a:gd name="adj" fmla="val 25000"/>
+            </a:avLst>
+          </a:prstGeom>
+          <a:solidFill>
+            <a:srgbClr val="FCE7F3"/>
+          </a:solidFill>
+          <a:ln w="19050">
+            <a:solidFill>
+              <a:srgbClr val="DB2777"/>
+            </a:solidFill>
+            <a:prstDash val="solid"/>
+          </a:ln>
+          <a:effectLst>
+            <a:outerShdw sx="100000" sy="100000" kx="0" ky="0" algn="bl" rotWithShape="0" blurRad="101600" dist="38100" dir="8100000">
+              <a:srgbClr val="000000">
+                <a:alpha val="12000"/>
+              </a:srgbClr>
+            </a:outerShdw>
+          </a:effectLst>
+        </p:spPr>
+      </p:sp>
+      <p:sp>
+        <p:nvSpPr>
+          <p:cNvPr id="24" name="Text 22"/>
+          <p:cNvSpPr/>
+          <p:nvPr/>
+        </p:nvSpPr>
+        <p:spPr>
+          <a:xfrm>
+            <a:off x="6519672" y="2258568"/>
+            <a:ext cx="1828800" cy="292608"/>
+          </a:xfrm>
+          <a:prstGeom prst="rect">
+            <a:avLst/>
+          </a:prstGeom>
+          <a:noFill/>
+          <a:ln/>
+        </p:spPr>
+        <p:txBody>
+          <a:bodyPr wrap="square" lIns="0" tIns="0" rIns="0" bIns="0" rtlCol="0" anchor="ctr"/>
+          <a:lstStyle/>
+          <a:p>
+            <a:pPr algn="ctr" indent="0" marL="0">
+              <a:buNone/>
+            </a:pPr>
+            <a:r>
+              <a:rPr lang="en-US" sz="1300" b="1" dirty="0">
+                <a:solidFill>
+                  <a:srgbClr val="9D174D"/>
+                </a:solidFill>
+                <a:latin typeface="Trebuchet MS" pitchFamily="34" charset="0"/>
+                <a:ea typeface="Trebuchet MS" pitchFamily="34" charset="-122"/>
+                <a:cs typeface="Trebuchet MS" pitchFamily="34" charset="-120"/>
+              </a:rPr>
+              <a:t>ed</a:t>
+            </a:r>
+            <a:endParaRPr lang="en-US" sz="1300" dirty="0"/>
+          </a:p>
+        </p:txBody>
+      </p:sp>
+      <p:sp>
+        <p:nvSpPr>
+          <p:cNvPr id="25" name="Text 23"/>
+          <p:cNvSpPr/>
+          <p:nvPr/>
+        </p:nvSpPr>
+        <p:spPr>
+          <a:xfrm>
+            <a:off x="6519672" y="2569464"/>
+            <a:ext cx="1828800" cy="201168"/>
+          </a:xfrm>
+          <a:prstGeom prst="rect">
+            <a:avLst/>
+          </a:prstGeom>
+          <a:noFill/>
+          <a:ln/>
+        </p:spPr>
+        <p:txBody>
+          <a:bodyPr wrap="square" lIns="0" tIns="0" rIns="0" bIns="0" rtlCol="0" anchor="t"/>
+          <a:lstStyle/>
+          <a:p>
+            <a:pPr algn="ctr" indent="0" marL="0">
+              <a:buNone/>
+            </a:pPr>
+            <a:r>
+              <a:rPr lang="en-US" sz="850" dirty="0">
+                <a:solidFill>
+                  <a:srgbClr val="475569"/>
+                </a:solidFill>
+                <a:latin typeface="Calibri" pitchFamily="34" charset="0"/>
+                <a:ea typeface="Calibri" pitchFamily="34" charset="-122"/>
+                <a:cs typeface="Calibri" pitchFamily="34" charset="-120"/>
+              </a:rPr>
+              <a:t>in the past / having been done</a:t>
+            </a:r>
+            <a:endParaRPr lang="en-US" sz="850" dirty="0"/>
+          </a:p>
+        </p:txBody>
+      </p:sp>
+      <p:sp>
+        <p:nvSpPr>
+          <p:cNvPr id="26" name="Shape 24"/>
           <p:cNvSpPr/>
           <p:nvPr/>
         </p:nvSpPr>
@@ -33907,7 +33538,7 @@
       </p:sp>
       <p:sp>
         <p:nvSpPr>
-          <p:cNvPr id="24" name="Text 22"/>
+          <p:cNvPr id="27" name="Text 25"/>
           <p:cNvSpPr/>
           <p:nvPr/>
         </p:nvSpPr>
@@ -33946,7 +33577,7 @@
       </p:sp>
       <p:sp>
         <p:nvSpPr>
-          <p:cNvPr id="25" name="Shape 23"/>
+          <p:cNvPr id="28" name="Shape 26"/>
           <p:cNvSpPr/>
           <p:nvPr/>
         </p:nvSpPr>
@@ -33973,13 +33604,13 @@
       </p:sp>
       <p:sp>
         <p:nvSpPr>
-          <p:cNvPr id="26" name="Shape 24"/>
-          <p:cNvSpPr/>
-          <p:nvPr/>
-        </p:nvSpPr>
-        <p:spPr>
-          <a:xfrm>
-            <a:off x="2999232" y="3364992"/>
+          <p:cNvPr id="29" name="Shape 27"/>
+          <p:cNvSpPr/>
+          <p:nvPr/>
+        </p:nvSpPr>
+        <p:spPr>
+          <a:xfrm>
+            <a:off x="2313432" y="3364992"/>
             <a:ext cx="1645920" cy="475488"/>
           </a:xfrm>
           <a:prstGeom prst="rect">
@@ -34000,13 +33631,13 @@
       </p:sp>
       <p:sp>
         <p:nvSpPr>
-          <p:cNvPr id="27" name="Text 25"/>
-          <p:cNvSpPr/>
-          <p:nvPr/>
-        </p:nvSpPr>
-        <p:spPr>
-          <a:xfrm>
-            <a:off x="2999232" y="3364992"/>
+          <p:cNvPr id="30" name="Text 28"/>
+          <p:cNvSpPr/>
+          <p:nvPr/>
+        </p:nvSpPr>
+        <p:spPr>
+          <a:xfrm>
+            <a:off x="2313432" y="3364992"/>
             <a:ext cx="1645920" cy="475488"/>
           </a:xfrm>
           <a:prstGeom prst="rect">
@@ -34031,7 +33662,7 @@
                 <a:ea typeface="Trebuchet MS" pitchFamily="34" charset="-122"/>
                 <a:cs typeface="Trebuchet MS" pitchFamily="34" charset="-120"/>
               </a:rPr>
-              <a:t>in</a:t>
+              <a:t>re</a:t>
             </a:r>
             <a:endParaRPr lang="en-US" sz="1400" dirty="0"/>
           </a:p>
@@ -34039,14 +33670,14 @@
       </p:sp>
       <p:sp>
         <p:nvSpPr>
-          <p:cNvPr id="28" name="Text 26"/>
-          <p:cNvSpPr/>
-          <p:nvPr/>
-        </p:nvSpPr>
-        <p:spPr>
-          <a:xfrm>
-            <a:off x="4645152" y="3364992"/>
-            <a:ext cx="1097280" cy="475488"/>
+          <p:cNvPr id="31" name="Text 29"/>
+          <p:cNvSpPr/>
+          <p:nvPr/>
+        </p:nvSpPr>
+        <p:spPr>
+          <a:xfrm>
+            <a:off x="3959352" y="3364992"/>
+            <a:ext cx="411480" cy="475488"/>
           </a:xfrm>
           <a:prstGeom prst="rect">
             <a:avLst/>
@@ -34078,13 +33709,13 @@
       </p:sp>
       <p:sp>
         <p:nvSpPr>
-          <p:cNvPr id="29" name="Shape 27"/>
-          <p:cNvSpPr/>
-          <p:nvPr/>
-        </p:nvSpPr>
-        <p:spPr>
-          <a:xfrm>
-            <a:off x="5742432" y="3364992"/>
+          <p:cNvPr id="32" name="Shape 30"/>
+          <p:cNvSpPr/>
+          <p:nvPr/>
+        </p:nvSpPr>
+        <p:spPr>
+          <a:xfrm>
+            <a:off x="4370832" y="3364992"/>
             <a:ext cx="1645920" cy="475488"/>
           </a:xfrm>
           <a:prstGeom prst="rect">
@@ -34105,13 +33736,13 @@
       </p:sp>
       <p:sp>
         <p:nvSpPr>
-          <p:cNvPr id="30" name="Text 28"/>
-          <p:cNvSpPr/>
-          <p:nvPr/>
-        </p:nvSpPr>
-        <p:spPr>
-          <a:xfrm>
-            <a:off x="5742432" y="3364992"/>
+          <p:cNvPr id="33" name="Text 31"/>
+          <p:cNvSpPr/>
+          <p:nvPr/>
+        </p:nvSpPr>
+        <p:spPr>
+          <a:xfrm>
+            <a:off x="4370832" y="3364992"/>
             <a:ext cx="1645920" cy="475488"/>
           </a:xfrm>
           <a:prstGeom prst="rect">
@@ -34136,6 +33767,111 @@
                 <a:ea typeface="Trebuchet MS" pitchFamily="34" charset="-122"/>
                 <a:cs typeface="Trebuchet MS" pitchFamily="34" charset="-120"/>
               </a:rPr>
+              <a:t>in</a:t>
+            </a:r>
+            <a:endParaRPr lang="en-US" sz="1400" dirty="0"/>
+          </a:p>
+        </p:txBody>
+      </p:sp>
+      <p:sp>
+        <p:nvSpPr>
+          <p:cNvPr id="34" name="Text 32"/>
+          <p:cNvSpPr/>
+          <p:nvPr/>
+        </p:nvSpPr>
+        <p:spPr>
+          <a:xfrm>
+            <a:off x="6016752" y="3364992"/>
+            <a:ext cx="411480" cy="475488"/>
+          </a:xfrm>
+          <a:prstGeom prst="rect">
+            <a:avLst/>
+          </a:prstGeom>
+          <a:noFill/>
+          <a:ln/>
+        </p:spPr>
+        <p:txBody>
+          <a:bodyPr wrap="square" lIns="0" tIns="0" rIns="0" bIns="0" rtlCol="0" anchor="ctr"/>
+          <a:lstStyle/>
+          <a:p>
+            <a:pPr algn="ctr" indent="0" marL="0">
+              <a:buNone/>
+            </a:pPr>
+            <a:r>
+              <a:rPr lang="en-US" sz="1600" b="1" dirty="0">
+                <a:solidFill>
+                  <a:srgbClr val="0D9488"/>
+                </a:solidFill>
+                <a:latin typeface="Trebuchet MS" pitchFamily="34" charset="0"/>
+                <a:ea typeface="Trebuchet MS" pitchFamily="34" charset="-122"/>
+                <a:cs typeface="Trebuchet MS" pitchFamily="34" charset="-120"/>
+              </a:rPr>
+              <a:t>·</a:t>
+            </a:r>
+            <a:endParaRPr lang="en-US" sz="1600" dirty="0"/>
+          </a:p>
+        </p:txBody>
+      </p:sp>
+      <p:sp>
+        <p:nvSpPr>
+          <p:cNvPr id="35" name="Shape 33"/>
+          <p:cNvSpPr/>
+          <p:nvPr/>
+        </p:nvSpPr>
+        <p:spPr>
+          <a:xfrm>
+            <a:off x="6428232" y="3364992"/>
+            <a:ext cx="1645920" cy="475488"/>
+          </a:xfrm>
+          <a:prstGeom prst="rect">
+            <a:avLst>
+              <a:gd name="adj" fmla="val 9615"/>
+            </a:avLst>
+          </a:prstGeom>
+          <a:solidFill>
+            <a:srgbClr val="FFFFFF"/>
+          </a:solidFill>
+          <a:ln w="12700">
+            <a:solidFill>
+              <a:srgbClr val="0D9488"/>
+            </a:solidFill>
+            <a:prstDash val="solid"/>
+          </a:ln>
+        </p:spPr>
+      </p:sp>
+      <p:sp>
+        <p:nvSpPr>
+          <p:cNvPr id="36" name="Text 34"/>
+          <p:cNvSpPr/>
+          <p:nvPr/>
+        </p:nvSpPr>
+        <p:spPr>
+          <a:xfrm>
+            <a:off x="6428232" y="3364992"/>
+            <a:ext cx="1645920" cy="475488"/>
+          </a:xfrm>
+          <a:prstGeom prst="rect">
+            <a:avLst/>
+          </a:prstGeom>
+          <a:noFill/>
+          <a:ln/>
+        </p:spPr>
+        <p:txBody>
+          <a:bodyPr wrap="square" lIns="0" tIns="0" rIns="0" bIns="0" rtlCol="0" anchor="ctr"/>
+          <a:lstStyle/>
+          <a:p>
+            <a:pPr algn="ctr" indent="0" marL="0">
+              <a:buNone/>
+            </a:pPr>
+            <a:r>
+              <a:rPr lang="en-US" sz="1400" b="1" dirty="0">
+                <a:solidFill>
+                  <a:srgbClr val="0D9488"/>
+                </a:solidFill>
+                <a:latin typeface="Trebuchet MS" pitchFamily="34" charset="0"/>
+                <a:ea typeface="Trebuchet MS" pitchFamily="34" charset="-122"/>
+                <a:cs typeface="Trebuchet MS" pitchFamily="34" charset="-120"/>
+              </a:rPr>
               <a:t>spired</a:t>
             </a:r>
             <a:endParaRPr lang="en-US" sz="1400" dirty="0"/>
@@ -34144,7 +33880,7 @@
       </p:sp>
       <p:sp>
         <p:nvSpPr>
-          <p:cNvPr id="31" name="Shape 29"/>
+          <p:cNvPr id="37" name="Shape 35"/>
           <p:cNvSpPr/>
           <p:nvPr/>
         </p:nvSpPr>
@@ -34171,7 +33907,7 @@
       </p:sp>
       <p:sp>
         <p:nvSpPr>
-          <p:cNvPr id="32" name="Text 30"/>
+          <p:cNvPr id="38" name="Text 36"/>
           <p:cNvSpPr/>
           <p:nvPr/>
         </p:nvSpPr>
@@ -34210,7 +33946,7 @@
       </p:sp>
       <p:sp>
         <p:nvSpPr>
-          <p:cNvPr id="33" name="Shape 31"/>
+          <p:cNvPr id="39" name="Shape 37"/>
           <p:cNvSpPr/>
           <p:nvPr/>
         </p:nvSpPr>
@@ -34237,13 +33973,13 @@
       </p:sp>
       <p:sp>
         <p:nvSpPr>
-          <p:cNvPr id="34" name="Shape 32"/>
-          <p:cNvSpPr/>
-          <p:nvPr/>
-        </p:nvSpPr>
-        <p:spPr>
-          <a:xfrm>
-            <a:off x="2427732" y="4169664"/>
+          <p:cNvPr id="40" name="Shape 38"/>
+          <p:cNvSpPr/>
+          <p:nvPr/>
+        </p:nvSpPr>
+        <p:spPr>
+          <a:xfrm>
+            <a:off x="2124837" y="4169664"/>
             <a:ext cx="685800" cy="475488"/>
           </a:xfrm>
           <a:prstGeom prst="rect">
@@ -34264,13 +34000,13 @@
       </p:sp>
       <p:sp>
         <p:nvSpPr>
-          <p:cNvPr id="35" name="Text 33"/>
-          <p:cNvSpPr/>
-          <p:nvPr/>
-        </p:nvSpPr>
-        <p:spPr>
-          <a:xfrm>
-            <a:off x="2427732" y="4169664"/>
+          <p:cNvPr id="41" name="Text 39"/>
+          <p:cNvSpPr/>
+          <p:nvPr/>
+        </p:nvSpPr>
+        <p:spPr>
+          <a:xfrm>
+            <a:off x="2124837" y="4169664"/>
             <a:ext cx="685800" cy="475488"/>
           </a:xfrm>
           <a:prstGeom prst="rect">
@@ -34295,7 +34031,7 @@
                 <a:ea typeface="Trebuchet MS" pitchFamily="34" charset="-122"/>
                 <a:cs typeface="Trebuchet MS" pitchFamily="34" charset="-120"/>
               </a:rPr>
-              <a:t>i</a:t>
+              <a:t>r</a:t>
             </a:r>
             <a:endParaRPr lang="en-US" sz="900" dirty="0"/>
           </a:p>
@@ -34303,13 +34039,13 @@
       </p:sp>
       <p:sp>
         <p:nvSpPr>
-          <p:cNvPr id="36" name="Shape 34"/>
-          <p:cNvSpPr/>
-          <p:nvPr/>
-        </p:nvSpPr>
-        <p:spPr>
-          <a:xfrm>
-            <a:off x="3639312" y="4169664"/>
+          <p:cNvPr id="42" name="Shape 40"/>
+          <p:cNvSpPr/>
+          <p:nvPr/>
+        </p:nvSpPr>
+        <p:spPr>
+          <a:xfrm>
+            <a:off x="3033522" y="4169664"/>
             <a:ext cx="685800" cy="475488"/>
           </a:xfrm>
           <a:prstGeom prst="rect">
@@ -34330,13 +34066,13 @@
       </p:sp>
       <p:sp>
         <p:nvSpPr>
-          <p:cNvPr id="37" name="Text 35"/>
-          <p:cNvSpPr/>
-          <p:nvPr/>
-        </p:nvSpPr>
-        <p:spPr>
-          <a:xfrm>
-            <a:off x="3639312" y="4169664"/>
+          <p:cNvPr id="43" name="Text 41"/>
+          <p:cNvSpPr/>
+          <p:nvPr/>
+        </p:nvSpPr>
+        <p:spPr>
+          <a:xfrm>
+            <a:off x="3033522" y="4169664"/>
             <a:ext cx="685800" cy="475488"/>
           </a:xfrm>
           <a:prstGeom prst="rect">
@@ -34361,7 +34097,7 @@
                 <a:ea typeface="Trebuchet MS" pitchFamily="34" charset="-122"/>
                 <a:cs typeface="Trebuchet MS" pitchFamily="34" charset="-120"/>
               </a:rPr>
-              <a:t>n</a:t>
+              <a:t>e</a:t>
             </a:r>
             <a:endParaRPr lang="en-US" sz="900" dirty="0"/>
           </a:p>
@@ -34369,13 +34105,13 @@
       </p:sp>
       <p:sp>
         <p:nvSpPr>
-          <p:cNvPr id="38" name="Shape 36"/>
-          <p:cNvSpPr/>
-          <p:nvPr/>
-        </p:nvSpPr>
-        <p:spPr>
-          <a:xfrm>
-            <a:off x="4850892" y="4169664"/>
+          <p:cNvPr id="44" name="Shape 42"/>
+          <p:cNvSpPr/>
+          <p:nvPr/>
+        </p:nvSpPr>
+        <p:spPr>
+          <a:xfrm>
+            <a:off x="3942207" y="4169664"/>
             <a:ext cx="685800" cy="475488"/>
           </a:xfrm>
           <a:prstGeom prst="rect">
@@ -34396,13 +34132,13 @@
       </p:sp>
       <p:sp>
         <p:nvSpPr>
-          <p:cNvPr id="39" name="Text 37"/>
-          <p:cNvSpPr/>
-          <p:nvPr/>
-        </p:nvSpPr>
-        <p:spPr>
-          <a:xfrm>
-            <a:off x="4850892" y="4169664"/>
+          <p:cNvPr id="45" name="Text 43"/>
+          <p:cNvSpPr/>
+          <p:nvPr/>
+        </p:nvSpPr>
+        <p:spPr>
+          <a:xfrm>
+            <a:off x="3942207" y="4169664"/>
             <a:ext cx="685800" cy="475488"/>
           </a:xfrm>
           <a:prstGeom prst="rect">
@@ -34427,7 +34163,7 @@
                 <a:ea typeface="Trebuchet MS" pitchFamily="34" charset="-122"/>
                 <a:cs typeface="Trebuchet MS" pitchFamily="34" charset="-120"/>
               </a:rPr>
-              <a:t>sp</a:t>
+              <a:t>i</a:t>
             </a:r>
             <a:endParaRPr lang="en-US" sz="900" dirty="0"/>
           </a:p>
@@ -34435,13 +34171,13 @@
       </p:sp>
       <p:sp>
         <p:nvSpPr>
-          <p:cNvPr id="40" name="Shape 38"/>
-          <p:cNvSpPr/>
-          <p:nvPr/>
-        </p:nvSpPr>
-        <p:spPr>
-          <a:xfrm>
-            <a:off x="6062472" y="4169664"/>
+          <p:cNvPr id="46" name="Shape 44"/>
+          <p:cNvSpPr/>
+          <p:nvPr/>
+        </p:nvSpPr>
+        <p:spPr>
+          <a:xfrm>
+            <a:off x="4850892" y="4169664"/>
             <a:ext cx="685800" cy="475488"/>
           </a:xfrm>
           <a:prstGeom prst="rect">
@@ -34462,13 +34198,13 @@
       </p:sp>
       <p:sp>
         <p:nvSpPr>
-          <p:cNvPr id="41" name="Text 39"/>
-          <p:cNvSpPr/>
-          <p:nvPr/>
-        </p:nvSpPr>
-        <p:spPr>
-          <a:xfrm>
-            <a:off x="6062472" y="4169664"/>
+          <p:cNvPr id="47" name="Text 45"/>
+          <p:cNvSpPr/>
+          <p:nvPr/>
+        </p:nvSpPr>
+        <p:spPr>
+          <a:xfrm>
+            <a:off x="4850892" y="4169664"/>
             <a:ext cx="685800" cy="475488"/>
           </a:xfrm>
           <a:prstGeom prst="rect">
@@ -34493,7 +34229,7 @@
                 <a:ea typeface="Trebuchet MS" pitchFamily="34" charset="-122"/>
                 <a:cs typeface="Trebuchet MS" pitchFamily="34" charset="-120"/>
               </a:rPr>
-              <a:t>ir</a:t>
+              <a:t>n</a:t>
             </a:r>
             <a:endParaRPr lang="en-US" sz="900" dirty="0"/>
           </a:p>
@@ -34501,13 +34237,13 @@
       </p:sp>
       <p:sp>
         <p:nvSpPr>
-          <p:cNvPr id="42" name="Shape 40"/>
-          <p:cNvSpPr/>
-          <p:nvPr/>
-        </p:nvSpPr>
-        <p:spPr>
-          <a:xfrm>
-            <a:off x="7274052" y="4169664"/>
+          <p:cNvPr id="48" name="Shape 46"/>
+          <p:cNvSpPr/>
+          <p:nvPr/>
+        </p:nvSpPr>
+        <p:spPr>
+          <a:xfrm>
+            <a:off x="5759577" y="4169664"/>
             <a:ext cx="685800" cy="475488"/>
           </a:xfrm>
           <a:prstGeom prst="rect">
@@ -34528,13 +34264,145 @@
       </p:sp>
       <p:sp>
         <p:nvSpPr>
-          <p:cNvPr id="43" name="Text 41"/>
-          <p:cNvSpPr/>
-          <p:nvPr/>
-        </p:nvSpPr>
-        <p:spPr>
-          <a:xfrm>
-            <a:off x="7274052" y="4169664"/>
+          <p:cNvPr id="49" name="Text 47"/>
+          <p:cNvSpPr/>
+          <p:nvPr/>
+        </p:nvSpPr>
+        <p:spPr>
+          <a:xfrm>
+            <a:off x="5759577" y="4169664"/>
+            <a:ext cx="685800" cy="475488"/>
+          </a:xfrm>
+          <a:prstGeom prst="rect">
+            <a:avLst/>
+          </a:prstGeom>
+          <a:noFill/>
+          <a:ln/>
+        </p:spPr>
+        <p:txBody>
+          <a:bodyPr wrap="square" lIns="0" tIns="0" rIns="0" bIns="0" rtlCol="0" anchor="ctr"/>
+          <a:lstStyle/>
+          <a:p>
+            <a:pPr algn="ctr" indent="0" marL="0">
+              <a:buNone/>
+            </a:pPr>
+            <a:r>
+              <a:rPr lang="en-US" sz="900" b="1" dirty="0">
+                <a:solidFill>
+                  <a:srgbClr val="9D174D"/>
+                </a:solidFill>
+                <a:latin typeface="Trebuchet MS" pitchFamily="34" charset="0"/>
+                <a:ea typeface="Trebuchet MS" pitchFamily="34" charset="-122"/>
+                <a:cs typeface="Trebuchet MS" pitchFamily="34" charset="-120"/>
+              </a:rPr>
+              <a:t>sp</a:t>
+            </a:r>
+            <a:endParaRPr lang="en-US" sz="900" dirty="0"/>
+          </a:p>
+        </p:txBody>
+      </p:sp>
+      <p:sp>
+        <p:nvSpPr>
+          <p:cNvPr id="50" name="Shape 48"/>
+          <p:cNvSpPr/>
+          <p:nvPr/>
+        </p:nvSpPr>
+        <p:spPr>
+          <a:xfrm>
+            <a:off x="6668262" y="4169664"/>
+            <a:ext cx="685800" cy="475488"/>
+          </a:xfrm>
+          <a:prstGeom prst="rect">
+            <a:avLst>
+              <a:gd name="adj" fmla="val 7692"/>
+            </a:avLst>
+          </a:prstGeom>
+          <a:solidFill>
+            <a:srgbClr val="FFFFFF"/>
+          </a:solidFill>
+          <a:ln w="12700">
+            <a:solidFill>
+              <a:srgbClr val="DB2777"/>
+            </a:solidFill>
+            <a:prstDash val="solid"/>
+          </a:ln>
+        </p:spPr>
+      </p:sp>
+      <p:sp>
+        <p:nvSpPr>
+          <p:cNvPr id="51" name="Text 49"/>
+          <p:cNvSpPr/>
+          <p:nvPr/>
+        </p:nvSpPr>
+        <p:spPr>
+          <a:xfrm>
+            <a:off x="6668262" y="4169664"/>
+            <a:ext cx="685800" cy="475488"/>
+          </a:xfrm>
+          <a:prstGeom prst="rect">
+            <a:avLst/>
+          </a:prstGeom>
+          <a:noFill/>
+          <a:ln/>
+        </p:spPr>
+        <p:txBody>
+          <a:bodyPr wrap="square" lIns="0" tIns="0" rIns="0" bIns="0" rtlCol="0" anchor="ctr"/>
+          <a:lstStyle/>
+          <a:p>
+            <a:pPr algn="ctr" indent="0" marL="0">
+              <a:buNone/>
+            </a:pPr>
+            <a:r>
+              <a:rPr lang="en-US" sz="900" b="1" dirty="0">
+                <a:solidFill>
+                  <a:srgbClr val="9D174D"/>
+                </a:solidFill>
+                <a:latin typeface="Trebuchet MS" pitchFamily="34" charset="0"/>
+                <a:ea typeface="Trebuchet MS" pitchFamily="34" charset="-122"/>
+                <a:cs typeface="Trebuchet MS" pitchFamily="34" charset="-120"/>
+              </a:rPr>
+              <a:t>ir</a:t>
+            </a:r>
+            <a:endParaRPr lang="en-US" sz="900" dirty="0"/>
+          </a:p>
+        </p:txBody>
+      </p:sp>
+      <p:sp>
+        <p:nvSpPr>
+          <p:cNvPr id="52" name="Shape 50"/>
+          <p:cNvSpPr/>
+          <p:nvPr/>
+        </p:nvSpPr>
+        <p:spPr>
+          <a:xfrm>
+            <a:off x="7576947" y="4169664"/>
+            <a:ext cx="685800" cy="475488"/>
+          </a:xfrm>
+          <a:prstGeom prst="rect">
+            <a:avLst>
+              <a:gd name="adj" fmla="val 7692"/>
+            </a:avLst>
+          </a:prstGeom>
+          <a:solidFill>
+            <a:srgbClr val="FFFFFF"/>
+          </a:solidFill>
+          <a:ln w="12700">
+            <a:solidFill>
+              <a:srgbClr val="DB2777"/>
+            </a:solidFill>
+            <a:prstDash val="solid"/>
+          </a:ln>
+        </p:spPr>
+      </p:sp>
+      <p:sp>
+        <p:nvSpPr>
+          <p:cNvPr id="53" name="Text 51"/>
+          <p:cNvSpPr/>
+          <p:nvPr/>
+        </p:nvSpPr>
+        <p:spPr>
+          <a:xfrm>
+            <a:off x="7576947" y="4169664"/>
             <a:ext cx="685800" cy="475488"/>
           </a:xfrm>
           <a:prstGeom prst="rect">
@@ -34851,7 +34719,7 @@
                 <a:ea typeface="Calibri" pitchFamily="34" charset="-122"/>
                 <a:cs typeface="Calibri" pitchFamily="34" charset="-120"/>
               </a:rPr>
-              <a:t>Word Labs  •  wordlabs.app  •  Root: 'inspire' = to breathe life or ideas</a:t>
+              <a:t>Word Labs  •  wordlabs.app  •  Root: 'inspire' = breathe life or feeling into</a:t>
             </a:r>
             <a:endParaRPr lang="en-US" sz="800" dirty="0"/>
           </a:p>
@@ -36020,7 +35888,7 @@
                 <a:ea typeface="Calibri" pitchFamily="34" charset="-122"/>
                 <a:cs typeface="Calibri" pitchFamily="34" charset="-120"/>
               </a:rPr>
-              <a:t>Word Labs  •  wordlabs.app  •  Root: 'inspire' = to breathe life or ideas</a:t>
+              <a:t>Word Labs  •  wordlabs.app  •  Root: 'inspire' = breathe life or feeling into</a:t>
             </a:r>
             <a:endParaRPr lang="en-US" sz="800" dirty="0"/>
           </a:p>
@@ -36908,7 +36776,7 @@
                 <a:ea typeface="Trebuchet MS" pitchFamily="34" charset="-122"/>
                 <a:cs typeface="Trebuchet MS" pitchFamily="34" charset="-120"/>
               </a:rPr>
-              <a:t>-ational</a:t>
+              <a:t>-er</a:t>
             </a:r>
             <a:endParaRPr lang="en-US" sz="1300" dirty="0"/>
           </a:p>
@@ -36972,7 +36840,7 @@
                 <a:ea typeface="Trebuchet MS" pitchFamily="34" charset="-122"/>
                 <a:cs typeface="Trebuchet MS" pitchFamily="34" charset="-120"/>
               </a:rPr>
-              <a:t>ex-</a:t>
+              <a:t>trans-</a:t>
             </a:r>
             <a:endParaRPr lang="en-US" sz="1300" dirty="0"/>
           </a:p>
@@ -37061,7 +36929,7 @@
                 <a:ea typeface="Trebuchet MS" pitchFamily="34" charset="-122"/>
                 <a:cs typeface="Trebuchet MS" pitchFamily="34" charset="-120"/>
               </a:rPr>
-              <a:t>-er</a:t>
+              <a:t>-ational</a:t>
             </a:r>
             <a:endParaRPr lang="en-US" sz="1300" dirty="0"/>
           </a:p>
@@ -37628,7 +37496,7 @@
                 <a:ea typeface="Trebuchet MS" pitchFamily="34" charset="-122"/>
                 <a:cs typeface="Trebuchet MS" pitchFamily="34" charset="-120"/>
               </a:rPr>
-              <a:t>inspirer</a:t>
+              <a:t>inspirationally</a:t>
             </a:r>
             <a:endParaRPr lang="en-US" sz="1200" dirty="0"/>
           </a:p>
@@ -37920,7 +37788,7 @@
                 <a:ea typeface="Calibri" pitchFamily="34" charset="-122"/>
                 <a:cs typeface="Calibri" pitchFamily="34" charset="-120"/>
               </a:rPr>
-              <a:t>Word Labs  •  wordlabs.app  •  Root: 'inspire' = to breathe life or ideas</a:t>
+              <a:t>Word Labs  •  wordlabs.app  •  Root: 'inspire' = breathe life or feeling into</a:t>
             </a:r>
             <a:endParaRPr lang="en-US" sz="800" dirty="0"/>
           </a:p>
@@ -38084,7 +37952,7 @@
                 <a:ea typeface="Calibri" pitchFamily="34" charset="-122"/>
                 <a:cs typeface="Calibri" pitchFamily="34" charset="-120"/>
               </a:rPr>
-              <a:t>The core part of a word carrying its basic meaning. For example, 'inspire' means 'to breathe life or ideas'.</a:t>
+              <a:t>The core part of a word carrying its basic meaning. For example, 'inspire' means 'breathe life or feeling into'.</a:t>
             </a:r>
             <a:endParaRPr lang="en-US" sz="1350" dirty="0"/>
           </a:p>
@@ -38704,7 +38572,7 @@
                 <a:ea typeface="Calibri" pitchFamily="34" charset="-122"/>
                 <a:cs typeface="Calibri" pitchFamily="34" charset="-120"/>
               </a:rPr>
-              <a:t>Word Labs  •  wordlabs.app  •  Root: 'inspire' = to breathe life or ideas</a:t>
+              <a:t>Word Labs  •  wordlabs.app  •  Root: 'inspire' = breathe life or feeling into</a:t>
             </a:r>
             <a:endParaRPr lang="en-US" sz="800" dirty="0"/>
           </a:p>
@@ -38816,7 +38684,7 @@
                 <a:ea typeface="Calibri" pitchFamily="34" charset="-122"/>
                 <a:cs typeface="Calibri" pitchFamily="34" charset="-120"/>
               </a:rPr>
-              <a:t>1.  The root 'inspire' comes from a Latin word meaning to breathe into.</a:t>
+              <a:t>1.  Adding the suffix '-ation' to 'inspire' makes the noun 'inspiration'.</a:t>
             </a:r>
             <a:endParaRPr lang="en-US" sz="1300" dirty="0"/>
           </a:p>
@@ -38955,7 +38823,7 @@
                 <a:ea typeface="Calibri" pitchFamily="34" charset="-122"/>
                 <a:cs typeface="Calibri" pitchFamily="34" charset="-120"/>
               </a:rPr>
-              <a:t>2.  The word 'uninspired' means feeling very excited and full of great ideas.</a:t>
+              <a:t>2.  The root 'inspire' comes from a Latin word meaning to breathe into.</a:t>
             </a:r>
             <a:endParaRPr lang="en-US" sz="1300" dirty="0"/>
           </a:p>
@@ -38978,11 +38846,11 @@
             </a:avLst>
           </a:prstGeom>
           <a:solidFill>
-            <a:srgbClr val="FEE2E2"/>
-          </a:solidFill>
-          <a:ln w="12700">
-            <a:solidFill>
-              <a:srgbClr val="DC2626"/>
+            <a:srgbClr val="DCFCE7"/>
+          </a:solidFill>
+          <a:ln w="12700">
+            <a:solidFill>
+              <a:srgbClr val="16A34A"/>
             </a:solidFill>
             <a:prstDash val="solid"/>
           </a:ln>
@@ -39015,13 +38883,13 @@
             <a:r>
               <a:rPr lang="en-US" sz="1100" b="1" dirty="0">
                 <a:solidFill>
-                  <a:srgbClr val="DC2626"/>
+                  <a:srgbClr val="16A34A"/>
                 </a:solidFill>
                 <a:latin typeface="Trebuchet MS" pitchFamily="34" charset="0"/>
                 <a:ea typeface="Trebuchet MS" pitchFamily="34" charset="-122"/>
                 <a:cs typeface="Trebuchet MS" pitchFamily="34" charset="-120"/>
               </a:rPr>
-              <a:t>FALSE</a:t>
+              <a:t>TRUE</a:t>
             </a:r>
             <a:endParaRPr lang="en-US" sz="1100" dirty="0"/>
           </a:p>
@@ -39094,7 +38962,7 @@
                 <a:ea typeface="Calibri" pitchFamily="34" charset="-122"/>
                 <a:cs typeface="Calibri" pitchFamily="34" charset="-120"/>
               </a:rPr>
-              <a:t>3.  The word 'inspirational' contains the root 'inspire'.</a:t>
+              <a:t>3.  The word 'uninspired' means feeling very excited and full of energy.</a:t>
             </a:r>
             <a:endParaRPr lang="en-US" sz="1300" dirty="0"/>
           </a:p>
@@ -39117,11 +38985,11 @@
             </a:avLst>
           </a:prstGeom>
           <a:solidFill>
-            <a:srgbClr val="DCFCE7"/>
-          </a:solidFill>
-          <a:ln w="12700">
-            <a:solidFill>
-              <a:srgbClr val="16A34A"/>
+            <a:srgbClr val="FEE2E2"/>
+          </a:solidFill>
+          <a:ln w="12700">
+            <a:solidFill>
+              <a:srgbClr val="DC2626"/>
             </a:solidFill>
             <a:prstDash val="solid"/>
           </a:ln>
@@ -39154,13 +39022,13 @@
             <a:r>
               <a:rPr lang="en-US" sz="1100" b="1" dirty="0">
                 <a:solidFill>
-                  <a:srgbClr val="16A34A"/>
+                  <a:srgbClr val="DC2626"/>
                 </a:solidFill>
                 <a:latin typeface="Trebuchet MS" pitchFamily="34" charset="0"/>
                 <a:ea typeface="Trebuchet MS" pitchFamily="34" charset="-122"/>
                 <a:cs typeface="Trebuchet MS" pitchFamily="34" charset="-120"/>
               </a:rPr>
-              <a:t>TRUE</a:t>
+              <a:t>FALSE</a:t>
             </a:r>
             <a:endParaRPr lang="en-US" sz="1100" dirty="0"/>
           </a:p>
@@ -39233,7 +39101,7 @@
                 <a:ea typeface="Calibri" pitchFamily="34" charset="-122"/>
                 <a:cs typeface="Calibri" pitchFamily="34" charset="-120"/>
               </a:rPr>
-              <a:t>4.  An 'inspirer' is someone who motivates and encourages others.</a:t>
+              <a:t>4.  An 'inspirational' speech is one that encourages people to do their best.</a:t>
             </a:r>
             <a:endParaRPr lang="en-US" sz="1300" dirty="0"/>
           </a:p>
@@ -39372,7 +39240,7 @@
                 <a:ea typeface="Calibri" pitchFamily="34" charset="-122"/>
                 <a:cs typeface="Calibri" pitchFamily="34" charset="-120"/>
               </a:rPr>
-              <a:t>5.  The suffix '-ation' turns the root 'inspire' into an adjective.</a:t>
+              <a:t>5.  The prefix 're-' in 'reinspire' means the opposite of something.</a:t>
             </a:r>
             <a:endParaRPr lang="en-US" sz="1300" dirty="0"/>
           </a:p>
@@ -39730,7 +39598,7 @@
                 <a:ea typeface="Calibri" pitchFamily="34" charset="-122"/>
                 <a:cs typeface="Calibri" pitchFamily="34" charset="-120"/>
               </a:rPr>
-              <a:t>Word Labs  •  wordlabs.app  •  Root: 'inspire' = to breathe life or ideas</a:t>
+              <a:t>Word Labs  •  wordlabs.app  •  Root: 'inspire' = breathe life or feeling into</a:t>
             </a:r>
             <a:endParaRPr lang="en-US" sz="800" dirty="0"/>
           </a:p>
@@ -39867,7 +39735,7 @@
                 <a:ea typeface="Trebuchet MS" pitchFamily="34" charset="-122"/>
                 <a:cs typeface="Trebuchet MS" pitchFamily="34" charset="-120"/>
               </a:rPr>
-              <a:t>to breathe life or ideas</a:t>
+              <a:t>breathe life or feeling into</a:t>
             </a:r>
             <a:endParaRPr lang="en-US" sz="2000" dirty="0"/>
           </a:p>
@@ -40699,7 +40567,7 @@
                 <a:ea typeface="Calibri" pitchFamily="34" charset="-122"/>
                 <a:cs typeface="Calibri" pitchFamily="34" charset="-120"/>
               </a:rPr>
-              <a:t>Word Labs  •  wordlabs.app  •  Root: 'inspire' = to breathe life or ideas</a:t>
+              <a:t>Word Labs  •  wordlabs.app  •  Root: 'inspire' = breathe life or feeling into</a:t>
             </a:r>
             <a:endParaRPr lang="en-US" sz="800" dirty="0"/>
           </a:p>
@@ -41587,7 +41455,7 @@
                 <a:ea typeface="Trebuchet MS" pitchFamily="34" charset="-122"/>
                 <a:cs typeface="Trebuchet MS" pitchFamily="34" charset="-120"/>
               </a:rPr>
-              <a:t>-ational</a:t>
+              <a:t>-er</a:t>
             </a:r>
             <a:endParaRPr lang="en-US" sz="1300" dirty="0"/>
           </a:p>
@@ -41651,7 +41519,7 @@
                 <a:ea typeface="Trebuchet MS" pitchFamily="34" charset="-122"/>
                 <a:cs typeface="Trebuchet MS" pitchFamily="34" charset="-120"/>
               </a:rPr>
-              <a:t>ex-</a:t>
+              <a:t>trans-</a:t>
             </a:r>
             <a:endParaRPr lang="en-US" sz="1300" dirty="0"/>
           </a:p>
@@ -41740,7 +41608,7 @@
                 <a:ea typeface="Trebuchet MS" pitchFamily="34" charset="-122"/>
                 <a:cs typeface="Trebuchet MS" pitchFamily="34" charset="-120"/>
               </a:rPr>
-              <a:t>-er</a:t>
+              <a:t>-ational</a:t>
             </a:r>
             <a:endParaRPr lang="en-US" sz="1300" dirty="0"/>
           </a:p>
@@ -42473,7 +42341,7 @@
                 <a:ea typeface="Calibri" pitchFamily="34" charset="-122"/>
                 <a:cs typeface="Calibri" pitchFamily="34" charset="-120"/>
               </a:rPr>
-              <a:t>Word Labs  •  wordlabs.app  •  Root: 'inspire' = to breathe life or ideas</a:t>
+              <a:t>Word Labs  •  wordlabs.app  •  Root: 'inspire' = breathe life or feeling into</a:t>
             </a:r>
             <a:endParaRPr lang="en-US" sz="800" dirty="0"/>
           </a:p>
@@ -42651,7 +42519,7 @@
                 <a:ea typeface="Calibri" pitchFamily="34" charset="-122"/>
                 <a:cs typeface="Calibri" pitchFamily="34" charset="-120"/>
               </a:rPr>
-              <a:t>To bring back someone's excitement or motivation after it has faded away.</a:t>
+              <a:t>To give someone a fresh burst of motivation or excitement again.</a:t>
             </a:r>
             <a:endParaRPr lang="en-US" sz="1200" dirty="0"/>
           </a:p>
@@ -42790,7 +42658,7 @@
                 <a:ea typeface="Calibri" pitchFamily="34" charset="-122"/>
                 <a:cs typeface="Calibri" pitchFamily="34" charset="-120"/>
               </a:rPr>
-              <a:t>To make someone feel excited and want to do something great.</a:t>
+              <a:t>To fill someone with excitement or a strong feeling to do something great.</a:t>
             </a:r>
             <a:endParaRPr lang="en-US" sz="1200" dirty="0"/>
           </a:p>
@@ -42929,7 +42797,7 @@
                 <a:ea typeface="Calibri" pitchFamily="34" charset="-122"/>
                 <a:cs typeface="Calibri" pitchFamily="34" charset="-120"/>
               </a:rPr>
-              <a:t>A person, thing, or idea that gives you the urge to do something creative or amazing.</a:t>
+              <a:t>A person, idea, or thing that gives you the energy and desire to do something wonderful.</a:t>
             </a:r>
             <a:endParaRPr lang="en-US" sz="1200" dirty="0"/>
           </a:p>
@@ -43068,7 +42936,7 @@
                 <a:ea typeface="Calibri" pitchFamily="34" charset="-122"/>
                 <a:cs typeface="Calibri" pitchFamily="34" charset="-120"/>
               </a:rPr>
-              <a:t>Describing something that fills people with excitement and the desire to do their best.</a:t>
+              <a:t>Something that strongly encourages or motivates people to do their best.</a:t>
             </a:r>
             <a:endParaRPr lang="en-US" sz="1200" dirty="0"/>
           </a:p>
@@ -43207,7 +43075,7 @@
                 <a:ea typeface="Calibri" pitchFamily="34" charset="-122"/>
                 <a:cs typeface="Calibri" pitchFamily="34" charset="-120"/>
               </a:rPr>
-              <a:t>Feeling bored or not at all motivated to be creative or try something new.</a:t>
+              <a:t>Feeling dull, flat, or not at all excited or motivated.</a:t>
             </a:r>
             <a:endParaRPr lang="en-US" sz="1200" dirty="0"/>
           </a:p>
@@ -43346,7 +43214,7 @@
                 <a:ea typeface="Calibri" pitchFamily="34" charset="-122"/>
                 <a:cs typeface="Calibri" pitchFamily="34" charset="-120"/>
               </a:rPr>
-              <a:t>Something that makes you feel excited and ready to try hard.</a:t>
+              <a:t>Something or someone that makes you feel enthusiastic and ready to act.</a:t>
             </a:r>
             <a:endParaRPr lang="en-US" sz="1200" dirty="0"/>
           </a:p>
@@ -43485,7 +43353,7 @@
                 <a:ea typeface="Calibri" pitchFamily="34" charset="-122"/>
                 <a:cs typeface="Calibri" pitchFamily="34" charset="-120"/>
               </a:rPr>
-              <a:t>Feeling full of great ideas or motivation to do something.</a:t>
+              <a:t>Feeling very excited and motivated to create or do something.</a:t>
             </a:r>
             <a:endParaRPr lang="en-US" sz="1200" dirty="0"/>
           </a:p>
@@ -43777,7 +43645,7 @@
                 <a:ea typeface="Calibri" pitchFamily="34" charset="-122"/>
                 <a:cs typeface="Calibri" pitchFamily="34" charset="-120"/>
               </a:rPr>
-              <a:t>Word Labs  •  wordlabs.app  •  Root: 'inspire' = to breathe life or ideas</a:t>
+              <a:t>Word Labs  •  wordlabs.app  •  Root: 'inspire' = breathe life or feeling into</a:t>
             </a:r>
             <a:endParaRPr lang="en-US" sz="800" dirty="0"/>
           </a:p>
@@ -43980,7 +43848,7 @@
                 <a:ea typeface="Calibri" pitchFamily="34" charset="-122"/>
                 <a:cs typeface="Calibri" pitchFamily="34" charset="-120"/>
               </a:rPr>
-              <a:t>Our teacher told us that the famous scientist was an inspiration to young people all around the world.</a:t>
+              <a:t>The athlete's determination was so inspiring that the whole crowd cheered loudly.</a:t>
             </a:r>
             <a:endParaRPr lang="en-US" sz="1500" dirty="0"/>
           </a:p>
@@ -44144,7 +44012,7 @@
                 <a:ea typeface="Calibri" pitchFamily="34" charset="-122"/>
                 <a:cs typeface="Calibri" pitchFamily="34" charset="-120"/>
               </a:rPr>
-              <a:t>After watching the Olympic athletes compete, Mia felt truly inspired to train harder at swimming.</a:t>
+              <a:t>Our teacher said that reading great books can spark inspiration for your own writing.</a:t>
             </a:r>
             <a:endParaRPr lang="en-US" sz="1500" dirty="0"/>
           </a:p>
@@ -44308,7 +44176,171 @@
                 <a:ea typeface="Calibri" pitchFamily="34" charset="-122"/>
                 <a:cs typeface="Calibri" pitchFamily="34" charset="-120"/>
               </a:rPr>
-              <a:t>The coach gave an inspiring speech before the game that made every player believe they could win.</a:t>
+              <a:t>Mia felt truly inspired after watching the documentary about wildlife conservation.</a:t>
+            </a:r>
+            <a:endParaRPr lang="en-US" sz="1500" dirty="0"/>
+          </a:p>
+        </p:txBody>
+      </p:sp>
+      <p:sp>
+        <p:nvSpPr>
+          <p:cNvPr id="26" name="Shape 24"/>
+          <p:cNvSpPr/>
+          <p:nvPr/>
+        </p:nvSpPr>
+        <p:spPr>
+          <a:xfrm>
+            <a:off x="365760" y="4882896"/>
+            <a:ext cx="8412480" cy="1005840"/>
+          </a:xfrm>
+          <a:prstGeom prst="rect">
+            <a:avLst>
+              <a:gd name="adj" fmla="val 9091"/>
+            </a:avLst>
+          </a:prstGeom>
+          <a:solidFill>
+            <a:srgbClr val="F8FAFC"/>
+          </a:solidFill>
+          <a:ln w="12700">
+            <a:solidFill>
+              <a:srgbClr val="E2E8F0"/>
+            </a:solidFill>
+            <a:prstDash val="solid"/>
+          </a:ln>
+          <a:effectLst>
+            <a:outerShdw sx="100000" sy="100000" kx="0" ky="0" algn="bl" rotWithShape="0" blurRad="101600" dist="38100" dir="8100000">
+              <a:srgbClr val="000000">
+                <a:alpha val="12000"/>
+              </a:srgbClr>
+            </a:outerShdw>
+          </a:effectLst>
+        </p:spPr>
+      </p:sp>
+      <p:sp>
+        <p:nvSpPr>
+          <p:cNvPr id="27" name="Shape 25"/>
+          <p:cNvSpPr/>
+          <p:nvPr/>
+        </p:nvSpPr>
+        <p:spPr>
+          <a:xfrm>
+            <a:off x="365760" y="4882896"/>
+            <a:ext cx="502920" cy="1005840"/>
+          </a:xfrm>
+          <a:prstGeom prst="rect">
+            <a:avLst>
+              <a:gd name="adj" fmla="val 18182"/>
+            </a:avLst>
+          </a:prstGeom>
+          <a:solidFill>
+            <a:srgbClr val="4338CA"/>
+          </a:solidFill>
+          <a:ln w="12700">
+            <a:solidFill>
+              <a:srgbClr val="4338CA"/>
+            </a:solidFill>
+            <a:prstDash val="solid"/>
+          </a:ln>
+        </p:spPr>
+      </p:sp>
+      <p:sp>
+        <p:nvSpPr>
+          <p:cNvPr id="28" name="Shape 26"/>
+          <p:cNvSpPr/>
+          <p:nvPr/>
+        </p:nvSpPr>
+        <p:spPr>
+          <a:xfrm>
+            <a:off x="713232" y="4882896"/>
+            <a:ext cx="91440" cy="1005840"/>
+          </a:xfrm>
+          <a:prstGeom prst="rect">
+            <a:avLst/>
+          </a:prstGeom>
+          <a:solidFill>
+            <a:srgbClr val="4338CA"/>
+          </a:solidFill>
+          <a:ln w="12700">
+            <a:solidFill>
+              <a:srgbClr val="4338CA"/>
+            </a:solidFill>
+            <a:prstDash val="solid"/>
+          </a:ln>
+        </p:spPr>
+      </p:sp>
+      <p:sp>
+        <p:nvSpPr>
+          <p:cNvPr id="29" name="Text 27"/>
+          <p:cNvSpPr/>
+          <p:nvPr/>
+        </p:nvSpPr>
+        <p:spPr>
+          <a:xfrm>
+            <a:off x="365760" y="4882896"/>
+            <a:ext cx="502920" cy="1005840"/>
+          </a:xfrm>
+          <a:prstGeom prst="rect">
+            <a:avLst/>
+          </a:prstGeom>
+          <a:noFill/>
+          <a:ln/>
+        </p:spPr>
+        <p:txBody>
+          <a:bodyPr wrap="square" lIns="0" tIns="0" rIns="0" bIns="0" rtlCol="0" anchor="ctr"/>
+          <a:lstStyle/>
+          <a:p>
+            <a:pPr algn="ctr" indent="0" marL="0">
+              <a:buNone/>
+            </a:pPr>
+            <a:r>
+              <a:rPr lang="en-US" sz="2000" b="1" dirty="0">
+                <a:solidFill>
+                  <a:srgbClr val="FFFFFF"/>
+                </a:solidFill>
+                <a:latin typeface="Trebuchet MS" pitchFamily="34" charset="0"/>
+                <a:ea typeface="Trebuchet MS" pitchFamily="34" charset="-122"/>
+                <a:cs typeface="Trebuchet MS" pitchFamily="34" charset="-120"/>
+              </a:rPr>
+              <a:t>4</a:t>
+            </a:r>
+            <a:endParaRPr lang="en-US" sz="2000" dirty="0"/>
+          </a:p>
+        </p:txBody>
+      </p:sp>
+      <p:sp>
+        <p:nvSpPr>
+          <p:cNvPr id="30" name="Text 28"/>
+          <p:cNvSpPr/>
+          <p:nvPr/>
+        </p:nvSpPr>
+        <p:spPr>
+          <a:xfrm>
+            <a:off x="960120" y="4928616"/>
+            <a:ext cx="7635240" cy="914400"/>
+          </a:xfrm>
+          <a:prstGeom prst="rect">
+            <a:avLst/>
+          </a:prstGeom>
+          <a:noFill/>
+          <a:ln/>
+        </p:spPr>
+        <p:txBody>
+          <a:bodyPr wrap="square" rtlCol="0" anchor="ctr"/>
+          <a:lstStyle/>
+          <a:p>
+            <a:pPr algn="l" indent="0" marL="0">
+              <a:buNone/>
+            </a:pPr>
+            <a:r>
+              <a:rPr lang="en-US" sz="1500" dirty="0">
+                <a:solidFill>
+                  <a:srgbClr val="0F172A"/>
+                </a:solidFill>
+                <a:latin typeface="Calibri" pitchFamily="34" charset="0"/>
+                <a:ea typeface="Calibri" pitchFamily="34" charset="-122"/>
+                <a:cs typeface="Calibri" pitchFamily="34" charset="-120"/>
+              </a:rPr>
+              <a:t>The mural painted on the school wall was described as inspirational by everyone who saw it.</a:t>
             </a:r>
             <a:endParaRPr lang="en-US" sz="1500" dirty="0"/>
           </a:p>
